--- a/Final/Figures/Rrange.pptx
+++ b/Final/Figures/Rrange.pptx
@@ -6,6 +6,7 @@
   </p:sldMasterIdLst>
   <p:sldIdLst>
     <p:sldId id="256" r:id="rId2"/>
+    <p:sldId id="257" r:id="rId3"/>
   </p:sldIdLst>
   <p:sldSz cx="9906000" cy="6858000" type="A4"/>
   <p:notesSz cx="6858000" cy="9144000"/>
@@ -243,7 +244,7 @@
           <a:p>
             <a:fld id="{96B2E576-E176-4636-8106-C6403D35D5FE}" type="datetimeFigureOut">
               <a:rPr lang="zh-TW" altLang="en-US" smtClean="0"/>
-              <a:t>2026/6/9</a:t>
+              <a:t>2026/6/30</a:t>
             </a:fld>
             <a:endParaRPr lang="zh-TW" altLang="en-US"/>
           </a:p>
@@ -413,7 +414,7 @@
           <a:p>
             <a:fld id="{96B2E576-E176-4636-8106-C6403D35D5FE}" type="datetimeFigureOut">
               <a:rPr lang="zh-TW" altLang="en-US" smtClean="0"/>
-              <a:t>2026/6/9</a:t>
+              <a:t>2026/6/30</a:t>
             </a:fld>
             <a:endParaRPr lang="zh-TW" altLang="en-US"/>
           </a:p>
@@ -593,7 +594,7 @@
           <a:p>
             <a:fld id="{96B2E576-E176-4636-8106-C6403D35D5FE}" type="datetimeFigureOut">
               <a:rPr lang="zh-TW" altLang="en-US" smtClean="0"/>
-              <a:t>2026/6/9</a:t>
+              <a:t>2026/6/30</a:t>
             </a:fld>
             <a:endParaRPr lang="zh-TW" altLang="en-US"/>
           </a:p>
@@ -763,7 +764,7 @@
           <a:p>
             <a:fld id="{96B2E576-E176-4636-8106-C6403D35D5FE}" type="datetimeFigureOut">
               <a:rPr lang="zh-TW" altLang="en-US" smtClean="0"/>
-              <a:t>2026/6/9</a:t>
+              <a:t>2026/6/30</a:t>
             </a:fld>
             <a:endParaRPr lang="zh-TW" altLang="en-US"/>
           </a:p>
@@ -1007,7 +1008,7 @@
           <a:p>
             <a:fld id="{96B2E576-E176-4636-8106-C6403D35D5FE}" type="datetimeFigureOut">
               <a:rPr lang="zh-TW" altLang="en-US" smtClean="0"/>
-              <a:t>2026/6/9</a:t>
+              <a:t>2026/6/30</a:t>
             </a:fld>
             <a:endParaRPr lang="zh-TW" altLang="en-US"/>
           </a:p>
@@ -1239,7 +1240,7 @@
           <a:p>
             <a:fld id="{96B2E576-E176-4636-8106-C6403D35D5FE}" type="datetimeFigureOut">
               <a:rPr lang="zh-TW" altLang="en-US" smtClean="0"/>
-              <a:t>2026/6/9</a:t>
+              <a:t>2026/6/30</a:t>
             </a:fld>
             <a:endParaRPr lang="zh-TW" altLang="en-US"/>
           </a:p>
@@ -1606,7 +1607,7 @@
           <a:p>
             <a:fld id="{96B2E576-E176-4636-8106-C6403D35D5FE}" type="datetimeFigureOut">
               <a:rPr lang="zh-TW" altLang="en-US" smtClean="0"/>
-              <a:t>2026/6/9</a:t>
+              <a:t>2026/6/30</a:t>
             </a:fld>
             <a:endParaRPr lang="zh-TW" altLang="en-US"/>
           </a:p>
@@ -1724,7 +1725,7 @@
           <a:p>
             <a:fld id="{96B2E576-E176-4636-8106-C6403D35D5FE}" type="datetimeFigureOut">
               <a:rPr lang="zh-TW" altLang="en-US" smtClean="0"/>
-              <a:t>2026/6/9</a:t>
+              <a:t>2026/6/30</a:t>
             </a:fld>
             <a:endParaRPr lang="zh-TW" altLang="en-US"/>
           </a:p>
@@ -1819,7 +1820,7 @@
           <a:p>
             <a:fld id="{96B2E576-E176-4636-8106-C6403D35D5FE}" type="datetimeFigureOut">
               <a:rPr lang="zh-TW" altLang="en-US" smtClean="0"/>
-              <a:t>2026/6/9</a:t>
+              <a:t>2026/6/30</a:t>
             </a:fld>
             <a:endParaRPr lang="zh-TW" altLang="en-US"/>
           </a:p>
@@ -2096,7 +2097,7 @@
           <a:p>
             <a:fld id="{96B2E576-E176-4636-8106-C6403D35D5FE}" type="datetimeFigureOut">
               <a:rPr lang="zh-TW" altLang="en-US" smtClean="0"/>
-              <a:t>2026/6/9</a:t>
+              <a:t>2026/6/30</a:t>
             </a:fld>
             <a:endParaRPr lang="zh-TW" altLang="en-US"/>
           </a:p>
@@ -2353,7 +2354,7 @@
           <a:p>
             <a:fld id="{96B2E576-E176-4636-8106-C6403D35D5FE}" type="datetimeFigureOut">
               <a:rPr lang="zh-TW" altLang="en-US" smtClean="0"/>
-              <a:t>2026/6/9</a:t>
+              <a:t>2026/6/30</a:t>
             </a:fld>
             <a:endParaRPr lang="zh-TW" altLang="en-US"/>
           </a:p>
@@ -2566,7 +2567,7 @@
           <a:p>
             <a:fld id="{96B2E576-E176-4636-8106-C6403D35D5FE}" type="datetimeFigureOut">
               <a:rPr lang="zh-TW" altLang="en-US" smtClean="0"/>
-              <a:t>2026/6/9</a:t>
+              <a:t>2026/6/30</a:t>
             </a:fld>
             <a:endParaRPr lang="zh-TW" altLang="en-US"/>
           </a:p>
@@ -3518,8 +3519,8 @@
           </a:fontRef>
         </p:style>
       </p:cxnSp>
-      <mc:AlternateContent xmlns:mc="http://schemas.openxmlformats.org/markup-compatibility/2006">
-        <mc:Choice xmlns:a14="http://schemas.microsoft.com/office/drawing/2010/main" Requires="a14">
+      <mc:AlternateContent xmlns:mc="http://schemas.openxmlformats.org/markup-compatibility/2006" xmlns:a14="http://schemas.microsoft.com/office/drawing/2010/main">
+        <mc:Choice Requires="a14">
           <p:sp>
             <p:nvSpPr>
               <p:cNvPr id="35" name="文字方塊 34">
@@ -3588,7 +3589,7 @@
             </p:txBody>
           </p:sp>
         </mc:Choice>
-        <mc:Fallback>
+        <mc:Fallback xmlns="">
           <p:sp>
             <p:nvSpPr>
               <p:cNvPr id="35" name="文字方塊 34">
@@ -3633,8 +3634,8 @@
           </p:sp>
         </mc:Fallback>
       </mc:AlternateContent>
-      <mc:AlternateContent xmlns:mc="http://schemas.openxmlformats.org/markup-compatibility/2006">
-        <mc:Choice xmlns:a14="http://schemas.microsoft.com/office/drawing/2010/main" Requires="a14">
+      <mc:AlternateContent xmlns:mc="http://schemas.openxmlformats.org/markup-compatibility/2006" xmlns:a14="http://schemas.microsoft.com/office/drawing/2010/main">
+        <mc:Choice Requires="a14">
           <p:sp>
             <p:nvSpPr>
               <p:cNvPr id="36" name="文字方塊 35">
@@ -3722,7 +3723,7 @@
             </p:txBody>
           </p:sp>
         </mc:Choice>
-        <mc:Fallback>
+        <mc:Fallback xmlns="">
           <p:sp>
             <p:nvSpPr>
               <p:cNvPr id="36" name="文字方塊 35">
@@ -3767,8 +3768,8 @@
           </p:sp>
         </mc:Fallback>
       </mc:AlternateContent>
-      <mc:AlternateContent xmlns:mc="http://schemas.openxmlformats.org/markup-compatibility/2006">
-        <mc:Choice xmlns:a14="http://schemas.microsoft.com/office/drawing/2010/main" Requires="a14">
+      <mc:AlternateContent xmlns:mc="http://schemas.openxmlformats.org/markup-compatibility/2006" xmlns:a14="http://schemas.microsoft.com/office/drawing/2010/main">
+        <mc:Choice Requires="a14">
           <p:sp>
             <p:nvSpPr>
               <p:cNvPr id="39" name="文字方塊 38">
@@ -3837,7 +3838,7 @@
             </p:txBody>
           </p:sp>
         </mc:Choice>
-        <mc:Fallback>
+        <mc:Fallback xmlns="">
           <p:sp>
             <p:nvSpPr>
               <p:cNvPr id="39" name="文字方塊 38">
@@ -4031,8 +4032,8 @@
           </p:style>
         </p:cxnSp>
       </p:grpSp>
-      <mc:AlternateContent xmlns:mc="http://schemas.openxmlformats.org/markup-compatibility/2006">
-        <mc:Choice xmlns:a14="http://schemas.microsoft.com/office/drawing/2010/main" Requires="a14">
+      <mc:AlternateContent xmlns:mc="http://schemas.openxmlformats.org/markup-compatibility/2006" xmlns:a14="http://schemas.microsoft.com/office/drawing/2010/main">
+        <mc:Choice Requires="a14">
           <p:sp>
             <p:nvSpPr>
               <p:cNvPr id="56" name="文字方塊 55">
@@ -4082,7 +4083,7 @@
             </p:txBody>
           </p:sp>
         </mc:Choice>
-        <mc:Fallback>
+        <mc:Fallback xmlns="">
           <p:sp>
             <p:nvSpPr>
               <p:cNvPr id="56" name="文字方塊 55">
@@ -4127,8 +4128,8 @@
           </p:sp>
         </mc:Fallback>
       </mc:AlternateContent>
-      <mc:AlternateContent xmlns:mc="http://schemas.openxmlformats.org/markup-compatibility/2006">
-        <mc:Choice xmlns:a14="http://schemas.microsoft.com/office/drawing/2010/main" Requires="a14">
+      <mc:AlternateContent xmlns:mc="http://schemas.openxmlformats.org/markup-compatibility/2006" xmlns:a14="http://schemas.microsoft.com/office/drawing/2010/main">
+        <mc:Choice Requires="a14">
           <p:sp>
             <p:nvSpPr>
               <p:cNvPr id="57" name="文字方塊 56">
@@ -4178,7 +4179,7 @@
             </p:txBody>
           </p:sp>
         </mc:Choice>
-        <mc:Fallback>
+        <mc:Fallback xmlns="">
           <p:sp>
             <p:nvSpPr>
               <p:cNvPr id="57" name="文字方塊 56">
@@ -4223,8 +4224,8 @@
           </p:sp>
         </mc:Fallback>
       </mc:AlternateContent>
-      <mc:AlternateContent xmlns:mc="http://schemas.openxmlformats.org/markup-compatibility/2006">
-        <mc:Choice xmlns:a14="http://schemas.microsoft.com/office/drawing/2010/main" Requires="a14">
+      <mc:AlternateContent xmlns:mc="http://schemas.openxmlformats.org/markup-compatibility/2006" xmlns:a14="http://schemas.microsoft.com/office/drawing/2010/main">
+        <mc:Choice Requires="a14">
           <p:sp>
             <p:nvSpPr>
               <p:cNvPr id="74" name="文字方塊 73">
@@ -4281,7 +4282,7 @@
             </p:txBody>
           </p:sp>
         </mc:Choice>
-        <mc:Fallback>
+        <mc:Fallback xmlns="">
           <p:sp>
             <p:nvSpPr>
               <p:cNvPr id="74" name="文字方塊 73">
@@ -4326,8 +4327,8 @@
           </p:sp>
         </mc:Fallback>
       </mc:AlternateContent>
-      <mc:AlternateContent xmlns:mc="http://schemas.openxmlformats.org/markup-compatibility/2006">
-        <mc:Choice xmlns:a14="http://schemas.microsoft.com/office/drawing/2010/main" Requires="a14">
+      <mc:AlternateContent xmlns:mc="http://schemas.openxmlformats.org/markup-compatibility/2006" xmlns:a14="http://schemas.microsoft.com/office/drawing/2010/main">
+        <mc:Choice Requires="a14">
           <p:sp>
             <p:nvSpPr>
               <p:cNvPr id="77" name="文字方塊 76">
@@ -4384,7 +4385,7 @@
             </p:txBody>
           </p:sp>
         </mc:Choice>
-        <mc:Fallback>
+        <mc:Fallback xmlns="">
           <p:sp>
             <p:nvSpPr>
               <p:cNvPr id="77" name="文字方塊 76">
@@ -4594,8 +4595,8 @@
           </a:fontRef>
         </p:style>
       </p:cxnSp>
-      <mc:AlternateContent xmlns:mc="http://schemas.openxmlformats.org/markup-compatibility/2006">
-        <mc:Choice xmlns:a14="http://schemas.microsoft.com/office/drawing/2010/main" Requires="a14">
+      <mc:AlternateContent xmlns:mc="http://schemas.openxmlformats.org/markup-compatibility/2006" xmlns:a14="http://schemas.microsoft.com/office/drawing/2010/main">
+        <mc:Choice Requires="a14">
           <p:sp>
             <p:nvSpPr>
               <p:cNvPr id="82" name="文字方塊 81">
@@ -4652,7 +4653,7 @@
             </p:txBody>
           </p:sp>
         </mc:Choice>
-        <mc:Fallback>
+        <mc:Fallback xmlns="">
           <p:sp>
             <p:nvSpPr>
               <p:cNvPr id="82" name="文字方塊 81">
@@ -4826,8 +4827,8 @@
           </a:fontRef>
         </p:style>
       </p:cxnSp>
-      <mc:AlternateContent xmlns:mc="http://schemas.openxmlformats.org/markup-compatibility/2006">
-        <mc:Choice xmlns:a14="http://schemas.microsoft.com/office/drawing/2010/main" Requires="a14">
+      <mc:AlternateContent xmlns:mc="http://schemas.openxmlformats.org/markup-compatibility/2006" xmlns:a14="http://schemas.microsoft.com/office/drawing/2010/main">
+        <mc:Choice Requires="a14">
           <p:sp>
             <p:nvSpPr>
               <p:cNvPr id="98" name="文字方塊 97">
@@ -4909,7 +4910,7 @@
             </p:txBody>
           </p:sp>
         </mc:Choice>
-        <mc:Fallback>
+        <mc:Fallback xmlns="">
           <p:sp>
             <p:nvSpPr>
               <p:cNvPr id="98" name="文字方塊 97">
@@ -4954,8 +4955,8 @@
           </p:sp>
         </mc:Fallback>
       </mc:AlternateContent>
-      <mc:AlternateContent xmlns:mc="http://schemas.openxmlformats.org/markup-compatibility/2006">
-        <mc:Choice xmlns:a14="http://schemas.microsoft.com/office/drawing/2010/main" Requires="a14">
+      <mc:AlternateContent xmlns:mc="http://schemas.openxmlformats.org/markup-compatibility/2006" xmlns:a14="http://schemas.microsoft.com/office/drawing/2010/main">
+        <mc:Choice Requires="a14">
           <p:sp>
             <p:nvSpPr>
               <p:cNvPr id="38" name="文字方塊 37">
@@ -5017,7 +5018,7 @@
             </p:txBody>
           </p:sp>
         </mc:Choice>
-        <mc:Fallback>
+        <mc:Fallback xmlns="">
           <p:sp>
             <p:nvSpPr>
               <p:cNvPr id="38" name="文字方塊 37">
@@ -5282,6 +5283,2296 @@
     <p:extLst>
       <p:ext uri="{BB962C8B-B14F-4D97-AF65-F5344CB8AC3E}">
         <p14:creationId xmlns:p14="http://schemas.microsoft.com/office/powerpoint/2010/main" val="140847088"/>
+      </p:ext>
+    </p:extLst>
+  </p:cSld>
+  <p:clrMapOvr>
+    <a:masterClrMapping/>
+  </p:clrMapOvr>
+</p:sld>
+</file>
+
+<file path=ppt/slides/slide2.xml><?xml version="1.0" encoding="utf-8"?>
+<p:sld xmlns:a="http://schemas.openxmlformats.org/drawingml/2006/main" xmlns:r="http://schemas.openxmlformats.org/officeDocument/2006/relationships" xmlns:p="http://schemas.openxmlformats.org/presentationml/2006/main" show="0">
+  <p:cSld>
+    <p:spTree>
+      <p:nvGrpSpPr>
+        <p:cNvPr id="1" name=""/>
+        <p:cNvGrpSpPr/>
+        <p:nvPr/>
+      </p:nvGrpSpPr>
+      <p:grpSpPr>
+        <a:xfrm>
+          <a:off x="0" y="0"/>
+          <a:ext cx="0" cy="0"/>
+          <a:chOff x="0" y="0"/>
+          <a:chExt cx="0" cy="0"/>
+        </a:xfrm>
+      </p:grpSpPr>
+      <p:sp>
+        <p:nvSpPr>
+          <p:cNvPr id="16" name="矩形 15">
+            <a:extLst>
+              <a:ext uri="{FF2B5EF4-FFF2-40B4-BE49-F238E27FC236}">
+                <a16:creationId xmlns:a16="http://schemas.microsoft.com/office/drawing/2014/main" id="{39B778DC-BA8F-4AED-B902-5519DD6C8E83}"/>
+              </a:ext>
+            </a:extLst>
+          </p:cNvPr>
+          <p:cNvSpPr/>
+          <p:nvPr/>
+        </p:nvSpPr>
+        <p:spPr>
+          <a:xfrm>
+            <a:off x="1270106" y="1077686"/>
+            <a:ext cx="7284629" cy="4691743"/>
+          </a:xfrm>
+          <a:prstGeom prst="rect">
+            <a:avLst/>
+          </a:prstGeom>
+          <a:solidFill>
+            <a:schemeClr val="accent6">
+              <a:lumMod val="20000"/>
+              <a:lumOff val="80000"/>
+            </a:schemeClr>
+          </a:solidFill>
+          <a:ln>
+            <a:noFill/>
+          </a:ln>
+        </p:spPr>
+        <p:style>
+          <a:lnRef idx="2">
+            <a:schemeClr val="accent1">
+              <a:shade val="50000"/>
+            </a:schemeClr>
+          </a:lnRef>
+          <a:fillRef idx="1">
+            <a:schemeClr val="accent1"/>
+          </a:fillRef>
+          <a:effectRef idx="0">
+            <a:schemeClr val="accent1"/>
+          </a:effectRef>
+          <a:fontRef idx="minor">
+            <a:schemeClr val="lt1"/>
+          </a:fontRef>
+        </p:style>
+        <p:txBody>
+          <a:bodyPr rtlCol="0" anchor="ctr"/>
+          <a:lstStyle/>
+          <a:p>
+            <a:pPr algn="ctr"/>
+            <a:endParaRPr lang="zh-TW" altLang="en-US" sz="3000"/>
+          </a:p>
+        </p:txBody>
+      </p:sp>
+      <p:sp>
+        <p:nvSpPr>
+          <p:cNvPr id="111" name="橢圓 110">
+            <a:extLst>
+              <a:ext uri="{FF2B5EF4-FFF2-40B4-BE49-F238E27FC236}">
+                <a16:creationId xmlns:a16="http://schemas.microsoft.com/office/drawing/2014/main" id="{2137C916-6667-4FFF-A41C-405BAC6B5634}"/>
+              </a:ext>
+            </a:extLst>
+          </p:cNvPr>
+          <p:cNvSpPr/>
+          <p:nvPr/>
+        </p:nvSpPr>
+        <p:spPr>
+          <a:xfrm>
+            <a:off x="884645" y="1085951"/>
+            <a:ext cx="786232" cy="4692549"/>
+          </a:xfrm>
+          <a:prstGeom prst="ellipse">
+            <a:avLst/>
+          </a:prstGeom>
+          <a:solidFill>
+            <a:srgbClr val="A9D18E">
+              <a:alpha val="89804"/>
+            </a:srgbClr>
+          </a:solidFill>
+          <a:ln w="19050">
+            <a:solidFill>
+              <a:schemeClr val="accent6">
+                <a:lumMod val="60000"/>
+                <a:lumOff val="40000"/>
+              </a:schemeClr>
+            </a:solidFill>
+          </a:ln>
+        </p:spPr>
+        <p:style>
+          <a:lnRef idx="2">
+            <a:schemeClr val="accent1">
+              <a:shade val="50000"/>
+            </a:schemeClr>
+          </a:lnRef>
+          <a:fillRef idx="1">
+            <a:schemeClr val="accent1"/>
+          </a:fillRef>
+          <a:effectRef idx="0">
+            <a:schemeClr val="accent1"/>
+          </a:effectRef>
+          <a:fontRef idx="minor">
+            <a:schemeClr val="lt1"/>
+          </a:fontRef>
+        </p:style>
+        <p:txBody>
+          <a:bodyPr rtlCol="0" anchor="ctr"/>
+          <a:lstStyle/>
+          <a:p>
+            <a:pPr algn="ctr"/>
+            <a:endParaRPr lang="zh-TW" altLang="en-US" sz="3000"/>
+          </a:p>
+        </p:txBody>
+      </p:sp>
+      <p:cxnSp>
+        <p:nvCxnSpPr>
+          <p:cNvPr id="59" name="直線接點 58">
+            <a:extLst>
+              <a:ext uri="{FF2B5EF4-FFF2-40B4-BE49-F238E27FC236}">
+                <a16:creationId xmlns:a16="http://schemas.microsoft.com/office/drawing/2014/main" id="{6E6FC3A0-2C5E-4EC4-B60C-A05C6275A81F}"/>
+              </a:ext>
+            </a:extLst>
+          </p:cNvPr>
+          <p:cNvCxnSpPr>
+            <a:cxnSpLocks/>
+          </p:cNvCxnSpPr>
+          <p:nvPr/>
+        </p:nvCxnSpPr>
+        <p:spPr>
+          <a:xfrm>
+            <a:off x="3311526" y="3429000"/>
+            <a:ext cx="1651000" cy="0"/>
+          </a:xfrm>
+          <a:prstGeom prst="line">
+            <a:avLst/>
+          </a:prstGeom>
+          <a:ln w="76200"/>
+        </p:spPr>
+        <p:style>
+          <a:lnRef idx="3">
+            <a:schemeClr val="dk1"/>
+          </a:lnRef>
+          <a:fillRef idx="0">
+            <a:schemeClr val="dk1"/>
+          </a:fillRef>
+          <a:effectRef idx="2">
+            <a:schemeClr val="dk1"/>
+          </a:effectRef>
+          <a:fontRef idx="minor">
+            <a:schemeClr val="tx1"/>
+          </a:fontRef>
+        </p:style>
+      </p:cxnSp>
+      <p:cxnSp>
+        <p:nvCxnSpPr>
+          <p:cNvPr id="19" name="直線接點 18">
+            <a:extLst>
+              <a:ext uri="{FF2B5EF4-FFF2-40B4-BE49-F238E27FC236}">
+                <a16:creationId xmlns:a16="http://schemas.microsoft.com/office/drawing/2014/main" id="{6C2D4660-D1A2-4677-86DE-0633B0DFFD9A}"/>
+              </a:ext>
+            </a:extLst>
+          </p:cNvPr>
+          <p:cNvCxnSpPr>
+            <a:cxnSpLocks/>
+          </p:cNvCxnSpPr>
+          <p:nvPr/>
+        </p:nvCxnSpPr>
+        <p:spPr>
+          <a:xfrm>
+            <a:off x="5965868" y="3429000"/>
+            <a:ext cx="1266825" cy="0"/>
+          </a:xfrm>
+          <a:prstGeom prst="line">
+            <a:avLst/>
+          </a:prstGeom>
+          <a:ln w="76200"/>
+        </p:spPr>
+        <p:style>
+          <a:lnRef idx="3">
+            <a:schemeClr val="dk1"/>
+          </a:lnRef>
+          <a:fillRef idx="0">
+            <a:schemeClr val="dk1"/>
+          </a:fillRef>
+          <a:effectRef idx="2">
+            <a:schemeClr val="dk1"/>
+          </a:effectRef>
+          <a:fontRef idx="minor">
+            <a:schemeClr val="tx1"/>
+          </a:fontRef>
+        </p:style>
+      </p:cxnSp>
+      <p:sp>
+        <p:nvSpPr>
+          <p:cNvPr id="17" name="橢圓 16">
+            <a:extLst>
+              <a:ext uri="{FF2B5EF4-FFF2-40B4-BE49-F238E27FC236}">
+                <a16:creationId xmlns:a16="http://schemas.microsoft.com/office/drawing/2014/main" id="{90830E2C-DE3E-4AE3-A613-211048D23F14}"/>
+              </a:ext>
+            </a:extLst>
+          </p:cNvPr>
+          <p:cNvSpPr/>
+          <p:nvPr/>
+        </p:nvSpPr>
+        <p:spPr>
+          <a:xfrm>
+            <a:off x="4659738" y="2008826"/>
+            <a:ext cx="586521" cy="2817849"/>
+          </a:xfrm>
+          <a:prstGeom prst="ellipse">
+            <a:avLst/>
+          </a:prstGeom>
+          <a:solidFill>
+            <a:srgbClr val="A9D18E">
+              <a:alpha val="89804"/>
+            </a:srgbClr>
+          </a:solidFill>
+          <a:ln w="19050">
+            <a:solidFill>
+              <a:schemeClr val="accent6">
+                <a:lumMod val="60000"/>
+                <a:lumOff val="40000"/>
+              </a:schemeClr>
+            </a:solidFill>
+          </a:ln>
+        </p:spPr>
+        <p:style>
+          <a:lnRef idx="2">
+            <a:schemeClr val="accent1">
+              <a:shade val="50000"/>
+            </a:schemeClr>
+          </a:lnRef>
+          <a:fillRef idx="1">
+            <a:schemeClr val="accent1"/>
+          </a:fillRef>
+          <a:effectRef idx="0">
+            <a:schemeClr val="accent1"/>
+          </a:effectRef>
+          <a:fontRef idx="minor">
+            <a:schemeClr val="lt1"/>
+          </a:fontRef>
+        </p:style>
+        <p:txBody>
+          <a:bodyPr rtlCol="0" anchor="ctr"/>
+          <a:lstStyle/>
+          <a:p>
+            <a:pPr algn="ctr"/>
+            <a:endParaRPr lang="zh-TW" altLang="en-US" sz="3000"/>
+          </a:p>
+        </p:txBody>
+      </p:sp>
+      <p:cxnSp>
+        <p:nvCxnSpPr>
+          <p:cNvPr id="6" name="直線接點 5">
+            <a:extLst>
+              <a:ext uri="{FF2B5EF4-FFF2-40B4-BE49-F238E27FC236}">
+                <a16:creationId xmlns:a16="http://schemas.microsoft.com/office/drawing/2014/main" id="{BFDF8180-D973-4531-888B-47BCA1EC6932}"/>
+              </a:ext>
+            </a:extLst>
+          </p:cNvPr>
+          <p:cNvCxnSpPr>
+            <a:cxnSpLocks/>
+          </p:cNvCxnSpPr>
+          <p:nvPr/>
+        </p:nvCxnSpPr>
+        <p:spPr>
+          <a:xfrm>
+            <a:off x="4944500" y="2008826"/>
+            <a:ext cx="0" cy="1402550"/>
+          </a:xfrm>
+          <a:prstGeom prst="line">
+            <a:avLst/>
+          </a:prstGeom>
+          <a:ln w="28575">
+            <a:headEnd type="stealth" w="lg" len="lg"/>
+            <a:tailEnd type="stealth" w="lg" len="lg"/>
+          </a:ln>
+        </p:spPr>
+        <p:style>
+          <a:lnRef idx="3">
+            <a:schemeClr val="dk1"/>
+          </a:lnRef>
+          <a:fillRef idx="0">
+            <a:schemeClr val="dk1"/>
+          </a:fillRef>
+          <a:effectRef idx="2">
+            <a:schemeClr val="dk1"/>
+          </a:effectRef>
+          <a:fontRef idx="minor">
+            <a:schemeClr val="tx1"/>
+          </a:fontRef>
+        </p:style>
+      </p:cxnSp>
+      <p:sp>
+        <p:nvSpPr>
+          <p:cNvPr id="9" name="弧形 8">
+            <a:extLst>
+              <a:ext uri="{FF2B5EF4-FFF2-40B4-BE49-F238E27FC236}">
+                <a16:creationId xmlns:a16="http://schemas.microsoft.com/office/drawing/2014/main" id="{F5073DF3-23A2-4756-8038-D7CF848DEAE1}"/>
+              </a:ext>
+            </a:extLst>
+          </p:cNvPr>
+          <p:cNvSpPr/>
+          <p:nvPr/>
+        </p:nvSpPr>
+        <p:spPr>
+          <a:xfrm rot="8100000">
+            <a:off x="-2651116" y="-13197559"/>
+            <a:ext cx="15208232" cy="15208232"/>
+          </a:xfrm>
+          <a:prstGeom prst="arc">
+            <a:avLst>
+              <a:gd name="adj1" fmla="val 17201135"/>
+              <a:gd name="adj2" fmla="val 20629779"/>
+            </a:avLst>
+          </a:prstGeom>
+          <a:solidFill>
+            <a:schemeClr val="bg1"/>
+          </a:solidFill>
+          <a:ln w="38100">
+            <a:solidFill>
+              <a:schemeClr val="accent6">
+                <a:lumMod val="50000"/>
+              </a:schemeClr>
+            </a:solidFill>
+          </a:ln>
+        </p:spPr>
+        <p:style>
+          <a:lnRef idx="1">
+            <a:schemeClr val="accent1"/>
+          </a:lnRef>
+          <a:fillRef idx="0">
+            <a:schemeClr val="accent1"/>
+          </a:fillRef>
+          <a:effectRef idx="0">
+            <a:schemeClr val="accent1"/>
+          </a:effectRef>
+          <a:fontRef idx="minor">
+            <a:schemeClr val="tx1"/>
+          </a:fontRef>
+        </p:style>
+        <p:txBody>
+          <a:bodyPr rtlCol="0" anchor="ctr"/>
+          <a:lstStyle/>
+          <a:p>
+            <a:pPr algn="ctr"/>
+            <a:endParaRPr lang="zh-TW" altLang="en-US" dirty="0"/>
+          </a:p>
+        </p:txBody>
+      </p:sp>
+      <p:sp>
+        <p:nvSpPr>
+          <p:cNvPr id="10" name="弧形 9">
+            <a:extLst>
+              <a:ext uri="{FF2B5EF4-FFF2-40B4-BE49-F238E27FC236}">
+                <a16:creationId xmlns:a16="http://schemas.microsoft.com/office/drawing/2014/main" id="{CBA5609A-9B95-4347-99D9-C84C3C7CD5E2}"/>
+              </a:ext>
+            </a:extLst>
+          </p:cNvPr>
+          <p:cNvSpPr/>
+          <p:nvPr/>
+        </p:nvSpPr>
+        <p:spPr>
+          <a:xfrm rot="18900000">
+            <a:off x="-2651116" y="4847327"/>
+            <a:ext cx="15208232" cy="15208232"/>
+          </a:xfrm>
+          <a:prstGeom prst="arc">
+            <a:avLst>
+              <a:gd name="adj1" fmla="val 17176439"/>
+              <a:gd name="adj2" fmla="val 20608746"/>
+            </a:avLst>
+          </a:prstGeom>
+          <a:solidFill>
+            <a:schemeClr val="bg1"/>
+          </a:solidFill>
+          <a:ln w="38100">
+            <a:solidFill>
+              <a:schemeClr val="accent6">
+                <a:lumMod val="50000"/>
+              </a:schemeClr>
+            </a:solidFill>
+          </a:ln>
+        </p:spPr>
+        <p:style>
+          <a:lnRef idx="1">
+            <a:schemeClr val="accent1"/>
+          </a:lnRef>
+          <a:fillRef idx="0">
+            <a:schemeClr val="accent1"/>
+          </a:fillRef>
+          <a:effectRef idx="0">
+            <a:schemeClr val="accent1"/>
+          </a:effectRef>
+          <a:fontRef idx="minor">
+            <a:schemeClr val="tx1"/>
+          </a:fontRef>
+        </p:style>
+        <p:txBody>
+          <a:bodyPr rtlCol="0" anchor="ctr"/>
+          <a:lstStyle/>
+          <a:p>
+            <a:pPr algn="ctr"/>
+            <a:endParaRPr lang="zh-TW" altLang="en-US"/>
+          </a:p>
+        </p:txBody>
+      </p:sp>
+      <p:sp>
+        <p:nvSpPr>
+          <p:cNvPr id="26" name="橢圓 25">
+            <a:extLst>
+              <a:ext uri="{FF2B5EF4-FFF2-40B4-BE49-F238E27FC236}">
+                <a16:creationId xmlns:a16="http://schemas.microsoft.com/office/drawing/2014/main" id="{6E8902BF-302C-4A00-BDDE-9B309F26A9FB}"/>
+              </a:ext>
+            </a:extLst>
+          </p:cNvPr>
+          <p:cNvSpPr/>
+          <p:nvPr/>
+        </p:nvSpPr>
+        <p:spPr>
+          <a:xfrm>
+            <a:off x="6944801" y="1684376"/>
+            <a:ext cx="586521" cy="3500596"/>
+          </a:xfrm>
+          <a:prstGeom prst="ellipse">
+            <a:avLst/>
+          </a:prstGeom>
+          <a:solidFill>
+            <a:srgbClr val="A9D18E">
+              <a:alpha val="89804"/>
+            </a:srgbClr>
+          </a:solidFill>
+          <a:ln w="19050">
+            <a:solidFill>
+              <a:schemeClr val="accent6">
+                <a:lumMod val="60000"/>
+                <a:lumOff val="40000"/>
+              </a:schemeClr>
+            </a:solidFill>
+          </a:ln>
+        </p:spPr>
+        <p:style>
+          <a:lnRef idx="2">
+            <a:schemeClr val="accent1">
+              <a:shade val="50000"/>
+            </a:schemeClr>
+          </a:lnRef>
+          <a:fillRef idx="1">
+            <a:schemeClr val="accent1"/>
+          </a:fillRef>
+          <a:effectRef idx="0">
+            <a:schemeClr val="accent1"/>
+          </a:effectRef>
+          <a:fontRef idx="minor">
+            <a:schemeClr val="lt1"/>
+          </a:fontRef>
+        </p:style>
+        <p:txBody>
+          <a:bodyPr rtlCol="0" anchor="ctr"/>
+          <a:lstStyle/>
+          <a:p>
+            <a:pPr algn="ctr"/>
+            <a:endParaRPr lang="zh-TW" altLang="en-US" sz="3000"/>
+          </a:p>
+        </p:txBody>
+      </p:sp>
+      <p:cxnSp>
+        <p:nvCxnSpPr>
+          <p:cNvPr id="27" name="直線接點 26">
+            <a:extLst>
+              <a:ext uri="{FF2B5EF4-FFF2-40B4-BE49-F238E27FC236}">
+                <a16:creationId xmlns:a16="http://schemas.microsoft.com/office/drawing/2014/main" id="{B1FA0C3E-1A5F-4D3E-8CD1-52827CCD535A}"/>
+              </a:ext>
+            </a:extLst>
+          </p:cNvPr>
+          <p:cNvCxnSpPr>
+            <a:cxnSpLocks/>
+          </p:cNvCxnSpPr>
+          <p:nvPr/>
+        </p:nvCxnSpPr>
+        <p:spPr>
+          <a:xfrm>
+            <a:off x="7229563" y="1684376"/>
+            <a:ext cx="0" cy="1742378"/>
+          </a:xfrm>
+          <a:prstGeom prst="line">
+            <a:avLst/>
+          </a:prstGeom>
+          <a:ln w="28575">
+            <a:headEnd type="stealth" w="lg" len="lg"/>
+            <a:tailEnd type="stealth" w="lg" len="lg"/>
+          </a:ln>
+        </p:spPr>
+        <p:style>
+          <a:lnRef idx="3">
+            <a:schemeClr val="dk1"/>
+          </a:lnRef>
+          <a:fillRef idx="0">
+            <a:schemeClr val="dk1"/>
+          </a:fillRef>
+          <a:effectRef idx="2">
+            <a:schemeClr val="dk1"/>
+          </a:effectRef>
+          <a:fontRef idx="minor">
+            <a:schemeClr val="tx1"/>
+          </a:fontRef>
+        </p:style>
+      </p:cxnSp>
+      <p:cxnSp>
+        <p:nvCxnSpPr>
+          <p:cNvPr id="32" name="直線接點 31">
+            <a:extLst>
+              <a:ext uri="{FF2B5EF4-FFF2-40B4-BE49-F238E27FC236}">
+                <a16:creationId xmlns:a16="http://schemas.microsoft.com/office/drawing/2014/main" id="{52379982-8561-452E-9BC3-8E4CE84D2F57}"/>
+              </a:ext>
+            </a:extLst>
+          </p:cNvPr>
+          <p:cNvCxnSpPr>
+            <a:cxnSpLocks/>
+          </p:cNvCxnSpPr>
+          <p:nvPr/>
+        </p:nvCxnSpPr>
+        <p:spPr>
+          <a:xfrm>
+            <a:off x="4946058" y="3429000"/>
+            <a:ext cx="1055370" cy="0"/>
+          </a:xfrm>
+          <a:prstGeom prst="line">
+            <a:avLst/>
+          </a:prstGeom>
+          <a:ln w="76200"/>
+        </p:spPr>
+        <p:style>
+          <a:lnRef idx="3">
+            <a:schemeClr val="dk1"/>
+          </a:lnRef>
+          <a:fillRef idx="0">
+            <a:schemeClr val="dk1"/>
+          </a:fillRef>
+          <a:effectRef idx="2">
+            <a:schemeClr val="dk1"/>
+          </a:effectRef>
+          <a:fontRef idx="minor">
+            <a:schemeClr val="tx1"/>
+          </a:fontRef>
+        </p:style>
+      </p:cxnSp>
+      <mc:AlternateContent xmlns:mc="http://schemas.openxmlformats.org/markup-compatibility/2006">
+        <mc:Choice xmlns:a14="http://schemas.microsoft.com/office/drawing/2010/main" Requires="a14">
+          <p:sp>
+            <p:nvSpPr>
+              <p:cNvPr id="35" name="文字方塊 34">
+                <a:extLst>
+                  <a:ext uri="{FF2B5EF4-FFF2-40B4-BE49-F238E27FC236}">
+                    <a16:creationId xmlns:a16="http://schemas.microsoft.com/office/drawing/2014/main" id="{796B1F44-B09F-4626-B7CB-445AF6BC9BC7}"/>
+                  </a:ext>
+                </a:extLst>
+              </p:cNvPr>
+              <p:cNvSpPr txBox="1"/>
+              <p:nvPr/>
+            </p:nvSpPr>
+            <p:spPr>
+              <a:xfrm>
+                <a:off x="4110288" y="2132232"/>
+                <a:ext cx="568301" cy="553998"/>
+              </a:xfrm>
+              <a:prstGeom prst="rect">
+                <a:avLst/>
+              </a:prstGeom>
+              <a:noFill/>
+            </p:spPr>
+            <p:txBody>
+              <a:bodyPr wrap="square" rtlCol="0">
+                <a:spAutoFit/>
+              </a:bodyPr>
+              <a:lstStyle/>
+              <a:p>
+                <a:pPr/>
+                <a14:m>
+                  <m:oMathPara xmlns:m="http://schemas.openxmlformats.org/officeDocument/2006/math">
+                    <m:oMathParaPr>
+                      <m:jc m:val="centerGroup"/>
+                    </m:oMathParaPr>
+                    <m:oMath xmlns:m="http://schemas.openxmlformats.org/officeDocument/2006/math">
+                      <m:sSub>
+                        <m:sSubPr>
+                          <m:ctrlPr>
+                            <a:rPr lang="en-US" altLang="zh-TW" sz="3000" b="0" i="1" smtClean="0">
+                              <a:latin typeface="Cambria Math" panose="02040503050406030204" pitchFamily="18" charset="0"/>
+                            </a:rPr>
+                          </m:ctrlPr>
+                        </m:sSubPr>
+                        <m:e>
+                          <m:r>
+                            <a:rPr lang="en-US" altLang="zh-TW" sz="3000" b="0" i="1" smtClean="0">
+                              <a:latin typeface="Cambria Math" panose="02040503050406030204" pitchFamily="18" charset="0"/>
+                            </a:rPr>
+                            <m:t>𝑊</m:t>
+                          </m:r>
+                        </m:e>
+                        <m:sub>
+                          <m:r>
+                            <a:rPr lang="en-US" altLang="zh-TW" sz="3000" b="0" i="1" smtClean="0">
+                              <a:latin typeface="Cambria Math" panose="02040503050406030204" pitchFamily="18" charset="0"/>
+                            </a:rPr>
+                            <m:t>0</m:t>
+                          </m:r>
+                        </m:sub>
+                      </m:sSub>
+                    </m:oMath>
+                  </m:oMathPara>
+                </a14:m>
+                <a:endParaRPr lang="zh-TW" altLang="en-US" sz="3000" dirty="0"/>
+              </a:p>
+            </p:txBody>
+          </p:sp>
+        </mc:Choice>
+        <mc:Fallback>
+          <p:sp>
+            <p:nvSpPr>
+              <p:cNvPr id="35" name="文字方塊 34">
+                <a:extLst>
+                  <a:ext uri="{FF2B5EF4-FFF2-40B4-BE49-F238E27FC236}">
+                    <a16:creationId xmlns:a16="http://schemas.microsoft.com/office/drawing/2014/main" id="{796B1F44-B09F-4626-B7CB-445AF6BC9BC7}"/>
+                  </a:ext>
+                </a:extLst>
+              </p:cNvPr>
+              <p:cNvSpPr txBox="1">
+                <a:spLocks noRot="1" noChangeAspect="1" noMove="1" noResize="1" noEditPoints="1" noAdjustHandles="1" noChangeArrowheads="1" noChangeShapeType="1" noTextEdit="1"/>
+              </p:cNvSpPr>
+              <p:nvPr/>
+            </p:nvSpPr>
+            <p:spPr>
+              <a:xfrm>
+                <a:off x="4110288" y="2132232"/>
+                <a:ext cx="568301" cy="553998"/>
+              </a:xfrm>
+              <a:prstGeom prst="rect">
+                <a:avLst/>
+              </a:prstGeom>
+              <a:blipFill>
+                <a:blip r:embed="rId2"/>
+                <a:stretch>
+                  <a:fillRect/>
+                </a:stretch>
+              </a:blipFill>
+            </p:spPr>
+            <p:txBody>
+              <a:bodyPr/>
+              <a:lstStyle/>
+              <a:p>
+                <a:r>
+                  <a:rPr lang="zh-TW" altLang="en-US">
+                    <a:noFill/>
+                  </a:rPr>
+                  <a:t> </a:t>
+                </a:r>
+              </a:p>
+            </p:txBody>
+          </p:sp>
+        </mc:Fallback>
+      </mc:AlternateContent>
+      <mc:AlternateContent xmlns:mc="http://schemas.openxmlformats.org/markup-compatibility/2006">
+        <mc:Choice xmlns:a14="http://schemas.microsoft.com/office/drawing/2010/main" Requires="a14">
+          <p:sp>
+            <p:nvSpPr>
+              <p:cNvPr id="36" name="文字方塊 35">
+                <a:extLst>
+                  <a:ext uri="{FF2B5EF4-FFF2-40B4-BE49-F238E27FC236}">
+                    <a16:creationId xmlns:a16="http://schemas.microsoft.com/office/drawing/2014/main" id="{AF7126EC-0532-417A-A93F-D8204B33F933}"/>
+                  </a:ext>
+                </a:extLst>
+              </p:cNvPr>
+              <p:cNvSpPr txBox="1"/>
+              <p:nvPr/>
+            </p:nvSpPr>
+            <p:spPr>
+              <a:xfrm>
+                <a:off x="5958624" y="2108668"/>
+                <a:ext cx="962854" cy="608436"/>
+              </a:xfrm>
+              <a:prstGeom prst="rect">
+                <a:avLst/>
+              </a:prstGeom>
+              <a:noFill/>
+            </p:spPr>
+            <p:txBody>
+              <a:bodyPr wrap="square" rtlCol="0">
+                <a:spAutoFit/>
+              </a:bodyPr>
+              <a:lstStyle/>
+              <a:p>
+                <a:pPr/>
+                <a14:m>
+                  <m:oMathPara xmlns:m="http://schemas.openxmlformats.org/officeDocument/2006/math">
+                    <m:oMathParaPr>
+                      <m:jc m:val="centerGroup"/>
+                    </m:oMathParaPr>
+                    <m:oMath xmlns:m="http://schemas.openxmlformats.org/officeDocument/2006/math">
+                      <m:rad>
+                        <m:radPr>
+                          <m:degHide m:val="on"/>
+                          <m:ctrlPr>
+                            <a:rPr lang="en-US" altLang="zh-TW" sz="3000" b="0" i="1" smtClean="0">
+                              <a:latin typeface="Cambria Math" panose="02040503050406030204" pitchFamily="18" charset="0"/>
+                            </a:rPr>
+                          </m:ctrlPr>
+                        </m:radPr>
+                        <m:deg/>
+                        <m:e>
+                          <m:r>
+                            <a:rPr lang="en-US" altLang="zh-TW" sz="3000" b="0" i="1" smtClean="0">
+                              <a:latin typeface="Cambria Math" panose="02040503050406030204" pitchFamily="18" charset="0"/>
+                            </a:rPr>
+                            <m:t>2</m:t>
+                          </m:r>
+                        </m:e>
+                      </m:rad>
+                      <m:sSub>
+                        <m:sSubPr>
+                          <m:ctrlPr>
+                            <a:rPr lang="en-US" altLang="zh-TW" sz="3000" b="0" i="1" smtClean="0">
+                              <a:latin typeface="Cambria Math" panose="02040503050406030204" pitchFamily="18" charset="0"/>
+                            </a:rPr>
+                          </m:ctrlPr>
+                        </m:sSubPr>
+                        <m:e>
+                          <m:r>
+                            <a:rPr lang="en-US" altLang="zh-TW" sz="3000" b="0" i="1" smtClean="0">
+                              <a:latin typeface="Cambria Math" panose="02040503050406030204" pitchFamily="18" charset="0"/>
+                            </a:rPr>
+                            <m:t>𝑊</m:t>
+                          </m:r>
+                        </m:e>
+                        <m:sub>
+                          <m:r>
+                            <a:rPr lang="en-US" altLang="zh-TW" sz="3000" b="0" i="1" smtClean="0">
+                              <a:latin typeface="Cambria Math" panose="02040503050406030204" pitchFamily="18" charset="0"/>
+                            </a:rPr>
+                            <m:t>0</m:t>
+                          </m:r>
+                        </m:sub>
+                      </m:sSub>
+                    </m:oMath>
+                  </m:oMathPara>
+                </a14:m>
+                <a:endParaRPr lang="zh-TW" altLang="en-US" sz="3000" dirty="0"/>
+              </a:p>
+            </p:txBody>
+          </p:sp>
+        </mc:Choice>
+        <mc:Fallback>
+          <p:sp>
+            <p:nvSpPr>
+              <p:cNvPr id="36" name="文字方塊 35">
+                <a:extLst>
+                  <a:ext uri="{FF2B5EF4-FFF2-40B4-BE49-F238E27FC236}">
+                    <a16:creationId xmlns:a16="http://schemas.microsoft.com/office/drawing/2014/main" id="{AF7126EC-0532-417A-A93F-D8204B33F933}"/>
+                  </a:ext>
+                </a:extLst>
+              </p:cNvPr>
+              <p:cNvSpPr txBox="1">
+                <a:spLocks noRot="1" noChangeAspect="1" noMove="1" noResize="1" noEditPoints="1" noAdjustHandles="1" noChangeArrowheads="1" noChangeShapeType="1" noTextEdit="1"/>
+              </p:cNvSpPr>
+              <p:nvPr/>
+            </p:nvSpPr>
+            <p:spPr>
+              <a:xfrm>
+                <a:off x="5958624" y="2108668"/>
+                <a:ext cx="962854" cy="608436"/>
+              </a:xfrm>
+              <a:prstGeom prst="rect">
+                <a:avLst/>
+              </a:prstGeom>
+              <a:blipFill>
+                <a:blip r:embed="rId3"/>
+                <a:stretch>
+                  <a:fillRect r="-5696"/>
+                </a:stretch>
+              </a:blipFill>
+            </p:spPr>
+            <p:txBody>
+              <a:bodyPr/>
+              <a:lstStyle/>
+              <a:p>
+                <a:r>
+                  <a:rPr lang="zh-TW" altLang="en-US">
+                    <a:noFill/>
+                  </a:rPr>
+                  <a:t> </a:t>
+                </a:r>
+              </a:p>
+            </p:txBody>
+          </p:sp>
+        </mc:Fallback>
+      </mc:AlternateContent>
+      <mc:AlternateContent xmlns:mc="http://schemas.openxmlformats.org/markup-compatibility/2006">
+        <mc:Choice xmlns:a14="http://schemas.microsoft.com/office/drawing/2010/main" Requires="a14">
+          <p:sp>
+            <p:nvSpPr>
+              <p:cNvPr id="39" name="文字方塊 38">
+                <a:extLst>
+                  <a:ext uri="{FF2B5EF4-FFF2-40B4-BE49-F238E27FC236}">
+                    <a16:creationId xmlns:a16="http://schemas.microsoft.com/office/drawing/2014/main" id="{7167E6B3-CFA2-4D29-B4B1-E6294D63FC32}"/>
+                  </a:ext>
+                </a:extLst>
+              </p:cNvPr>
+              <p:cNvSpPr txBox="1"/>
+              <p:nvPr/>
+            </p:nvSpPr>
+            <p:spPr>
+              <a:xfrm>
+                <a:off x="5809421" y="3485938"/>
+                <a:ext cx="641500" cy="553998"/>
+              </a:xfrm>
+              <a:prstGeom prst="rect">
+                <a:avLst/>
+              </a:prstGeom>
+              <a:noFill/>
+            </p:spPr>
+            <p:txBody>
+              <a:bodyPr wrap="square" rtlCol="0">
+                <a:spAutoFit/>
+              </a:bodyPr>
+              <a:lstStyle/>
+              <a:p>
+                <a:pPr/>
+                <a14:m>
+                  <m:oMathPara xmlns:m="http://schemas.openxmlformats.org/officeDocument/2006/math">
+                    <m:oMathParaPr>
+                      <m:jc m:val="centerGroup"/>
+                    </m:oMathParaPr>
+                    <m:oMath xmlns:m="http://schemas.openxmlformats.org/officeDocument/2006/math">
+                      <m:sSub>
+                        <m:sSubPr>
+                          <m:ctrlPr>
+                            <a:rPr lang="en-US" altLang="zh-TW" sz="3000" b="0" i="1" smtClean="0">
+                              <a:latin typeface="Cambria Math" panose="02040503050406030204" pitchFamily="18" charset="0"/>
+                            </a:rPr>
+                          </m:ctrlPr>
+                        </m:sSubPr>
+                        <m:e>
+                          <m:r>
+                            <a:rPr lang="en-US" altLang="zh-TW" sz="3000" b="0" i="1" smtClean="0">
+                              <a:latin typeface="Cambria Math" panose="02040503050406030204" pitchFamily="18" charset="0"/>
+                            </a:rPr>
+                            <m:t>𝑧</m:t>
+                          </m:r>
+                        </m:e>
+                        <m:sub>
+                          <m:r>
+                            <a:rPr lang="en-US" altLang="zh-TW" sz="3000" b="0" i="1" smtClean="0">
+                              <a:latin typeface="Cambria Math" panose="02040503050406030204" pitchFamily="18" charset="0"/>
+                            </a:rPr>
+                            <m:t>𝑅</m:t>
+                          </m:r>
+                        </m:sub>
+                      </m:sSub>
+                    </m:oMath>
+                  </m:oMathPara>
+                </a14:m>
+                <a:endParaRPr lang="zh-TW" altLang="en-US" sz="3000" dirty="0"/>
+              </a:p>
+            </p:txBody>
+          </p:sp>
+        </mc:Choice>
+        <mc:Fallback>
+          <p:sp>
+            <p:nvSpPr>
+              <p:cNvPr id="39" name="文字方塊 38">
+                <a:extLst>
+                  <a:ext uri="{FF2B5EF4-FFF2-40B4-BE49-F238E27FC236}">
+                    <a16:creationId xmlns:a16="http://schemas.microsoft.com/office/drawing/2014/main" id="{7167E6B3-CFA2-4D29-B4B1-E6294D63FC32}"/>
+                  </a:ext>
+                </a:extLst>
+              </p:cNvPr>
+              <p:cNvSpPr txBox="1">
+                <a:spLocks noRot="1" noChangeAspect="1" noMove="1" noResize="1" noEditPoints="1" noAdjustHandles="1" noChangeArrowheads="1" noChangeShapeType="1" noTextEdit="1"/>
+              </p:cNvSpPr>
+              <p:nvPr/>
+            </p:nvSpPr>
+            <p:spPr>
+              <a:xfrm>
+                <a:off x="5809421" y="3485938"/>
+                <a:ext cx="641500" cy="553998"/>
+              </a:xfrm>
+              <a:prstGeom prst="rect">
+                <a:avLst/>
+              </a:prstGeom>
+              <a:blipFill>
+                <a:blip r:embed="rId4"/>
+                <a:stretch>
+                  <a:fillRect/>
+                </a:stretch>
+              </a:blipFill>
+            </p:spPr>
+            <p:txBody>
+              <a:bodyPr/>
+              <a:lstStyle/>
+              <a:p>
+                <a:r>
+                  <a:rPr lang="zh-TW" altLang="en-US">
+                    <a:noFill/>
+                  </a:rPr>
+                  <a:t> </a:t>
+                </a:r>
+              </a:p>
+            </p:txBody>
+          </p:sp>
+        </mc:Fallback>
+      </mc:AlternateContent>
+      <p:grpSp>
+        <p:nvGrpSpPr>
+          <p:cNvPr id="34" name="群組 33">
+            <a:extLst>
+              <a:ext uri="{FF2B5EF4-FFF2-40B4-BE49-F238E27FC236}">
+                <a16:creationId xmlns:a16="http://schemas.microsoft.com/office/drawing/2014/main" id="{607CB37C-2240-413F-980F-20029A32CA62}"/>
+              </a:ext>
+            </a:extLst>
+          </p:cNvPr>
+          <p:cNvGrpSpPr/>
+          <p:nvPr/>
+        </p:nvGrpSpPr>
+        <p:grpSpPr>
+          <a:xfrm>
+            <a:off x="4944500" y="3495675"/>
+            <a:ext cx="2285063" cy="187325"/>
+            <a:chOff x="5935099" y="3495675"/>
+            <a:chExt cx="2285063" cy="187325"/>
+          </a:xfrm>
+        </p:grpSpPr>
+        <p:cxnSp>
+          <p:nvCxnSpPr>
+            <p:cNvPr id="44" name="直線接點 43">
+              <a:extLst>
+                <a:ext uri="{FF2B5EF4-FFF2-40B4-BE49-F238E27FC236}">
+                  <a16:creationId xmlns:a16="http://schemas.microsoft.com/office/drawing/2014/main" id="{8EDF15DD-015D-49AD-8AD5-E8F6E7326FBE}"/>
+                </a:ext>
+              </a:extLst>
+            </p:cNvPr>
+            <p:cNvCxnSpPr>
+              <a:cxnSpLocks/>
+            </p:cNvCxnSpPr>
+            <p:nvPr/>
+          </p:nvCxnSpPr>
+          <p:spPr>
+            <a:xfrm>
+              <a:off x="5935099" y="3593786"/>
+              <a:ext cx="2282594" cy="0"/>
+            </a:xfrm>
+            <a:prstGeom prst="line">
+              <a:avLst/>
+            </a:prstGeom>
+            <a:ln w="28575">
+              <a:headEnd type="stealth" w="lg" len="lg"/>
+              <a:tailEnd type="stealth" w="lg" len="lg"/>
+            </a:ln>
+          </p:spPr>
+          <p:style>
+            <a:lnRef idx="3">
+              <a:schemeClr val="dk1"/>
+            </a:lnRef>
+            <a:fillRef idx="0">
+              <a:schemeClr val="dk1"/>
+            </a:fillRef>
+            <a:effectRef idx="2">
+              <a:schemeClr val="dk1"/>
+            </a:effectRef>
+            <a:fontRef idx="minor">
+              <a:schemeClr val="tx1"/>
+            </a:fontRef>
+          </p:style>
+        </p:cxnSp>
+        <p:cxnSp>
+          <p:nvCxnSpPr>
+            <p:cNvPr id="11" name="直線接點 10">
+              <a:extLst>
+                <a:ext uri="{FF2B5EF4-FFF2-40B4-BE49-F238E27FC236}">
+                  <a16:creationId xmlns:a16="http://schemas.microsoft.com/office/drawing/2014/main" id="{B8A3A9CD-5036-485E-AEA0-C176E58E340A}"/>
+                </a:ext>
+              </a:extLst>
+            </p:cNvPr>
+            <p:cNvCxnSpPr>
+              <a:cxnSpLocks/>
+            </p:cNvCxnSpPr>
+            <p:nvPr/>
+          </p:nvCxnSpPr>
+          <p:spPr>
+            <a:xfrm>
+              <a:off x="5935099" y="3495675"/>
+              <a:ext cx="0" cy="187325"/>
+            </a:xfrm>
+            <a:prstGeom prst="line">
+              <a:avLst/>
+            </a:prstGeom>
+            <a:ln w="28575">
+              <a:solidFill>
+                <a:schemeClr val="tx1"/>
+              </a:solidFill>
+            </a:ln>
+          </p:spPr>
+          <p:style>
+            <a:lnRef idx="1">
+              <a:schemeClr val="accent1"/>
+            </a:lnRef>
+            <a:fillRef idx="0">
+              <a:schemeClr val="accent1"/>
+            </a:fillRef>
+            <a:effectRef idx="0">
+              <a:schemeClr val="accent1"/>
+            </a:effectRef>
+            <a:fontRef idx="minor">
+              <a:schemeClr val="tx1"/>
+            </a:fontRef>
+          </p:style>
+        </p:cxnSp>
+        <p:cxnSp>
+          <p:nvCxnSpPr>
+            <p:cNvPr id="51" name="直線接點 50">
+              <a:extLst>
+                <a:ext uri="{FF2B5EF4-FFF2-40B4-BE49-F238E27FC236}">
+                  <a16:creationId xmlns:a16="http://schemas.microsoft.com/office/drawing/2014/main" id="{E7F3F4B3-1C59-4B40-B283-F71C9440A357}"/>
+                </a:ext>
+              </a:extLst>
+            </p:cNvPr>
+            <p:cNvCxnSpPr>
+              <a:cxnSpLocks/>
+            </p:cNvCxnSpPr>
+            <p:nvPr/>
+          </p:nvCxnSpPr>
+          <p:spPr>
+            <a:xfrm>
+              <a:off x="8220162" y="3495675"/>
+              <a:ext cx="0" cy="187325"/>
+            </a:xfrm>
+            <a:prstGeom prst="line">
+              <a:avLst/>
+            </a:prstGeom>
+            <a:ln w="28575">
+              <a:solidFill>
+                <a:schemeClr val="tx1"/>
+              </a:solidFill>
+            </a:ln>
+          </p:spPr>
+          <p:style>
+            <a:lnRef idx="1">
+              <a:schemeClr val="accent1"/>
+            </a:lnRef>
+            <a:fillRef idx="0">
+              <a:schemeClr val="accent1"/>
+            </a:fillRef>
+            <a:effectRef idx="0">
+              <a:schemeClr val="accent1"/>
+            </a:effectRef>
+            <a:fontRef idx="minor">
+              <a:schemeClr val="tx1"/>
+            </a:fontRef>
+          </p:style>
+        </p:cxnSp>
+      </p:grpSp>
+      <mc:AlternateContent xmlns:mc="http://schemas.openxmlformats.org/markup-compatibility/2006">
+        <mc:Choice xmlns:a14="http://schemas.microsoft.com/office/drawing/2010/main" Requires="a14">
+          <p:sp>
+            <p:nvSpPr>
+              <p:cNvPr id="56" name="文字方塊 55">
+                <a:extLst>
+                  <a:ext uri="{FF2B5EF4-FFF2-40B4-BE49-F238E27FC236}">
+                    <a16:creationId xmlns:a16="http://schemas.microsoft.com/office/drawing/2014/main" id="{E2A26385-A9D4-41C8-8353-093640823164}"/>
+                  </a:ext>
+                </a:extLst>
+              </p:cNvPr>
+              <p:cNvSpPr txBox="1"/>
+              <p:nvPr/>
+            </p:nvSpPr>
+            <p:spPr>
+              <a:xfrm>
+                <a:off x="1105953" y="1729101"/>
+                <a:ext cx="499134" cy="553998"/>
+              </a:xfrm>
+              <a:prstGeom prst="rect">
+                <a:avLst/>
+              </a:prstGeom>
+              <a:noFill/>
+            </p:spPr>
+            <p:txBody>
+              <a:bodyPr wrap="square" rtlCol="0">
+                <a:spAutoFit/>
+              </a:bodyPr>
+              <a:lstStyle/>
+              <a:p>
+                <a:pPr/>
+                <a14:m>
+                  <m:oMathPara xmlns:m="http://schemas.openxmlformats.org/officeDocument/2006/math">
+                    <m:oMathParaPr>
+                      <m:jc m:val="centerGroup"/>
+                    </m:oMathParaPr>
+                    <m:oMath xmlns:m="http://schemas.openxmlformats.org/officeDocument/2006/math">
+                      <m:r>
+                        <a:rPr lang="en-US" altLang="zh-TW" sz="3000" i="1" smtClean="0">
+                          <a:latin typeface="Cambria Math" panose="02040503050406030204" pitchFamily="18" charset="0"/>
+                        </a:rPr>
+                        <m:t>𝑥</m:t>
+                      </m:r>
+                    </m:oMath>
+                  </m:oMathPara>
+                </a14:m>
+                <a:endParaRPr lang="zh-TW" altLang="en-US" sz="3000" dirty="0"/>
+              </a:p>
+            </p:txBody>
+          </p:sp>
+        </mc:Choice>
+        <mc:Fallback>
+          <p:sp>
+            <p:nvSpPr>
+              <p:cNvPr id="56" name="文字方塊 55">
+                <a:extLst>
+                  <a:ext uri="{FF2B5EF4-FFF2-40B4-BE49-F238E27FC236}">
+                    <a16:creationId xmlns:a16="http://schemas.microsoft.com/office/drawing/2014/main" id="{E2A26385-A9D4-41C8-8353-093640823164}"/>
+                  </a:ext>
+                </a:extLst>
+              </p:cNvPr>
+              <p:cNvSpPr txBox="1">
+                <a:spLocks noRot="1" noChangeAspect="1" noMove="1" noResize="1" noEditPoints="1" noAdjustHandles="1" noChangeArrowheads="1" noChangeShapeType="1" noTextEdit="1"/>
+              </p:cNvSpPr>
+              <p:nvPr/>
+            </p:nvSpPr>
+            <p:spPr>
+              <a:xfrm>
+                <a:off x="1105953" y="1729101"/>
+                <a:ext cx="499134" cy="553998"/>
+              </a:xfrm>
+              <a:prstGeom prst="rect">
+                <a:avLst/>
+              </a:prstGeom>
+              <a:blipFill>
+                <a:blip r:embed="rId5"/>
+                <a:stretch>
+                  <a:fillRect/>
+                </a:stretch>
+              </a:blipFill>
+            </p:spPr>
+            <p:txBody>
+              <a:bodyPr/>
+              <a:lstStyle/>
+              <a:p>
+                <a:r>
+                  <a:rPr lang="zh-TW" altLang="en-US">
+                    <a:noFill/>
+                  </a:rPr>
+                  <a:t> </a:t>
+                </a:r>
+              </a:p>
+            </p:txBody>
+          </p:sp>
+        </mc:Fallback>
+      </mc:AlternateContent>
+      <mc:AlternateContent xmlns:mc="http://schemas.openxmlformats.org/markup-compatibility/2006">
+        <mc:Choice xmlns:a14="http://schemas.microsoft.com/office/drawing/2010/main" Requires="a14">
+          <p:sp>
+            <p:nvSpPr>
+              <p:cNvPr id="57" name="文字方塊 56">
+                <a:extLst>
+                  <a:ext uri="{FF2B5EF4-FFF2-40B4-BE49-F238E27FC236}">
+                    <a16:creationId xmlns:a16="http://schemas.microsoft.com/office/drawing/2014/main" id="{76E17EFA-B51A-4F4D-B96D-C35154FB968A}"/>
+                  </a:ext>
+                </a:extLst>
+              </p:cNvPr>
+              <p:cNvSpPr txBox="1"/>
+              <p:nvPr/>
+            </p:nvSpPr>
+            <p:spPr>
+              <a:xfrm>
+                <a:off x="541896" y="4015875"/>
+                <a:ext cx="499134" cy="553998"/>
+              </a:xfrm>
+              <a:prstGeom prst="rect">
+                <a:avLst/>
+              </a:prstGeom>
+              <a:noFill/>
+            </p:spPr>
+            <p:txBody>
+              <a:bodyPr wrap="square" rtlCol="0">
+                <a:spAutoFit/>
+              </a:bodyPr>
+              <a:lstStyle/>
+              <a:p>
+                <a:pPr/>
+                <a14:m>
+                  <m:oMathPara xmlns:m="http://schemas.openxmlformats.org/officeDocument/2006/math">
+                    <m:oMathParaPr>
+                      <m:jc m:val="centerGroup"/>
+                    </m:oMathParaPr>
+                    <m:oMath xmlns:m="http://schemas.openxmlformats.org/officeDocument/2006/math">
+                      <m:r>
+                        <a:rPr lang="en-US" altLang="zh-TW" sz="3000" b="0" i="1" smtClean="0">
+                          <a:latin typeface="Cambria Math" panose="02040503050406030204" pitchFamily="18" charset="0"/>
+                        </a:rPr>
+                        <m:t>𝑦</m:t>
+                      </m:r>
+                    </m:oMath>
+                  </m:oMathPara>
+                </a14:m>
+                <a:endParaRPr lang="zh-TW" altLang="en-US" sz="3000" dirty="0"/>
+              </a:p>
+            </p:txBody>
+          </p:sp>
+        </mc:Choice>
+        <mc:Fallback>
+          <p:sp>
+            <p:nvSpPr>
+              <p:cNvPr id="57" name="文字方塊 56">
+                <a:extLst>
+                  <a:ext uri="{FF2B5EF4-FFF2-40B4-BE49-F238E27FC236}">
+                    <a16:creationId xmlns:a16="http://schemas.microsoft.com/office/drawing/2014/main" id="{76E17EFA-B51A-4F4D-B96D-C35154FB968A}"/>
+                  </a:ext>
+                </a:extLst>
+              </p:cNvPr>
+              <p:cNvSpPr txBox="1">
+                <a:spLocks noRot="1" noChangeAspect="1" noMove="1" noResize="1" noEditPoints="1" noAdjustHandles="1" noChangeArrowheads="1" noChangeShapeType="1" noTextEdit="1"/>
+              </p:cNvSpPr>
+              <p:nvPr/>
+            </p:nvSpPr>
+            <p:spPr>
+              <a:xfrm>
+                <a:off x="541896" y="4015875"/>
+                <a:ext cx="499134" cy="553998"/>
+              </a:xfrm>
+              <a:prstGeom prst="rect">
+                <a:avLst/>
+              </a:prstGeom>
+              <a:blipFill>
+                <a:blip r:embed="rId6"/>
+                <a:stretch>
+                  <a:fillRect/>
+                </a:stretch>
+              </a:blipFill>
+            </p:spPr>
+            <p:txBody>
+              <a:bodyPr/>
+              <a:lstStyle/>
+              <a:p>
+                <a:r>
+                  <a:rPr lang="zh-TW" altLang="en-US">
+                    <a:noFill/>
+                  </a:rPr>
+                  <a:t> </a:t>
+                </a:r>
+              </a:p>
+            </p:txBody>
+          </p:sp>
+        </mc:Fallback>
+      </mc:AlternateContent>
+      <mc:AlternateContent xmlns:mc="http://schemas.openxmlformats.org/markup-compatibility/2006">
+        <mc:Choice xmlns:a14="http://schemas.microsoft.com/office/drawing/2010/main" Requires="a14">
+          <p:sp>
+            <p:nvSpPr>
+              <p:cNvPr id="74" name="文字方塊 73">
+                <a:extLst>
+                  <a:ext uri="{FF2B5EF4-FFF2-40B4-BE49-F238E27FC236}">
+                    <a16:creationId xmlns:a16="http://schemas.microsoft.com/office/drawing/2014/main" id="{248A2610-F524-4FF1-8E13-399BAC853D86}"/>
+                  </a:ext>
+                </a:extLst>
+              </p:cNvPr>
+              <p:cNvSpPr txBox="1"/>
+              <p:nvPr/>
+            </p:nvSpPr>
+            <p:spPr>
+              <a:xfrm>
+                <a:off x="2964696" y="2854412"/>
+                <a:ext cx="568301" cy="553998"/>
+              </a:xfrm>
+              <a:prstGeom prst="rect">
+                <a:avLst/>
+              </a:prstGeom>
+              <a:noFill/>
+            </p:spPr>
+            <p:txBody>
+              <a:bodyPr wrap="square" rtlCol="0">
+                <a:spAutoFit/>
+              </a:bodyPr>
+              <a:lstStyle/>
+              <a:p>
+                <a:pPr/>
+                <a14:m>
+                  <m:oMathPara xmlns:m="http://schemas.openxmlformats.org/officeDocument/2006/math">
+                    <m:oMathParaPr>
+                      <m:jc m:val="centerGroup"/>
+                    </m:oMathParaPr>
+                    <m:oMath xmlns:m="http://schemas.openxmlformats.org/officeDocument/2006/math">
+                      <m:r>
+                        <a:rPr lang="en-US" altLang="zh-TW" sz="3000" b="1" i="1" smtClean="0">
+                          <a:solidFill>
+                            <a:schemeClr val="accent1"/>
+                          </a:solidFill>
+                          <a:latin typeface="Cambria Math" panose="02040503050406030204" pitchFamily="18" charset="0"/>
+                        </a:rPr>
+                        <m:t>𝒓</m:t>
+                      </m:r>
+                    </m:oMath>
+                  </m:oMathPara>
+                </a14:m>
+                <a:endParaRPr lang="zh-TW" altLang="en-US" sz="3000" b="1" dirty="0">
+                  <a:solidFill>
+                    <a:schemeClr val="accent1"/>
+                  </a:solidFill>
+                </a:endParaRPr>
+              </a:p>
+            </p:txBody>
+          </p:sp>
+        </mc:Choice>
+        <mc:Fallback>
+          <p:sp>
+            <p:nvSpPr>
+              <p:cNvPr id="74" name="文字方塊 73">
+                <a:extLst>
+                  <a:ext uri="{FF2B5EF4-FFF2-40B4-BE49-F238E27FC236}">
+                    <a16:creationId xmlns:a16="http://schemas.microsoft.com/office/drawing/2014/main" id="{248A2610-F524-4FF1-8E13-399BAC853D86}"/>
+                  </a:ext>
+                </a:extLst>
+              </p:cNvPr>
+              <p:cNvSpPr txBox="1">
+                <a:spLocks noRot="1" noChangeAspect="1" noMove="1" noResize="1" noEditPoints="1" noAdjustHandles="1" noChangeArrowheads="1" noChangeShapeType="1" noTextEdit="1"/>
+              </p:cNvSpPr>
+              <p:nvPr/>
+            </p:nvSpPr>
+            <p:spPr>
+              <a:xfrm>
+                <a:off x="2964696" y="2854412"/>
+                <a:ext cx="568301" cy="553998"/>
+              </a:xfrm>
+              <a:prstGeom prst="rect">
+                <a:avLst/>
+              </a:prstGeom>
+              <a:blipFill>
+                <a:blip r:embed="rId7"/>
+                <a:stretch>
+                  <a:fillRect/>
+                </a:stretch>
+              </a:blipFill>
+            </p:spPr>
+            <p:txBody>
+              <a:bodyPr/>
+              <a:lstStyle/>
+              <a:p>
+                <a:r>
+                  <a:rPr lang="zh-TW" altLang="en-US">
+                    <a:noFill/>
+                  </a:rPr>
+                  <a:t> </a:t>
+                </a:r>
+              </a:p>
+            </p:txBody>
+          </p:sp>
+        </mc:Fallback>
+      </mc:AlternateContent>
+      <mc:AlternateContent xmlns:mc="http://schemas.openxmlformats.org/markup-compatibility/2006">
+        <mc:Choice xmlns:a14="http://schemas.microsoft.com/office/drawing/2010/main" Requires="a14">
+          <p:sp>
+            <p:nvSpPr>
+              <p:cNvPr id="77" name="文字方塊 76">
+                <a:extLst>
+                  <a:ext uri="{FF2B5EF4-FFF2-40B4-BE49-F238E27FC236}">
+                    <a16:creationId xmlns:a16="http://schemas.microsoft.com/office/drawing/2014/main" id="{31C61BF8-D808-40F0-9FC4-BEF1BA0BE16B}"/>
+                  </a:ext>
+                </a:extLst>
+              </p:cNvPr>
+              <p:cNvSpPr txBox="1"/>
+              <p:nvPr/>
+            </p:nvSpPr>
+            <p:spPr>
+              <a:xfrm>
+                <a:off x="732422" y="3137331"/>
+                <a:ext cx="568301" cy="553998"/>
+              </a:xfrm>
+              <a:prstGeom prst="rect">
+                <a:avLst/>
+              </a:prstGeom>
+              <a:noFill/>
+            </p:spPr>
+            <p:txBody>
+              <a:bodyPr wrap="square" rtlCol="0">
+                <a:spAutoFit/>
+              </a:bodyPr>
+              <a:lstStyle/>
+              <a:p>
+                <a:pPr/>
+                <a14:m>
+                  <m:oMathPara xmlns:m="http://schemas.openxmlformats.org/officeDocument/2006/math">
+                    <m:oMathParaPr>
+                      <m:jc m:val="centerGroup"/>
+                    </m:oMathParaPr>
+                    <m:oMath xmlns:m="http://schemas.openxmlformats.org/officeDocument/2006/math">
+                      <m:r>
+                        <a:rPr lang="en-US" altLang="zh-TW" sz="3000" b="0" i="1" smtClean="0">
+                          <a:solidFill>
+                            <a:schemeClr val="tx1"/>
+                          </a:solidFill>
+                          <a:latin typeface="Cambria Math" panose="02040503050406030204" pitchFamily="18" charset="0"/>
+                        </a:rPr>
+                        <m:t>𝜌</m:t>
+                      </m:r>
+                    </m:oMath>
+                  </m:oMathPara>
+                </a14:m>
+                <a:endParaRPr lang="zh-TW" altLang="en-US" sz="3000" dirty="0">
+                  <a:solidFill>
+                    <a:schemeClr val="tx1"/>
+                  </a:solidFill>
+                </a:endParaRPr>
+              </a:p>
+            </p:txBody>
+          </p:sp>
+        </mc:Choice>
+        <mc:Fallback>
+          <p:sp>
+            <p:nvSpPr>
+              <p:cNvPr id="77" name="文字方塊 76">
+                <a:extLst>
+                  <a:ext uri="{FF2B5EF4-FFF2-40B4-BE49-F238E27FC236}">
+                    <a16:creationId xmlns:a16="http://schemas.microsoft.com/office/drawing/2014/main" id="{31C61BF8-D808-40F0-9FC4-BEF1BA0BE16B}"/>
+                  </a:ext>
+                </a:extLst>
+              </p:cNvPr>
+              <p:cNvSpPr txBox="1">
+                <a:spLocks noRot="1" noChangeAspect="1" noMove="1" noResize="1" noEditPoints="1" noAdjustHandles="1" noChangeArrowheads="1" noChangeShapeType="1" noTextEdit="1"/>
+              </p:cNvSpPr>
+              <p:nvPr/>
+            </p:nvSpPr>
+            <p:spPr>
+              <a:xfrm>
+                <a:off x="732422" y="3137331"/>
+                <a:ext cx="568301" cy="553998"/>
+              </a:xfrm>
+              <a:prstGeom prst="rect">
+                <a:avLst/>
+              </a:prstGeom>
+              <a:blipFill>
+                <a:blip r:embed="rId8"/>
+                <a:stretch>
+                  <a:fillRect/>
+                </a:stretch>
+              </a:blipFill>
+            </p:spPr>
+            <p:txBody>
+              <a:bodyPr/>
+              <a:lstStyle/>
+              <a:p>
+                <a:r>
+                  <a:rPr lang="zh-TW" altLang="en-US">
+                    <a:noFill/>
+                  </a:rPr>
+                  <a:t> </a:t>
+                </a:r>
+              </a:p>
+            </p:txBody>
+          </p:sp>
+        </mc:Fallback>
+      </mc:AlternateContent>
+      <p:sp>
+        <p:nvSpPr>
+          <p:cNvPr id="30" name="局部圓 29">
+            <a:extLst>
+              <a:ext uri="{FF2B5EF4-FFF2-40B4-BE49-F238E27FC236}">
+                <a16:creationId xmlns:a16="http://schemas.microsoft.com/office/drawing/2014/main" id="{F19B8E23-0D08-4E0A-8FCB-627D0AE9906A}"/>
+              </a:ext>
+            </a:extLst>
+          </p:cNvPr>
+          <p:cNvSpPr/>
+          <p:nvPr/>
+        </p:nvSpPr>
+        <p:spPr>
+          <a:xfrm>
+            <a:off x="1155701" y="3081171"/>
+            <a:ext cx="337072" cy="718338"/>
+          </a:xfrm>
+          <a:prstGeom prst="pie">
+            <a:avLst>
+              <a:gd name="adj1" fmla="val 12729732"/>
+              <a:gd name="adj2" fmla="val 16200000"/>
+            </a:avLst>
+          </a:prstGeom>
+          <a:gradFill flip="none" rotWithShape="1">
+            <a:gsLst>
+              <a:gs pos="0">
+                <a:schemeClr val="accent1"/>
+              </a:gs>
+              <a:gs pos="43000">
+                <a:schemeClr val="accent1">
+                  <a:lumMod val="40000"/>
+                  <a:lumOff val="60000"/>
+                </a:schemeClr>
+              </a:gs>
+            </a:gsLst>
+            <a:lin ang="13500000" scaled="1"/>
+            <a:tileRect/>
+          </a:gradFill>
+          <a:ln w="6350">
+            <a:solidFill>
+              <a:schemeClr val="tx1"/>
+            </a:solidFill>
+          </a:ln>
+        </p:spPr>
+        <p:style>
+          <a:lnRef idx="2">
+            <a:schemeClr val="accent1">
+              <a:shade val="50000"/>
+            </a:schemeClr>
+          </a:lnRef>
+          <a:fillRef idx="1">
+            <a:schemeClr val="accent1"/>
+          </a:fillRef>
+          <a:effectRef idx="0">
+            <a:schemeClr val="accent1"/>
+          </a:effectRef>
+          <a:fontRef idx="minor">
+            <a:schemeClr val="lt1"/>
+          </a:fontRef>
+        </p:style>
+        <p:txBody>
+          <a:bodyPr rtlCol="0" anchor="ctr"/>
+          <a:lstStyle/>
+          <a:p>
+            <a:pPr algn="ctr"/>
+            <a:endParaRPr lang="zh-TW" altLang="en-US" sz="3000">
+              <a:solidFill>
+                <a:schemeClr val="tx1"/>
+              </a:solidFill>
+            </a:endParaRPr>
+          </a:p>
+        </p:txBody>
+      </p:sp>
+      <p:cxnSp>
+        <p:nvCxnSpPr>
+          <p:cNvPr id="75" name="直線接點 74">
+            <a:extLst>
+              <a:ext uri="{FF2B5EF4-FFF2-40B4-BE49-F238E27FC236}">
+                <a16:creationId xmlns:a16="http://schemas.microsoft.com/office/drawing/2014/main" id="{9620E7BD-7CD3-4C24-86EB-D1EF2FCE4D50}"/>
+              </a:ext>
+            </a:extLst>
+          </p:cNvPr>
+          <p:cNvCxnSpPr>
+            <a:cxnSpLocks/>
+          </p:cNvCxnSpPr>
+          <p:nvPr/>
+        </p:nvCxnSpPr>
+        <p:spPr>
+          <a:xfrm flipH="1" flipV="1">
+            <a:off x="881064" y="3148013"/>
+            <a:ext cx="452830" cy="292103"/>
+          </a:xfrm>
+          <a:prstGeom prst="line">
+            <a:avLst/>
+          </a:prstGeom>
+          <a:ln w="28575">
+            <a:solidFill>
+              <a:schemeClr val="accent1"/>
+            </a:solidFill>
+            <a:headEnd type="none" w="sm" len="sm"/>
+            <a:tailEnd type="stealth" w="lg" len="lg"/>
+          </a:ln>
+        </p:spPr>
+        <p:style>
+          <a:lnRef idx="3">
+            <a:schemeClr val="dk1"/>
+          </a:lnRef>
+          <a:fillRef idx="0">
+            <a:schemeClr val="dk1"/>
+          </a:fillRef>
+          <a:effectRef idx="2">
+            <a:schemeClr val="dk1"/>
+          </a:effectRef>
+          <a:fontRef idx="minor">
+            <a:schemeClr val="tx1"/>
+          </a:fontRef>
+        </p:style>
+      </p:cxnSp>
+      <p:cxnSp>
+        <p:nvCxnSpPr>
+          <p:cNvPr id="65" name="直線接點 64">
+            <a:extLst>
+              <a:ext uri="{FF2B5EF4-FFF2-40B4-BE49-F238E27FC236}">
+                <a16:creationId xmlns:a16="http://schemas.microsoft.com/office/drawing/2014/main" id="{55625116-D964-4EE9-8A48-C4E713344F63}"/>
+              </a:ext>
+            </a:extLst>
+          </p:cNvPr>
+          <p:cNvCxnSpPr>
+            <a:cxnSpLocks/>
+          </p:cNvCxnSpPr>
+          <p:nvPr/>
+        </p:nvCxnSpPr>
+        <p:spPr>
+          <a:xfrm flipH="1" flipV="1">
+            <a:off x="881064" y="3148013"/>
+            <a:ext cx="2160587" cy="0"/>
+          </a:xfrm>
+          <a:prstGeom prst="line">
+            <a:avLst/>
+          </a:prstGeom>
+          <a:ln w="9525" cap="flat" cmpd="sng" algn="ctr">
+            <a:solidFill>
+              <a:schemeClr val="dk1"/>
+            </a:solidFill>
+            <a:prstDash val="dash"/>
+            <a:round/>
+            <a:headEnd type="none" w="med" len="med"/>
+            <a:tailEnd type="none" w="med" len="med"/>
+          </a:ln>
+        </p:spPr>
+        <p:style>
+          <a:lnRef idx="0">
+            <a:scrgbClr r="0" g="0" b="0"/>
+          </a:lnRef>
+          <a:fillRef idx="0">
+            <a:scrgbClr r="0" g="0" b="0"/>
+          </a:fillRef>
+          <a:effectRef idx="0">
+            <a:scrgbClr r="0" g="0" b="0"/>
+          </a:effectRef>
+          <a:fontRef idx="minor">
+            <a:schemeClr val="tx1"/>
+          </a:fontRef>
+        </p:style>
+      </p:cxnSp>
+      <mc:AlternateContent xmlns:mc="http://schemas.openxmlformats.org/markup-compatibility/2006">
+        <mc:Choice xmlns:a14="http://schemas.microsoft.com/office/drawing/2010/main" Requires="a14">
+          <p:sp>
+            <p:nvSpPr>
+              <p:cNvPr id="82" name="文字方塊 81">
+                <a:extLst>
+                  <a:ext uri="{FF2B5EF4-FFF2-40B4-BE49-F238E27FC236}">
+                    <a16:creationId xmlns:a16="http://schemas.microsoft.com/office/drawing/2014/main" id="{AF525ACF-DF2B-41CE-9ECF-58AFA98BA304}"/>
+                  </a:ext>
+                </a:extLst>
+              </p:cNvPr>
+              <p:cNvSpPr txBox="1"/>
+              <p:nvPr/>
+            </p:nvSpPr>
+            <p:spPr>
+              <a:xfrm>
+                <a:off x="865284" y="2679722"/>
+                <a:ext cx="568301" cy="553998"/>
+              </a:xfrm>
+              <a:prstGeom prst="rect">
+                <a:avLst/>
+              </a:prstGeom>
+              <a:noFill/>
+            </p:spPr>
+            <p:txBody>
+              <a:bodyPr wrap="square" rtlCol="0">
+                <a:spAutoFit/>
+              </a:bodyPr>
+              <a:lstStyle/>
+              <a:p>
+                <a:pPr/>
+                <a14:m>
+                  <m:oMathPara xmlns:m="http://schemas.openxmlformats.org/officeDocument/2006/math">
+                    <m:oMathParaPr>
+                      <m:jc m:val="centerGroup"/>
+                    </m:oMathParaPr>
+                    <m:oMath xmlns:m="http://schemas.openxmlformats.org/officeDocument/2006/math">
+                      <m:r>
+                        <a:rPr lang="en-US" altLang="zh-TW" sz="3000" b="0" i="1" smtClean="0">
+                          <a:solidFill>
+                            <a:schemeClr val="tx1"/>
+                          </a:solidFill>
+                          <a:latin typeface="Cambria Math" panose="02040503050406030204" pitchFamily="18" charset="0"/>
+                        </a:rPr>
+                        <m:t>𝜙</m:t>
+                      </m:r>
+                    </m:oMath>
+                  </m:oMathPara>
+                </a14:m>
+                <a:endParaRPr lang="zh-TW" altLang="en-US" sz="3000" dirty="0">
+                  <a:solidFill>
+                    <a:schemeClr val="tx1"/>
+                  </a:solidFill>
+                </a:endParaRPr>
+              </a:p>
+            </p:txBody>
+          </p:sp>
+        </mc:Choice>
+        <mc:Fallback>
+          <p:sp>
+            <p:nvSpPr>
+              <p:cNvPr id="82" name="文字方塊 81">
+                <a:extLst>
+                  <a:ext uri="{FF2B5EF4-FFF2-40B4-BE49-F238E27FC236}">
+                    <a16:creationId xmlns:a16="http://schemas.microsoft.com/office/drawing/2014/main" id="{AF525ACF-DF2B-41CE-9ECF-58AFA98BA304}"/>
+                  </a:ext>
+                </a:extLst>
+              </p:cNvPr>
+              <p:cNvSpPr txBox="1">
+                <a:spLocks noRot="1" noChangeAspect="1" noMove="1" noResize="1" noEditPoints="1" noAdjustHandles="1" noChangeArrowheads="1" noChangeShapeType="1" noTextEdit="1"/>
+              </p:cNvSpPr>
+              <p:nvPr/>
+            </p:nvSpPr>
+            <p:spPr>
+              <a:xfrm>
+                <a:off x="865284" y="2679722"/>
+                <a:ext cx="568301" cy="553998"/>
+              </a:xfrm>
+              <a:prstGeom prst="rect">
+                <a:avLst/>
+              </a:prstGeom>
+              <a:blipFill>
+                <a:blip r:embed="rId9"/>
+                <a:stretch>
+                  <a:fillRect/>
+                </a:stretch>
+              </a:blipFill>
+            </p:spPr>
+            <p:txBody>
+              <a:bodyPr/>
+              <a:lstStyle/>
+              <a:p>
+                <a:r>
+                  <a:rPr lang="zh-TW" altLang="en-US">
+                    <a:noFill/>
+                  </a:rPr>
+                  <a:t> </a:t>
+                </a:r>
+              </a:p>
+            </p:txBody>
+          </p:sp>
+        </mc:Fallback>
+      </mc:AlternateContent>
+      <p:cxnSp>
+        <p:nvCxnSpPr>
+          <p:cNvPr id="63" name="直線接點 62">
+            <a:extLst>
+              <a:ext uri="{FF2B5EF4-FFF2-40B4-BE49-F238E27FC236}">
+                <a16:creationId xmlns:a16="http://schemas.microsoft.com/office/drawing/2014/main" id="{3EAE5234-D1A5-470F-A367-71E7A1FA8DA3}"/>
+              </a:ext>
+            </a:extLst>
+          </p:cNvPr>
+          <p:cNvCxnSpPr>
+            <a:cxnSpLocks/>
+          </p:cNvCxnSpPr>
+          <p:nvPr/>
+        </p:nvCxnSpPr>
+        <p:spPr>
+          <a:xfrm flipV="1">
+            <a:off x="1326749" y="3145631"/>
+            <a:ext cx="1723633" cy="282577"/>
+          </a:xfrm>
+          <a:prstGeom prst="line">
+            <a:avLst/>
+          </a:prstGeom>
+          <a:ln w="38100">
+            <a:solidFill>
+              <a:schemeClr val="accent1"/>
+            </a:solidFill>
+            <a:headEnd type="none" w="sm" len="sm"/>
+            <a:tailEnd type="stealth" w="lg" len="lg"/>
+          </a:ln>
+        </p:spPr>
+        <p:style>
+          <a:lnRef idx="3">
+            <a:schemeClr val="dk1"/>
+          </a:lnRef>
+          <a:fillRef idx="0">
+            <a:schemeClr val="dk1"/>
+          </a:fillRef>
+          <a:effectRef idx="2">
+            <a:schemeClr val="dk1"/>
+          </a:effectRef>
+          <a:fontRef idx="minor">
+            <a:schemeClr val="tx1"/>
+          </a:fontRef>
+        </p:style>
+      </p:cxnSp>
+      <p:cxnSp>
+        <p:nvCxnSpPr>
+          <p:cNvPr id="61" name="直線接點 60">
+            <a:extLst>
+              <a:ext uri="{FF2B5EF4-FFF2-40B4-BE49-F238E27FC236}">
+                <a16:creationId xmlns:a16="http://schemas.microsoft.com/office/drawing/2014/main" id="{DC03B474-6152-440A-8754-0451AF2AD4AF}"/>
+              </a:ext>
+            </a:extLst>
+          </p:cNvPr>
+          <p:cNvCxnSpPr>
+            <a:cxnSpLocks/>
+          </p:cNvCxnSpPr>
+          <p:nvPr/>
+        </p:nvCxnSpPr>
+        <p:spPr>
+          <a:xfrm flipH="1">
+            <a:off x="895351" y="3417184"/>
+            <a:ext cx="441820" cy="768633"/>
+          </a:xfrm>
+          <a:prstGeom prst="line">
+            <a:avLst/>
+          </a:prstGeom>
+          <a:ln w="28575">
+            <a:headEnd type="none" w="sm" len="sm"/>
+            <a:tailEnd type="stealth" w="med" len="med"/>
+          </a:ln>
+        </p:spPr>
+        <p:style>
+          <a:lnRef idx="3">
+            <a:schemeClr val="dk1"/>
+          </a:lnRef>
+          <a:fillRef idx="0">
+            <a:schemeClr val="dk1"/>
+          </a:fillRef>
+          <a:effectRef idx="2">
+            <a:schemeClr val="dk1"/>
+          </a:effectRef>
+          <a:fontRef idx="minor">
+            <a:schemeClr val="tx1"/>
+          </a:fontRef>
+        </p:style>
+      </p:cxnSp>
+      <p:cxnSp>
+        <p:nvCxnSpPr>
+          <p:cNvPr id="62" name="直線接點 61">
+            <a:extLst>
+              <a:ext uri="{FF2B5EF4-FFF2-40B4-BE49-F238E27FC236}">
+                <a16:creationId xmlns:a16="http://schemas.microsoft.com/office/drawing/2014/main" id="{80470041-FE1C-4941-B160-B10EB2E8790A}"/>
+              </a:ext>
+            </a:extLst>
+          </p:cNvPr>
+          <p:cNvCxnSpPr>
+            <a:cxnSpLocks/>
+          </p:cNvCxnSpPr>
+          <p:nvPr/>
+        </p:nvCxnSpPr>
+        <p:spPr>
+          <a:xfrm>
+            <a:off x="1333994" y="2166284"/>
+            <a:ext cx="0" cy="1263600"/>
+          </a:xfrm>
+          <a:prstGeom prst="line">
+            <a:avLst/>
+          </a:prstGeom>
+          <a:ln w="28575">
+            <a:headEnd type="stealth" w="med" len="med"/>
+            <a:tailEnd type="none" w="med" len="med"/>
+          </a:ln>
+        </p:spPr>
+        <p:style>
+          <a:lnRef idx="3">
+            <a:schemeClr val="dk1"/>
+          </a:lnRef>
+          <a:fillRef idx="0">
+            <a:schemeClr val="dk1"/>
+          </a:fillRef>
+          <a:effectRef idx="2">
+            <a:schemeClr val="dk1"/>
+          </a:effectRef>
+          <a:fontRef idx="minor">
+            <a:schemeClr val="tx1"/>
+          </a:fontRef>
+        </p:style>
+      </p:cxnSp>
+      <mc:AlternateContent xmlns:mc="http://schemas.openxmlformats.org/markup-compatibility/2006">
+        <mc:Choice xmlns:a14="http://schemas.microsoft.com/office/drawing/2010/main" Requires="a14">
+          <p:sp>
+            <p:nvSpPr>
+              <p:cNvPr id="98" name="文字方塊 97">
+                <a:extLst>
+                  <a:ext uri="{FF2B5EF4-FFF2-40B4-BE49-F238E27FC236}">
+                    <a16:creationId xmlns:a16="http://schemas.microsoft.com/office/drawing/2014/main" id="{34AA5AE1-9ECA-4C1D-98BE-DEB9974B190F}"/>
+                  </a:ext>
+                </a:extLst>
+              </p:cNvPr>
+              <p:cNvSpPr txBox="1"/>
+              <p:nvPr/>
+            </p:nvSpPr>
+            <p:spPr>
+              <a:xfrm>
+                <a:off x="413799" y="2723219"/>
+                <a:ext cx="568301" cy="563872"/>
+              </a:xfrm>
+              <a:prstGeom prst="rect">
+                <a:avLst/>
+              </a:prstGeom>
+              <a:noFill/>
+            </p:spPr>
+            <p:txBody>
+              <a:bodyPr wrap="square" rtlCol="0">
+                <a:spAutoFit/>
+              </a:bodyPr>
+              <a:lstStyle/>
+              <a:p>
+                <a:pPr/>
+                <a14:m>
+                  <m:oMathPara xmlns:m="http://schemas.openxmlformats.org/officeDocument/2006/math">
+                    <m:oMathParaPr>
+                      <m:jc m:val="centerGroup"/>
+                    </m:oMathParaPr>
+                    <m:oMath xmlns:m="http://schemas.openxmlformats.org/officeDocument/2006/math">
+                      <m:sSub>
+                        <m:sSubPr>
+                          <m:ctrlPr>
+                            <a:rPr lang="en-US" altLang="zh-TW" sz="3000" b="1" i="1" smtClean="0">
+                              <a:solidFill>
+                                <a:schemeClr val="accent1"/>
+                              </a:solidFill>
+                              <a:latin typeface="Cambria Math" panose="02040503050406030204" pitchFamily="18" charset="0"/>
+                            </a:rPr>
+                          </m:ctrlPr>
+                        </m:sSubPr>
+                        <m:e>
+                          <m:r>
+                            <a:rPr lang="en-US" altLang="zh-TW" sz="3000" b="1" i="1" smtClean="0">
+                              <a:solidFill>
+                                <a:schemeClr val="accent1"/>
+                              </a:solidFill>
+                              <a:latin typeface="Cambria Math" panose="02040503050406030204" pitchFamily="18" charset="0"/>
+                            </a:rPr>
+                            <m:t>𝒓</m:t>
+                          </m:r>
+                        </m:e>
+                        <m:sub>
+                          <m:r>
+                            <a:rPr lang="en-US" altLang="zh-TW" sz="3000" b="1" i="1" smtClean="0">
+                              <a:solidFill>
+                                <a:schemeClr val="accent1"/>
+                              </a:solidFill>
+                              <a:latin typeface="Cambria Math" panose="02040503050406030204" pitchFamily="18" charset="0"/>
+                            </a:rPr>
+                            <m:t>∥</m:t>
+                          </m:r>
+                        </m:sub>
+                      </m:sSub>
+                    </m:oMath>
+                  </m:oMathPara>
+                </a14:m>
+                <a:endParaRPr lang="zh-TW" altLang="en-US" sz="3000" b="1" dirty="0">
+                  <a:solidFill>
+                    <a:schemeClr val="accent1"/>
+                  </a:solidFill>
+                </a:endParaRPr>
+              </a:p>
+            </p:txBody>
+          </p:sp>
+        </mc:Choice>
+        <mc:Fallback>
+          <p:sp>
+            <p:nvSpPr>
+              <p:cNvPr id="98" name="文字方塊 97">
+                <a:extLst>
+                  <a:ext uri="{FF2B5EF4-FFF2-40B4-BE49-F238E27FC236}">
+                    <a16:creationId xmlns:a16="http://schemas.microsoft.com/office/drawing/2014/main" id="{34AA5AE1-9ECA-4C1D-98BE-DEB9974B190F}"/>
+                  </a:ext>
+                </a:extLst>
+              </p:cNvPr>
+              <p:cNvSpPr txBox="1">
+                <a:spLocks noRot="1" noChangeAspect="1" noMove="1" noResize="1" noEditPoints="1" noAdjustHandles="1" noChangeArrowheads="1" noChangeShapeType="1" noTextEdit="1"/>
+              </p:cNvSpPr>
+              <p:nvPr/>
+            </p:nvSpPr>
+            <p:spPr>
+              <a:xfrm>
+                <a:off x="413799" y="2723219"/>
+                <a:ext cx="568301" cy="563872"/>
+              </a:xfrm>
+              <a:prstGeom prst="rect">
+                <a:avLst/>
+              </a:prstGeom>
+              <a:blipFill>
+                <a:blip r:embed="rId10"/>
+                <a:stretch>
+                  <a:fillRect/>
+                </a:stretch>
+              </a:blipFill>
+            </p:spPr>
+            <p:txBody>
+              <a:bodyPr/>
+              <a:lstStyle/>
+              <a:p>
+                <a:r>
+                  <a:rPr lang="zh-TW" altLang="en-US">
+                    <a:noFill/>
+                  </a:rPr>
+                  <a:t> </a:t>
+                </a:r>
+              </a:p>
+            </p:txBody>
+          </p:sp>
+        </mc:Fallback>
+      </mc:AlternateContent>
+      <mc:AlternateContent xmlns:mc="http://schemas.openxmlformats.org/markup-compatibility/2006">
+        <mc:Choice xmlns:a14="http://schemas.microsoft.com/office/drawing/2010/main" Requires="a14">
+          <p:sp>
+            <p:nvSpPr>
+              <p:cNvPr id="38" name="文字方塊 37">
+                <a:extLst>
+                  <a:ext uri="{FF2B5EF4-FFF2-40B4-BE49-F238E27FC236}">
+                    <a16:creationId xmlns:a16="http://schemas.microsoft.com/office/drawing/2014/main" id="{8870104A-1DCA-4DF6-9FFD-3C40E710269B}"/>
+                  </a:ext>
+                </a:extLst>
+              </p:cNvPr>
+              <p:cNvSpPr txBox="1"/>
+              <p:nvPr/>
+            </p:nvSpPr>
+            <p:spPr>
+              <a:xfrm>
+                <a:off x="7816084" y="3156691"/>
+                <a:ext cx="499134" cy="553998"/>
+              </a:xfrm>
+              <a:prstGeom prst="rect">
+                <a:avLst/>
+              </a:prstGeom>
+              <a:noFill/>
+            </p:spPr>
+            <p:txBody>
+              <a:bodyPr wrap="square" rtlCol="0">
+                <a:spAutoFit/>
+              </a:bodyPr>
+              <a:lstStyle/>
+              <a:p>
+                <a:pPr/>
+                <a14:m>
+                  <m:oMathPara xmlns:m="http://schemas.openxmlformats.org/officeDocument/2006/math">
+                    <m:oMathParaPr>
+                      <m:jc m:val="centerGroup"/>
+                    </m:oMathParaPr>
+                    <m:oMath xmlns:m="http://schemas.openxmlformats.org/officeDocument/2006/math">
+                      <m:acc>
+                        <m:accPr>
+                          <m:chr m:val="̂"/>
+                          <m:ctrlPr>
+                            <a:rPr lang="en-US" altLang="zh-TW" sz="3000" b="0" i="1" smtClean="0">
+                              <a:latin typeface="Cambria Math" panose="02040503050406030204" pitchFamily="18" charset="0"/>
+                            </a:rPr>
+                          </m:ctrlPr>
+                        </m:accPr>
+                        <m:e>
+                          <m:r>
+                            <a:rPr lang="en-US" altLang="zh-TW" sz="3000" i="1">
+                              <a:latin typeface="Cambria Math" panose="02040503050406030204" pitchFamily="18" charset="0"/>
+                            </a:rPr>
+                            <m:t>𝑧</m:t>
+                          </m:r>
+                        </m:e>
+                      </m:acc>
+                    </m:oMath>
+                  </m:oMathPara>
+                </a14:m>
+                <a:endParaRPr lang="zh-TW" altLang="en-US" sz="3000" dirty="0"/>
+              </a:p>
+            </p:txBody>
+          </p:sp>
+        </mc:Choice>
+        <mc:Fallback>
+          <p:sp>
+            <p:nvSpPr>
+              <p:cNvPr id="38" name="文字方塊 37">
+                <a:extLst>
+                  <a:ext uri="{FF2B5EF4-FFF2-40B4-BE49-F238E27FC236}">
+                    <a16:creationId xmlns:a16="http://schemas.microsoft.com/office/drawing/2014/main" id="{8870104A-1DCA-4DF6-9FFD-3C40E710269B}"/>
+                  </a:ext>
+                </a:extLst>
+              </p:cNvPr>
+              <p:cNvSpPr txBox="1">
+                <a:spLocks noRot="1" noChangeAspect="1" noMove="1" noResize="1" noEditPoints="1" noAdjustHandles="1" noChangeArrowheads="1" noChangeShapeType="1" noTextEdit="1"/>
+              </p:cNvSpPr>
+              <p:nvPr/>
+            </p:nvSpPr>
+            <p:spPr>
+              <a:xfrm>
+                <a:off x="7816084" y="3156691"/>
+                <a:ext cx="499134" cy="553998"/>
+              </a:xfrm>
+              <a:prstGeom prst="rect">
+                <a:avLst/>
+              </a:prstGeom>
+              <a:blipFill>
+                <a:blip r:embed="rId11"/>
+                <a:stretch>
+                  <a:fillRect/>
+                </a:stretch>
+              </a:blipFill>
+            </p:spPr>
+            <p:txBody>
+              <a:bodyPr/>
+              <a:lstStyle/>
+              <a:p>
+                <a:r>
+                  <a:rPr lang="zh-TW" altLang="en-US">
+                    <a:noFill/>
+                  </a:rPr>
+                  <a:t> </a:t>
+                </a:r>
+              </a:p>
+            </p:txBody>
+          </p:sp>
+        </mc:Fallback>
+      </mc:AlternateContent>
+      <p:cxnSp>
+        <p:nvCxnSpPr>
+          <p:cNvPr id="5" name="直線接點 4">
+            <a:extLst>
+              <a:ext uri="{FF2B5EF4-FFF2-40B4-BE49-F238E27FC236}">
+                <a16:creationId xmlns:a16="http://schemas.microsoft.com/office/drawing/2014/main" id="{1F22D617-688D-4CF1-A375-0984F030B57C}"/>
+              </a:ext>
+            </a:extLst>
+          </p:cNvPr>
+          <p:cNvCxnSpPr>
+            <a:cxnSpLocks/>
+          </p:cNvCxnSpPr>
+          <p:nvPr/>
+        </p:nvCxnSpPr>
+        <p:spPr>
+          <a:xfrm>
+            <a:off x="7223168" y="3429000"/>
+            <a:ext cx="721759" cy="0"/>
+          </a:xfrm>
+          <a:prstGeom prst="line">
+            <a:avLst/>
+          </a:prstGeom>
+          <a:ln w="76200">
+            <a:headEnd type="none" w="sm" len="sm"/>
+            <a:tailEnd type="stealth" w="lg" len="lg"/>
+          </a:ln>
+        </p:spPr>
+        <p:style>
+          <a:lnRef idx="3">
+            <a:schemeClr val="dk1"/>
+          </a:lnRef>
+          <a:fillRef idx="0">
+            <a:schemeClr val="dk1"/>
+          </a:fillRef>
+          <a:effectRef idx="2">
+            <a:schemeClr val="dk1"/>
+          </a:effectRef>
+          <a:fontRef idx="minor">
+            <a:schemeClr val="tx1"/>
+          </a:fontRef>
+        </p:style>
+      </p:cxnSp>
+      <p:cxnSp>
+        <p:nvCxnSpPr>
+          <p:cNvPr id="106" name="直線接點 105">
+            <a:extLst>
+              <a:ext uri="{FF2B5EF4-FFF2-40B4-BE49-F238E27FC236}">
+                <a16:creationId xmlns:a16="http://schemas.microsoft.com/office/drawing/2014/main" id="{6AC8ED98-3874-4517-942D-D6329879B727}"/>
+              </a:ext>
+            </a:extLst>
+          </p:cNvPr>
+          <p:cNvCxnSpPr>
+            <a:cxnSpLocks/>
+          </p:cNvCxnSpPr>
+          <p:nvPr/>
+        </p:nvCxnSpPr>
+        <p:spPr>
+          <a:xfrm>
+            <a:off x="1320801" y="3429000"/>
+            <a:ext cx="2184400" cy="0"/>
+          </a:xfrm>
+          <a:prstGeom prst="line">
+            <a:avLst/>
+          </a:prstGeom>
+          <a:ln w="76200"/>
+        </p:spPr>
+        <p:style>
+          <a:lnRef idx="3">
+            <a:schemeClr val="dk1"/>
+          </a:lnRef>
+          <a:fillRef idx="0">
+            <a:schemeClr val="dk1"/>
+          </a:fillRef>
+          <a:effectRef idx="2">
+            <a:schemeClr val="dk1"/>
+          </a:effectRef>
+          <a:fontRef idx="minor">
+            <a:schemeClr val="tx1"/>
+          </a:fontRef>
+        </p:style>
+      </p:cxnSp>
+      <p:sp>
+        <p:nvSpPr>
+          <p:cNvPr id="110" name="橢圓 109">
+            <a:extLst>
+              <a:ext uri="{FF2B5EF4-FFF2-40B4-BE49-F238E27FC236}">
+                <a16:creationId xmlns:a16="http://schemas.microsoft.com/office/drawing/2014/main" id="{8A103C75-0ACD-4325-89D9-F3E097D5E303}"/>
+              </a:ext>
+            </a:extLst>
+          </p:cNvPr>
+          <p:cNvSpPr/>
+          <p:nvPr/>
+        </p:nvSpPr>
+        <p:spPr>
+          <a:xfrm>
+            <a:off x="8211975" y="1085951"/>
+            <a:ext cx="786232" cy="4692549"/>
+          </a:xfrm>
+          <a:prstGeom prst="ellipse">
+            <a:avLst/>
+          </a:prstGeom>
+          <a:solidFill>
+            <a:srgbClr val="A9D18E">
+              <a:alpha val="89804"/>
+            </a:srgbClr>
+          </a:solidFill>
+          <a:ln w="19050">
+            <a:solidFill>
+              <a:schemeClr val="accent6">
+                <a:lumMod val="60000"/>
+                <a:lumOff val="40000"/>
+              </a:schemeClr>
+            </a:solidFill>
+          </a:ln>
+        </p:spPr>
+        <p:style>
+          <a:lnRef idx="2">
+            <a:schemeClr val="accent1">
+              <a:shade val="50000"/>
+            </a:schemeClr>
+          </a:lnRef>
+          <a:fillRef idx="1">
+            <a:schemeClr val="accent1"/>
+          </a:fillRef>
+          <a:effectRef idx="0">
+            <a:schemeClr val="accent1"/>
+          </a:effectRef>
+          <a:fontRef idx="minor">
+            <a:schemeClr val="lt1"/>
+          </a:fontRef>
+        </p:style>
+        <p:txBody>
+          <a:bodyPr rtlCol="0" anchor="ctr"/>
+          <a:lstStyle/>
+          <a:p>
+            <a:pPr algn="ctr"/>
+            <a:endParaRPr lang="zh-TW" altLang="en-US" sz="3000"/>
+          </a:p>
+        </p:txBody>
+      </p:sp>
+      <p:pic>
+        <p:nvPicPr>
+          <p:cNvPr id="135" name="圖片 134">
+            <a:extLst>
+              <a:ext uri="{FF2B5EF4-FFF2-40B4-BE49-F238E27FC236}">
+                <a16:creationId xmlns:a16="http://schemas.microsoft.com/office/drawing/2014/main" id="{0E475765-0215-4CA7-A97F-70EF08613F82}"/>
+              </a:ext>
+            </a:extLst>
+          </p:cNvPr>
+          <p:cNvPicPr>
+            <a:picLocks noChangeAspect="1"/>
+          </p:cNvPicPr>
+          <p:nvPr/>
+        </p:nvPicPr>
+        <p:blipFill rotWithShape="1">
+          <a:blip r:embed="rId12"/>
+          <a:srcRect l="1" r="63530"/>
+          <a:stretch/>
+        </p:blipFill>
+        <p:spPr>
+          <a:xfrm rot="7394936">
+            <a:off x="1029705" y="3075746"/>
+            <a:ext cx="89908" cy="510935"/>
+          </a:xfrm>
+          <a:prstGeom prst="rect">
+            <a:avLst/>
+          </a:prstGeom>
+        </p:spPr>
+      </p:pic>
+    </p:spTree>
+    <p:extLst>
+      <p:ext uri="{BB962C8B-B14F-4D97-AF65-F5344CB8AC3E}">
+        <p14:creationId xmlns:p14="http://schemas.microsoft.com/office/powerpoint/2010/main" val="214314731"/>
       </p:ext>
     </p:extLst>
   </p:cSld>

--- a/Final/Figures/Rrange.pptx
+++ b/Final/Figures/Rrange.pptx
@@ -7,6 +7,7 @@
   <p:sldIdLst>
     <p:sldId id="256" r:id="rId2"/>
     <p:sldId id="257" r:id="rId3"/>
+    <p:sldId id="258" r:id="rId4"/>
   </p:sldIdLst>
   <p:sldSz cx="9906000" cy="6858000" type="A4"/>
   <p:notesSz cx="6858000" cy="9144000"/>
@@ -244,7 +245,7 @@
           <a:p>
             <a:fld id="{96B2E576-E176-4636-8106-C6403D35D5FE}" type="datetimeFigureOut">
               <a:rPr lang="zh-TW" altLang="en-US" smtClean="0"/>
-              <a:t>2026/6/30</a:t>
+              <a:t>2026/7/2</a:t>
             </a:fld>
             <a:endParaRPr lang="zh-TW" altLang="en-US"/>
           </a:p>
@@ -414,7 +415,7 @@
           <a:p>
             <a:fld id="{96B2E576-E176-4636-8106-C6403D35D5FE}" type="datetimeFigureOut">
               <a:rPr lang="zh-TW" altLang="en-US" smtClean="0"/>
-              <a:t>2026/6/30</a:t>
+              <a:t>2026/7/2</a:t>
             </a:fld>
             <a:endParaRPr lang="zh-TW" altLang="en-US"/>
           </a:p>
@@ -594,7 +595,7 @@
           <a:p>
             <a:fld id="{96B2E576-E176-4636-8106-C6403D35D5FE}" type="datetimeFigureOut">
               <a:rPr lang="zh-TW" altLang="en-US" smtClean="0"/>
-              <a:t>2026/6/30</a:t>
+              <a:t>2026/7/2</a:t>
             </a:fld>
             <a:endParaRPr lang="zh-TW" altLang="en-US"/>
           </a:p>
@@ -764,7 +765,7 @@
           <a:p>
             <a:fld id="{96B2E576-E176-4636-8106-C6403D35D5FE}" type="datetimeFigureOut">
               <a:rPr lang="zh-TW" altLang="en-US" smtClean="0"/>
-              <a:t>2026/6/30</a:t>
+              <a:t>2026/7/2</a:t>
             </a:fld>
             <a:endParaRPr lang="zh-TW" altLang="en-US"/>
           </a:p>
@@ -1008,7 +1009,7 @@
           <a:p>
             <a:fld id="{96B2E576-E176-4636-8106-C6403D35D5FE}" type="datetimeFigureOut">
               <a:rPr lang="zh-TW" altLang="en-US" smtClean="0"/>
-              <a:t>2026/6/30</a:t>
+              <a:t>2026/7/2</a:t>
             </a:fld>
             <a:endParaRPr lang="zh-TW" altLang="en-US"/>
           </a:p>
@@ -1240,7 +1241,7 @@
           <a:p>
             <a:fld id="{96B2E576-E176-4636-8106-C6403D35D5FE}" type="datetimeFigureOut">
               <a:rPr lang="zh-TW" altLang="en-US" smtClean="0"/>
-              <a:t>2026/6/30</a:t>
+              <a:t>2026/7/2</a:t>
             </a:fld>
             <a:endParaRPr lang="zh-TW" altLang="en-US"/>
           </a:p>
@@ -1607,7 +1608,7 @@
           <a:p>
             <a:fld id="{96B2E576-E176-4636-8106-C6403D35D5FE}" type="datetimeFigureOut">
               <a:rPr lang="zh-TW" altLang="en-US" smtClean="0"/>
-              <a:t>2026/6/30</a:t>
+              <a:t>2026/7/2</a:t>
             </a:fld>
             <a:endParaRPr lang="zh-TW" altLang="en-US"/>
           </a:p>
@@ -1725,7 +1726,7 @@
           <a:p>
             <a:fld id="{96B2E576-E176-4636-8106-C6403D35D5FE}" type="datetimeFigureOut">
               <a:rPr lang="zh-TW" altLang="en-US" smtClean="0"/>
-              <a:t>2026/6/30</a:t>
+              <a:t>2026/7/2</a:t>
             </a:fld>
             <a:endParaRPr lang="zh-TW" altLang="en-US"/>
           </a:p>
@@ -1820,7 +1821,7 @@
           <a:p>
             <a:fld id="{96B2E576-E176-4636-8106-C6403D35D5FE}" type="datetimeFigureOut">
               <a:rPr lang="zh-TW" altLang="en-US" smtClean="0"/>
-              <a:t>2026/6/30</a:t>
+              <a:t>2026/7/2</a:t>
             </a:fld>
             <a:endParaRPr lang="zh-TW" altLang="en-US"/>
           </a:p>
@@ -2097,7 +2098,7 @@
           <a:p>
             <a:fld id="{96B2E576-E176-4636-8106-C6403D35D5FE}" type="datetimeFigureOut">
               <a:rPr lang="zh-TW" altLang="en-US" smtClean="0"/>
-              <a:t>2026/6/30</a:t>
+              <a:t>2026/7/2</a:t>
             </a:fld>
             <a:endParaRPr lang="zh-TW" altLang="en-US"/>
           </a:p>
@@ -2354,7 +2355,7 @@
           <a:p>
             <a:fld id="{96B2E576-E176-4636-8106-C6403D35D5FE}" type="datetimeFigureOut">
               <a:rPr lang="zh-TW" altLang="en-US" smtClean="0"/>
-              <a:t>2026/6/30</a:t>
+              <a:t>2026/7/2</a:t>
             </a:fld>
             <a:endParaRPr lang="zh-TW" altLang="en-US"/>
           </a:p>
@@ -2567,7 +2568,7 @@
           <a:p>
             <a:fld id="{96B2E576-E176-4636-8106-C6403D35D5FE}" type="datetimeFigureOut">
               <a:rPr lang="zh-TW" altLang="en-US" smtClean="0"/>
-              <a:t>2026/6/30</a:t>
+              <a:t>2026/7/2</a:t>
             </a:fld>
             <a:endParaRPr lang="zh-TW" altLang="en-US"/>
           </a:p>
@@ -5856,8 +5857,8 @@
           </a:fontRef>
         </p:style>
       </p:cxnSp>
-      <mc:AlternateContent xmlns:mc="http://schemas.openxmlformats.org/markup-compatibility/2006">
-        <mc:Choice xmlns:a14="http://schemas.microsoft.com/office/drawing/2010/main" Requires="a14">
+      <mc:AlternateContent xmlns:mc="http://schemas.openxmlformats.org/markup-compatibility/2006" xmlns:a14="http://schemas.microsoft.com/office/drawing/2010/main">
+        <mc:Choice Requires="a14">
           <p:sp>
             <p:nvSpPr>
               <p:cNvPr id="35" name="文字方塊 34">
@@ -5926,7 +5927,7 @@
             </p:txBody>
           </p:sp>
         </mc:Choice>
-        <mc:Fallback>
+        <mc:Fallback xmlns="">
           <p:sp>
             <p:nvSpPr>
               <p:cNvPr id="35" name="文字方塊 34">
@@ -5971,8 +5972,8 @@
           </p:sp>
         </mc:Fallback>
       </mc:AlternateContent>
-      <mc:AlternateContent xmlns:mc="http://schemas.openxmlformats.org/markup-compatibility/2006">
-        <mc:Choice xmlns:a14="http://schemas.microsoft.com/office/drawing/2010/main" Requires="a14">
+      <mc:AlternateContent xmlns:mc="http://schemas.openxmlformats.org/markup-compatibility/2006" xmlns:a14="http://schemas.microsoft.com/office/drawing/2010/main">
+        <mc:Choice Requires="a14">
           <p:sp>
             <p:nvSpPr>
               <p:cNvPr id="36" name="文字方塊 35">
@@ -6060,7 +6061,7 @@
             </p:txBody>
           </p:sp>
         </mc:Choice>
-        <mc:Fallback>
+        <mc:Fallback xmlns="">
           <p:sp>
             <p:nvSpPr>
               <p:cNvPr id="36" name="文字方塊 35">
@@ -6105,8 +6106,8 @@
           </p:sp>
         </mc:Fallback>
       </mc:AlternateContent>
-      <mc:AlternateContent xmlns:mc="http://schemas.openxmlformats.org/markup-compatibility/2006">
-        <mc:Choice xmlns:a14="http://schemas.microsoft.com/office/drawing/2010/main" Requires="a14">
+      <mc:AlternateContent xmlns:mc="http://schemas.openxmlformats.org/markup-compatibility/2006" xmlns:a14="http://schemas.microsoft.com/office/drawing/2010/main">
+        <mc:Choice Requires="a14">
           <p:sp>
             <p:nvSpPr>
               <p:cNvPr id="39" name="文字方塊 38">
@@ -6175,7 +6176,2297 @@
             </p:txBody>
           </p:sp>
         </mc:Choice>
-        <mc:Fallback>
+        <mc:Fallback xmlns="">
+          <p:sp>
+            <p:nvSpPr>
+              <p:cNvPr id="39" name="文字方塊 38">
+                <a:extLst>
+                  <a:ext uri="{FF2B5EF4-FFF2-40B4-BE49-F238E27FC236}">
+                    <a16:creationId xmlns:a16="http://schemas.microsoft.com/office/drawing/2014/main" id="{7167E6B3-CFA2-4D29-B4B1-E6294D63FC32}"/>
+                  </a:ext>
+                </a:extLst>
+              </p:cNvPr>
+              <p:cNvSpPr txBox="1">
+                <a:spLocks noRot="1" noChangeAspect="1" noMove="1" noResize="1" noEditPoints="1" noAdjustHandles="1" noChangeArrowheads="1" noChangeShapeType="1" noTextEdit="1"/>
+              </p:cNvSpPr>
+              <p:nvPr/>
+            </p:nvSpPr>
+            <p:spPr>
+              <a:xfrm>
+                <a:off x="5809421" y="3485938"/>
+                <a:ext cx="641500" cy="553998"/>
+              </a:xfrm>
+              <a:prstGeom prst="rect">
+                <a:avLst/>
+              </a:prstGeom>
+              <a:blipFill>
+                <a:blip r:embed="rId4"/>
+                <a:stretch>
+                  <a:fillRect/>
+                </a:stretch>
+              </a:blipFill>
+            </p:spPr>
+            <p:txBody>
+              <a:bodyPr/>
+              <a:lstStyle/>
+              <a:p>
+                <a:r>
+                  <a:rPr lang="zh-TW" altLang="en-US">
+                    <a:noFill/>
+                  </a:rPr>
+                  <a:t> </a:t>
+                </a:r>
+              </a:p>
+            </p:txBody>
+          </p:sp>
+        </mc:Fallback>
+      </mc:AlternateContent>
+      <p:grpSp>
+        <p:nvGrpSpPr>
+          <p:cNvPr id="34" name="群組 33">
+            <a:extLst>
+              <a:ext uri="{FF2B5EF4-FFF2-40B4-BE49-F238E27FC236}">
+                <a16:creationId xmlns:a16="http://schemas.microsoft.com/office/drawing/2014/main" id="{607CB37C-2240-413F-980F-20029A32CA62}"/>
+              </a:ext>
+            </a:extLst>
+          </p:cNvPr>
+          <p:cNvGrpSpPr/>
+          <p:nvPr/>
+        </p:nvGrpSpPr>
+        <p:grpSpPr>
+          <a:xfrm>
+            <a:off x="4944500" y="3495675"/>
+            <a:ext cx="2285063" cy="187325"/>
+            <a:chOff x="5935099" y="3495675"/>
+            <a:chExt cx="2285063" cy="187325"/>
+          </a:xfrm>
+        </p:grpSpPr>
+        <p:cxnSp>
+          <p:nvCxnSpPr>
+            <p:cNvPr id="44" name="直線接點 43">
+              <a:extLst>
+                <a:ext uri="{FF2B5EF4-FFF2-40B4-BE49-F238E27FC236}">
+                  <a16:creationId xmlns:a16="http://schemas.microsoft.com/office/drawing/2014/main" id="{8EDF15DD-015D-49AD-8AD5-E8F6E7326FBE}"/>
+                </a:ext>
+              </a:extLst>
+            </p:cNvPr>
+            <p:cNvCxnSpPr>
+              <a:cxnSpLocks/>
+            </p:cNvCxnSpPr>
+            <p:nvPr/>
+          </p:nvCxnSpPr>
+          <p:spPr>
+            <a:xfrm>
+              <a:off x="5935099" y="3593786"/>
+              <a:ext cx="2282594" cy="0"/>
+            </a:xfrm>
+            <a:prstGeom prst="line">
+              <a:avLst/>
+            </a:prstGeom>
+            <a:ln w="28575">
+              <a:headEnd type="stealth" w="lg" len="lg"/>
+              <a:tailEnd type="stealth" w="lg" len="lg"/>
+            </a:ln>
+          </p:spPr>
+          <p:style>
+            <a:lnRef idx="3">
+              <a:schemeClr val="dk1"/>
+            </a:lnRef>
+            <a:fillRef idx="0">
+              <a:schemeClr val="dk1"/>
+            </a:fillRef>
+            <a:effectRef idx="2">
+              <a:schemeClr val="dk1"/>
+            </a:effectRef>
+            <a:fontRef idx="minor">
+              <a:schemeClr val="tx1"/>
+            </a:fontRef>
+          </p:style>
+        </p:cxnSp>
+        <p:cxnSp>
+          <p:nvCxnSpPr>
+            <p:cNvPr id="11" name="直線接點 10">
+              <a:extLst>
+                <a:ext uri="{FF2B5EF4-FFF2-40B4-BE49-F238E27FC236}">
+                  <a16:creationId xmlns:a16="http://schemas.microsoft.com/office/drawing/2014/main" id="{B8A3A9CD-5036-485E-AEA0-C176E58E340A}"/>
+                </a:ext>
+              </a:extLst>
+            </p:cNvPr>
+            <p:cNvCxnSpPr>
+              <a:cxnSpLocks/>
+            </p:cNvCxnSpPr>
+            <p:nvPr/>
+          </p:nvCxnSpPr>
+          <p:spPr>
+            <a:xfrm>
+              <a:off x="5935099" y="3495675"/>
+              <a:ext cx="0" cy="187325"/>
+            </a:xfrm>
+            <a:prstGeom prst="line">
+              <a:avLst/>
+            </a:prstGeom>
+            <a:ln w="28575">
+              <a:solidFill>
+                <a:schemeClr val="tx1"/>
+              </a:solidFill>
+            </a:ln>
+          </p:spPr>
+          <p:style>
+            <a:lnRef idx="1">
+              <a:schemeClr val="accent1"/>
+            </a:lnRef>
+            <a:fillRef idx="0">
+              <a:schemeClr val="accent1"/>
+            </a:fillRef>
+            <a:effectRef idx="0">
+              <a:schemeClr val="accent1"/>
+            </a:effectRef>
+            <a:fontRef idx="minor">
+              <a:schemeClr val="tx1"/>
+            </a:fontRef>
+          </p:style>
+        </p:cxnSp>
+        <p:cxnSp>
+          <p:nvCxnSpPr>
+            <p:cNvPr id="51" name="直線接點 50">
+              <a:extLst>
+                <a:ext uri="{FF2B5EF4-FFF2-40B4-BE49-F238E27FC236}">
+                  <a16:creationId xmlns:a16="http://schemas.microsoft.com/office/drawing/2014/main" id="{E7F3F4B3-1C59-4B40-B283-F71C9440A357}"/>
+                </a:ext>
+              </a:extLst>
+            </p:cNvPr>
+            <p:cNvCxnSpPr>
+              <a:cxnSpLocks/>
+            </p:cNvCxnSpPr>
+            <p:nvPr/>
+          </p:nvCxnSpPr>
+          <p:spPr>
+            <a:xfrm>
+              <a:off x="8220162" y="3495675"/>
+              <a:ext cx="0" cy="187325"/>
+            </a:xfrm>
+            <a:prstGeom prst="line">
+              <a:avLst/>
+            </a:prstGeom>
+            <a:ln w="28575">
+              <a:solidFill>
+                <a:schemeClr val="tx1"/>
+              </a:solidFill>
+            </a:ln>
+          </p:spPr>
+          <p:style>
+            <a:lnRef idx="1">
+              <a:schemeClr val="accent1"/>
+            </a:lnRef>
+            <a:fillRef idx="0">
+              <a:schemeClr val="accent1"/>
+            </a:fillRef>
+            <a:effectRef idx="0">
+              <a:schemeClr val="accent1"/>
+            </a:effectRef>
+            <a:fontRef idx="minor">
+              <a:schemeClr val="tx1"/>
+            </a:fontRef>
+          </p:style>
+        </p:cxnSp>
+      </p:grpSp>
+      <mc:AlternateContent xmlns:mc="http://schemas.openxmlformats.org/markup-compatibility/2006" xmlns:a14="http://schemas.microsoft.com/office/drawing/2010/main">
+        <mc:Choice Requires="a14">
+          <p:sp>
+            <p:nvSpPr>
+              <p:cNvPr id="56" name="文字方塊 55">
+                <a:extLst>
+                  <a:ext uri="{FF2B5EF4-FFF2-40B4-BE49-F238E27FC236}">
+                    <a16:creationId xmlns:a16="http://schemas.microsoft.com/office/drawing/2014/main" id="{E2A26385-A9D4-41C8-8353-093640823164}"/>
+                  </a:ext>
+                </a:extLst>
+              </p:cNvPr>
+              <p:cNvSpPr txBox="1"/>
+              <p:nvPr/>
+            </p:nvSpPr>
+            <p:spPr>
+              <a:xfrm>
+                <a:off x="1105953" y="1729101"/>
+                <a:ext cx="499134" cy="553998"/>
+              </a:xfrm>
+              <a:prstGeom prst="rect">
+                <a:avLst/>
+              </a:prstGeom>
+              <a:noFill/>
+            </p:spPr>
+            <p:txBody>
+              <a:bodyPr wrap="square" rtlCol="0">
+                <a:spAutoFit/>
+              </a:bodyPr>
+              <a:lstStyle/>
+              <a:p>
+                <a:pPr/>
+                <a14:m>
+                  <m:oMathPara xmlns:m="http://schemas.openxmlformats.org/officeDocument/2006/math">
+                    <m:oMathParaPr>
+                      <m:jc m:val="centerGroup"/>
+                    </m:oMathParaPr>
+                    <m:oMath xmlns:m="http://schemas.openxmlformats.org/officeDocument/2006/math">
+                      <m:r>
+                        <a:rPr lang="en-US" altLang="zh-TW" sz="3000" i="1" smtClean="0">
+                          <a:latin typeface="Cambria Math" panose="02040503050406030204" pitchFamily="18" charset="0"/>
+                        </a:rPr>
+                        <m:t>𝑥</m:t>
+                      </m:r>
+                    </m:oMath>
+                  </m:oMathPara>
+                </a14:m>
+                <a:endParaRPr lang="zh-TW" altLang="en-US" sz="3000" dirty="0"/>
+              </a:p>
+            </p:txBody>
+          </p:sp>
+        </mc:Choice>
+        <mc:Fallback xmlns="">
+          <p:sp>
+            <p:nvSpPr>
+              <p:cNvPr id="56" name="文字方塊 55">
+                <a:extLst>
+                  <a:ext uri="{FF2B5EF4-FFF2-40B4-BE49-F238E27FC236}">
+                    <a16:creationId xmlns:a16="http://schemas.microsoft.com/office/drawing/2014/main" id="{E2A26385-A9D4-41C8-8353-093640823164}"/>
+                  </a:ext>
+                </a:extLst>
+              </p:cNvPr>
+              <p:cNvSpPr txBox="1">
+                <a:spLocks noRot="1" noChangeAspect="1" noMove="1" noResize="1" noEditPoints="1" noAdjustHandles="1" noChangeArrowheads="1" noChangeShapeType="1" noTextEdit="1"/>
+              </p:cNvSpPr>
+              <p:nvPr/>
+            </p:nvSpPr>
+            <p:spPr>
+              <a:xfrm>
+                <a:off x="1105953" y="1729101"/>
+                <a:ext cx="499134" cy="553998"/>
+              </a:xfrm>
+              <a:prstGeom prst="rect">
+                <a:avLst/>
+              </a:prstGeom>
+              <a:blipFill>
+                <a:blip r:embed="rId5"/>
+                <a:stretch>
+                  <a:fillRect/>
+                </a:stretch>
+              </a:blipFill>
+            </p:spPr>
+            <p:txBody>
+              <a:bodyPr/>
+              <a:lstStyle/>
+              <a:p>
+                <a:r>
+                  <a:rPr lang="zh-TW" altLang="en-US">
+                    <a:noFill/>
+                  </a:rPr>
+                  <a:t> </a:t>
+                </a:r>
+              </a:p>
+            </p:txBody>
+          </p:sp>
+        </mc:Fallback>
+      </mc:AlternateContent>
+      <mc:AlternateContent xmlns:mc="http://schemas.openxmlformats.org/markup-compatibility/2006" xmlns:a14="http://schemas.microsoft.com/office/drawing/2010/main">
+        <mc:Choice Requires="a14">
+          <p:sp>
+            <p:nvSpPr>
+              <p:cNvPr id="57" name="文字方塊 56">
+                <a:extLst>
+                  <a:ext uri="{FF2B5EF4-FFF2-40B4-BE49-F238E27FC236}">
+                    <a16:creationId xmlns:a16="http://schemas.microsoft.com/office/drawing/2014/main" id="{76E17EFA-B51A-4F4D-B96D-C35154FB968A}"/>
+                  </a:ext>
+                </a:extLst>
+              </p:cNvPr>
+              <p:cNvSpPr txBox="1"/>
+              <p:nvPr/>
+            </p:nvSpPr>
+            <p:spPr>
+              <a:xfrm>
+                <a:off x="541896" y="4015875"/>
+                <a:ext cx="499134" cy="553998"/>
+              </a:xfrm>
+              <a:prstGeom prst="rect">
+                <a:avLst/>
+              </a:prstGeom>
+              <a:noFill/>
+            </p:spPr>
+            <p:txBody>
+              <a:bodyPr wrap="square" rtlCol="0">
+                <a:spAutoFit/>
+              </a:bodyPr>
+              <a:lstStyle/>
+              <a:p>
+                <a:pPr/>
+                <a14:m>
+                  <m:oMathPara xmlns:m="http://schemas.openxmlformats.org/officeDocument/2006/math">
+                    <m:oMathParaPr>
+                      <m:jc m:val="centerGroup"/>
+                    </m:oMathParaPr>
+                    <m:oMath xmlns:m="http://schemas.openxmlformats.org/officeDocument/2006/math">
+                      <m:r>
+                        <a:rPr lang="en-US" altLang="zh-TW" sz="3000" b="0" i="1" smtClean="0">
+                          <a:latin typeface="Cambria Math" panose="02040503050406030204" pitchFamily="18" charset="0"/>
+                        </a:rPr>
+                        <m:t>𝑦</m:t>
+                      </m:r>
+                    </m:oMath>
+                  </m:oMathPara>
+                </a14:m>
+                <a:endParaRPr lang="zh-TW" altLang="en-US" sz="3000" dirty="0"/>
+              </a:p>
+            </p:txBody>
+          </p:sp>
+        </mc:Choice>
+        <mc:Fallback xmlns="">
+          <p:sp>
+            <p:nvSpPr>
+              <p:cNvPr id="57" name="文字方塊 56">
+                <a:extLst>
+                  <a:ext uri="{FF2B5EF4-FFF2-40B4-BE49-F238E27FC236}">
+                    <a16:creationId xmlns:a16="http://schemas.microsoft.com/office/drawing/2014/main" id="{76E17EFA-B51A-4F4D-B96D-C35154FB968A}"/>
+                  </a:ext>
+                </a:extLst>
+              </p:cNvPr>
+              <p:cNvSpPr txBox="1">
+                <a:spLocks noRot="1" noChangeAspect="1" noMove="1" noResize="1" noEditPoints="1" noAdjustHandles="1" noChangeArrowheads="1" noChangeShapeType="1" noTextEdit="1"/>
+              </p:cNvSpPr>
+              <p:nvPr/>
+            </p:nvSpPr>
+            <p:spPr>
+              <a:xfrm>
+                <a:off x="541896" y="4015875"/>
+                <a:ext cx="499134" cy="553998"/>
+              </a:xfrm>
+              <a:prstGeom prst="rect">
+                <a:avLst/>
+              </a:prstGeom>
+              <a:blipFill>
+                <a:blip r:embed="rId6"/>
+                <a:stretch>
+                  <a:fillRect/>
+                </a:stretch>
+              </a:blipFill>
+            </p:spPr>
+            <p:txBody>
+              <a:bodyPr/>
+              <a:lstStyle/>
+              <a:p>
+                <a:r>
+                  <a:rPr lang="zh-TW" altLang="en-US">
+                    <a:noFill/>
+                  </a:rPr>
+                  <a:t> </a:t>
+                </a:r>
+              </a:p>
+            </p:txBody>
+          </p:sp>
+        </mc:Fallback>
+      </mc:AlternateContent>
+      <mc:AlternateContent xmlns:mc="http://schemas.openxmlformats.org/markup-compatibility/2006" xmlns:a14="http://schemas.microsoft.com/office/drawing/2010/main">
+        <mc:Choice Requires="a14">
+          <p:sp>
+            <p:nvSpPr>
+              <p:cNvPr id="74" name="文字方塊 73">
+                <a:extLst>
+                  <a:ext uri="{FF2B5EF4-FFF2-40B4-BE49-F238E27FC236}">
+                    <a16:creationId xmlns:a16="http://schemas.microsoft.com/office/drawing/2014/main" id="{248A2610-F524-4FF1-8E13-399BAC853D86}"/>
+                  </a:ext>
+                </a:extLst>
+              </p:cNvPr>
+              <p:cNvSpPr txBox="1"/>
+              <p:nvPr/>
+            </p:nvSpPr>
+            <p:spPr>
+              <a:xfrm>
+                <a:off x="2964696" y="2854412"/>
+                <a:ext cx="568301" cy="553998"/>
+              </a:xfrm>
+              <a:prstGeom prst="rect">
+                <a:avLst/>
+              </a:prstGeom>
+              <a:noFill/>
+            </p:spPr>
+            <p:txBody>
+              <a:bodyPr wrap="square" rtlCol="0">
+                <a:spAutoFit/>
+              </a:bodyPr>
+              <a:lstStyle/>
+              <a:p>
+                <a:pPr/>
+                <a14:m>
+                  <m:oMathPara xmlns:m="http://schemas.openxmlformats.org/officeDocument/2006/math">
+                    <m:oMathParaPr>
+                      <m:jc m:val="centerGroup"/>
+                    </m:oMathParaPr>
+                    <m:oMath xmlns:m="http://schemas.openxmlformats.org/officeDocument/2006/math">
+                      <m:r>
+                        <a:rPr lang="en-US" altLang="zh-TW" sz="3000" b="1" i="1" smtClean="0">
+                          <a:solidFill>
+                            <a:schemeClr val="accent1"/>
+                          </a:solidFill>
+                          <a:latin typeface="Cambria Math" panose="02040503050406030204" pitchFamily="18" charset="0"/>
+                        </a:rPr>
+                        <m:t>𝒓</m:t>
+                      </m:r>
+                    </m:oMath>
+                  </m:oMathPara>
+                </a14:m>
+                <a:endParaRPr lang="zh-TW" altLang="en-US" sz="3000" b="1" dirty="0">
+                  <a:solidFill>
+                    <a:schemeClr val="accent1"/>
+                  </a:solidFill>
+                </a:endParaRPr>
+              </a:p>
+            </p:txBody>
+          </p:sp>
+        </mc:Choice>
+        <mc:Fallback xmlns="">
+          <p:sp>
+            <p:nvSpPr>
+              <p:cNvPr id="74" name="文字方塊 73">
+                <a:extLst>
+                  <a:ext uri="{FF2B5EF4-FFF2-40B4-BE49-F238E27FC236}">
+                    <a16:creationId xmlns:a16="http://schemas.microsoft.com/office/drawing/2014/main" id="{248A2610-F524-4FF1-8E13-399BAC853D86}"/>
+                  </a:ext>
+                </a:extLst>
+              </p:cNvPr>
+              <p:cNvSpPr txBox="1">
+                <a:spLocks noRot="1" noChangeAspect="1" noMove="1" noResize="1" noEditPoints="1" noAdjustHandles="1" noChangeArrowheads="1" noChangeShapeType="1" noTextEdit="1"/>
+              </p:cNvSpPr>
+              <p:nvPr/>
+            </p:nvSpPr>
+            <p:spPr>
+              <a:xfrm>
+                <a:off x="2964696" y="2854412"/>
+                <a:ext cx="568301" cy="553998"/>
+              </a:xfrm>
+              <a:prstGeom prst="rect">
+                <a:avLst/>
+              </a:prstGeom>
+              <a:blipFill>
+                <a:blip r:embed="rId7"/>
+                <a:stretch>
+                  <a:fillRect/>
+                </a:stretch>
+              </a:blipFill>
+            </p:spPr>
+            <p:txBody>
+              <a:bodyPr/>
+              <a:lstStyle/>
+              <a:p>
+                <a:r>
+                  <a:rPr lang="zh-TW" altLang="en-US">
+                    <a:noFill/>
+                  </a:rPr>
+                  <a:t> </a:t>
+                </a:r>
+              </a:p>
+            </p:txBody>
+          </p:sp>
+        </mc:Fallback>
+      </mc:AlternateContent>
+      <mc:AlternateContent xmlns:mc="http://schemas.openxmlformats.org/markup-compatibility/2006" xmlns:a14="http://schemas.microsoft.com/office/drawing/2010/main">
+        <mc:Choice Requires="a14">
+          <p:sp>
+            <p:nvSpPr>
+              <p:cNvPr id="77" name="文字方塊 76">
+                <a:extLst>
+                  <a:ext uri="{FF2B5EF4-FFF2-40B4-BE49-F238E27FC236}">
+                    <a16:creationId xmlns:a16="http://schemas.microsoft.com/office/drawing/2014/main" id="{31C61BF8-D808-40F0-9FC4-BEF1BA0BE16B}"/>
+                  </a:ext>
+                </a:extLst>
+              </p:cNvPr>
+              <p:cNvSpPr txBox="1"/>
+              <p:nvPr/>
+            </p:nvSpPr>
+            <p:spPr>
+              <a:xfrm>
+                <a:off x="732422" y="3137331"/>
+                <a:ext cx="568301" cy="553998"/>
+              </a:xfrm>
+              <a:prstGeom prst="rect">
+                <a:avLst/>
+              </a:prstGeom>
+              <a:noFill/>
+            </p:spPr>
+            <p:txBody>
+              <a:bodyPr wrap="square" rtlCol="0">
+                <a:spAutoFit/>
+              </a:bodyPr>
+              <a:lstStyle/>
+              <a:p>
+                <a:pPr/>
+                <a14:m>
+                  <m:oMathPara xmlns:m="http://schemas.openxmlformats.org/officeDocument/2006/math">
+                    <m:oMathParaPr>
+                      <m:jc m:val="centerGroup"/>
+                    </m:oMathParaPr>
+                    <m:oMath xmlns:m="http://schemas.openxmlformats.org/officeDocument/2006/math">
+                      <m:r>
+                        <a:rPr lang="en-US" altLang="zh-TW" sz="3000" b="0" i="1" smtClean="0">
+                          <a:solidFill>
+                            <a:schemeClr val="tx1"/>
+                          </a:solidFill>
+                          <a:latin typeface="Cambria Math" panose="02040503050406030204" pitchFamily="18" charset="0"/>
+                        </a:rPr>
+                        <m:t>𝜌</m:t>
+                      </m:r>
+                    </m:oMath>
+                  </m:oMathPara>
+                </a14:m>
+                <a:endParaRPr lang="zh-TW" altLang="en-US" sz="3000" dirty="0">
+                  <a:solidFill>
+                    <a:schemeClr val="tx1"/>
+                  </a:solidFill>
+                </a:endParaRPr>
+              </a:p>
+            </p:txBody>
+          </p:sp>
+        </mc:Choice>
+        <mc:Fallback xmlns="">
+          <p:sp>
+            <p:nvSpPr>
+              <p:cNvPr id="77" name="文字方塊 76">
+                <a:extLst>
+                  <a:ext uri="{FF2B5EF4-FFF2-40B4-BE49-F238E27FC236}">
+                    <a16:creationId xmlns:a16="http://schemas.microsoft.com/office/drawing/2014/main" id="{31C61BF8-D808-40F0-9FC4-BEF1BA0BE16B}"/>
+                  </a:ext>
+                </a:extLst>
+              </p:cNvPr>
+              <p:cNvSpPr txBox="1">
+                <a:spLocks noRot="1" noChangeAspect="1" noMove="1" noResize="1" noEditPoints="1" noAdjustHandles="1" noChangeArrowheads="1" noChangeShapeType="1" noTextEdit="1"/>
+              </p:cNvSpPr>
+              <p:nvPr/>
+            </p:nvSpPr>
+            <p:spPr>
+              <a:xfrm>
+                <a:off x="732422" y="3137331"/>
+                <a:ext cx="568301" cy="553998"/>
+              </a:xfrm>
+              <a:prstGeom prst="rect">
+                <a:avLst/>
+              </a:prstGeom>
+              <a:blipFill>
+                <a:blip r:embed="rId8"/>
+                <a:stretch>
+                  <a:fillRect/>
+                </a:stretch>
+              </a:blipFill>
+            </p:spPr>
+            <p:txBody>
+              <a:bodyPr/>
+              <a:lstStyle/>
+              <a:p>
+                <a:r>
+                  <a:rPr lang="zh-TW" altLang="en-US">
+                    <a:noFill/>
+                  </a:rPr>
+                  <a:t> </a:t>
+                </a:r>
+              </a:p>
+            </p:txBody>
+          </p:sp>
+        </mc:Fallback>
+      </mc:AlternateContent>
+      <p:sp>
+        <p:nvSpPr>
+          <p:cNvPr id="30" name="局部圓 29">
+            <a:extLst>
+              <a:ext uri="{FF2B5EF4-FFF2-40B4-BE49-F238E27FC236}">
+                <a16:creationId xmlns:a16="http://schemas.microsoft.com/office/drawing/2014/main" id="{F19B8E23-0D08-4E0A-8FCB-627D0AE9906A}"/>
+              </a:ext>
+            </a:extLst>
+          </p:cNvPr>
+          <p:cNvSpPr/>
+          <p:nvPr/>
+        </p:nvSpPr>
+        <p:spPr>
+          <a:xfrm>
+            <a:off x="1155701" y="3081171"/>
+            <a:ext cx="337072" cy="718338"/>
+          </a:xfrm>
+          <a:prstGeom prst="pie">
+            <a:avLst>
+              <a:gd name="adj1" fmla="val 12729732"/>
+              <a:gd name="adj2" fmla="val 16200000"/>
+            </a:avLst>
+          </a:prstGeom>
+          <a:gradFill flip="none" rotWithShape="1">
+            <a:gsLst>
+              <a:gs pos="0">
+                <a:schemeClr val="accent1"/>
+              </a:gs>
+              <a:gs pos="43000">
+                <a:schemeClr val="accent1">
+                  <a:lumMod val="40000"/>
+                  <a:lumOff val="60000"/>
+                </a:schemeClr>
+              </a:gs>
+            </a:gsLst>
+            <a:lin ang="13500000" scaled="1"/>
+            <a:tileRect/>
+          </a:gradFill>
+          <a:ln w="6350">
+            <a:solidFill>
+              <a:schemeClr val="tx1"/>
+            </a:solidFill>
+          </a:ln>
+        </p:spPr>
+        <p:style>
+          <a:lnRef idx="2">
+            <a:schemeClr val="accent1">
+              <a:shade val="50000"/>
+            </a:schemeClr>
+          </a:lnRef>
+          <a:fillRef idx="1">
+            <a:schemeClr val="accent1"/>
+          </a:fillRef>
+          <a:effectRef idx="0">
+            <a:schemeClr val="accent1"/>
+          </a:effectRef>
+          <a:fontRef idx="minor">
+            <a:schemeClr val="lt1"/>
+          </a:fontRef>
+        </p:style>
+        <p:txBody>
+          <a:bodyPr rtlCol="0" anchor="ctr"/>
+          <a:lstStyle/>
+          <a:p>
+            <a:pPr algn="ctr"/>
+            <a:endParaRPr lang="zh-TW" altLang="en-US" sz="3000">
+              <a:solidFill>
+                <a:schemeClr val="tx1"/>
+              </a:solidFill>
+            </a:endParaRPr>
+          </a:p>
+        </p:txBody>
+      </p:sp>
+      <p:cxnSp>
+        <p:nvCxnSpPr>
+          <p:cNvPr id="75" name="直線接點 74">
+            <a:extLst>
+              <a:ext uri="{FF2B5EF4-FFF2-40B4-BE49-F238E27FC236}">
+                <a16:creationId xmlns:a16="http://schemas.microsoft.com/office/drawing/2014/main" id="{9620E7BD-7CD3-4C24-86EB-D1EF2FCE4D50}"/>
+              </a:ext>
+            </a:extLst>
+          </p:cNvPr>
+          <p:cNvCxnSpPr>
+            <a:cxnSpLocks/>
+          </p:cNvCxnSpPr>
+          <p:nvPr/>
+        </p:nvCxnSpPr>
+        <p:spPr>
+          <a:xfrm flipH="1" flipV="1">
+            <a:off x="881064" y="3148013"/>
+            <a:ext cx="452830" cy="292103"/>
+          </a:xfrm>
+          <a:prstGeom prst="line">
+            <a:avLst/>
+          </a:prstGeom>
+          <a:ln w="28575">
+            <a:solidFill>
+              <a:schemeClr val="accent1"/>
+            </a:solidFill>
+            <a:headEnd type="none" w="sm" len="sm"/>
+            <a:tailEnd type="stealth" w="lg" len="lg"/>
+          </a:ln>
+        </p:spPr>
+        <p:style>
+          <a:lnRef idx="3">
+            <a:schemeClr val="dk1"/>
+          </a:lnRef>
+          <a:fillRef idx="0">
+            <a:schemeClr val="dk1"/>
+          </a:fillRef>
+          <a:effectRef idx="2">
+            <a:schemeClr val="dk1"/>
+          </a:effectRef>
+          <a:fontRef idx="minor">
+            <a:schemeClr val="tx1"/>
+          </a:fontRef>
+        </p:style>
+      </p:cxnSp>
+      <p:cxnSp>
+        <p:nvCxnSpPr>
+          <p:cNvPr id="65" name="直線接點 64">
+            <a:extLst>
+              <a:ext uri="{FF2B5EF4-FFF2-40B4-BE49-F238E27FC236}">
+                <a16:creationId xmlns:a16="http://schemas.microsoft.com/office/drawing/2014/main" id="{55625116-D964-4EE9-8A48-C4E713344F63}"/>
+              </a:ext>
+            </a:extLst>
+          </p:cNvPr>
+          <p:cNvCxnSpPr>
+            <a:cxnSpLocks/>
+          </p:cNvCxnSpPr>
+          <p:nvPr/>
+        </p:nvCxnSpPr>
+        <p:spPr>
+          <a:xfrm flipH="1" flipV="1">
+            <a:off x="881064" y="3148013"/>
+            <a:ext cx="2160587" cy="0"/>
+          </a:xfrm>
+          <a:prstGeom prst="line">
+            <a:avLst/>
+          </a:prstGeom>
+          <a:ln w="9525" cap="flat" cmpd="sng" algn="ctr">
+            <a:solidFill>
+              <a:schemeClr val="dk1"/>
+            </a:solidFill>
+            <a:prstDash val="dash"/>
+            <a:round/>
+            <a:headEnd type="none" w="med" len="med"/>
+            <a:tailEnd type="none" w="med" len="med"/>
+          </a:ln>
+        </p:spPr>
+        <p:style>
+          <a:lnRef idx="0">
+            <a:scrgbClr r="0" g="0" b="0"/>
+          </a:lnRef>
+          <a:fillRef idx="0">
+            <a:scrgbClr r="0" g="0" b="0"/>
+          </a:fillRef>
+          <a:effectRef idx="0">
+            <a:scrgbClr r="0" g="0" b="0"/>
+          </a:effectRef>
+          <a:fontRef idx="minor">
+            <a:schemeClr val="tx1"/>
+          </a:fontRef>
+        </p:style>
+      </p:cxnSp>
+      <mc:AlternateContent xmlns:mc="http://schemas.openxmlformats.org/markup-compatibility/2006" xmlns:a14="http://schemas.microsoft.com/office/drawing/2010/main">
+        <mc:Choice Requires="a14">
+          <p:sp>
+            <p:nvSpPr>
+              <p:cNvPr id="82" name="文字方塊 81">
+                <a:extLst>
+                  <a:ext uri="{FF2B5EF4-FFF2-40B4-BE49-F238E27FC236}">
+                    <a16:creationId xmlns:a16="http://schemas.microsoft.com/office/drawing/2014/main" id="{AF525ACF-DF2B-41CE-9ECF-58AFA98BA304}"/>
+                  </a:ext>
+                </a:extLst>
+              </p:cNvPr>
+              <p:cNvSpPr txBox="1"/>
+              <p:nvPr/>
+            </p:nvSpPr>
+            <p:spPr>
+              <a:xfrm>
+                <a:off x="865284" y="2679722"/>
+                <a:ext cx="568301" cy="553998"/>
+              </a:xfrm>
+              <a:prstGeom prst="rect">
+                <a:avLst/>
+              </a:prstGeom>
+              <a:noFill/>
+            </p:spPr>
+            <p:txBody>
+              <a:bodyPr wrap="square" rtlCol="0">
+                <a:spAutoFit/>
+              </a:bodyPr>
+              <a:lstStyle/>
+              <a:p>
+                <a:pPr/>
+                <a14:m>
+                  <m:oMathPara xmlns:m="http://schemas.openxmlformats.org/officeDocument/2006/math">
+                    <m:oMathParaPr>
+                      <m:jc m:val="centerGroup"/>
+                    </m:oMathParaPr>
+                    <m:oMath xmlns:m="http://schemas.openxmlformats.org/officeDocument/2006/math">
+                      <m:r>
+                        <a:rPr lang="en-US" altLang="zh-TW" sz="3000" b="0" i="1" smtClean="0">
+                          <a:solidFill>
+                            <a:schemeClr val="tx1"/>
+                          </a:solidFill>
+                          <a:latin typeface="Cambria Math" panose="02040503050406030204" pitchFamily="18" charset="0"/>
+                        </a:rPr>
+                        <m:t>𝜙</m:t>
+                      </m:r>
+                    </m:oMath>
+                  </m:oMathPara>
+                </a14:m>
+                <a:endParaRPr lang="zh-TW" altLang="en-US" sz="3000" dirty="0">
+                  <a:solidFill>
+                    <a:schemeClr val="tx1"/>
+                  </a:solidFill>
+                </a:endParaRPr>
+              </a:p>
+            </p:txBody>
+          </p:sp>
+        </mc:Choice>
+        <mc:Fallback xmlns="">
+          <p:sp>
+            <p:nvSpPr>
+              <p:cNvPr id="82" name="文字方塊 81">
+                <a:extLst>
+                  <a:ext uri="{FF2B5EF4-FFF2-40B4-BE49-F238E27FC236}">
+                    <a16:creationId xmlns:a16="http://schemas.microsoft.com/office/drawing/2014/main" id="{AF525ACF-DF2B-41CE-9ECF-58AFA98BA304}"/>
+                  </a:ext>
+                </a:extLst>
+              </p:cNvPr>
+              <p:cNvSpPr txBox="1">
+                <a:spLocks noRot="1" noChangeAspect="1" noMove="1" noResize="1" noEditPoints="1" noAdjustHandles="1" noChangeArrowheads="1" noChangeShapeType="1" noTextEdit="1"/>
+              </p:cNvSpPr>
+              <p:nvPr/>
+            </p:nvSpPr>
+            <p:spPr>
+              <a:xfrm>
+                <a:off x="865284" y="2679722"/>
+                <a:ext cx="568301" cy="553998"/>
+              </a:xfrm>
+              <a:prstGeom prst="rect">
+                <a:avLst/>
+              </a:prstGeom>
+              <a:blipFill>
+                <a:blip r:embed="rId9"/>
+                <a:stretch>
+                  <a:fillRect/>
+                </a:stretch>
+              </a:blipFill>
+            </p:spPr>
+            <p:txBody>
+              <a:bodyPr/>
+              <a:lstStyle/>
+              <a:p>
+                <a:r>
+                  <a:rPr lang="zh-TW" altLang="en-US">
+                    <a:noFill/>
+                  </a:rPr>
+                  <a:t> </a:t>
+                </a:r>
+              </a:p>
+            </p:txBody>
+          </p:sp>
+        </mc:Fallback>
+      </mc:AlternateContent>
+      <p:cxnSp>
+        <p:nvCxnSpPr>
+          <p:cNvPr id="63" name="直線接點 62">
+            <a:extLst>
+              <a:ext uri="{FF2B5EF4-FFF2-40B4-BE49-F238E27FC236}">
+                <a16:creationId xmlns:a16="http://schemas.microsoft.com/office/drawing/2014/main" id="{3EAE5234-D1A5-470F-A367-71E7A1FA8DA3}"/>
+              </a:ext>
+            </a:extLst>
+          </p:cNvPr>
+          <p:cNvCxnSpPr>
+            <a:cxnSpLocks/>
+          </p:cNvCxnSpPr>
+          <p:nvPr/>
+        </p:nvCxnSpPr>
+        <p:spPr>
+          <a:xfrm flipV="1">
+            <a:off x="1326749" y="3145631"/>
+            <a:ext cx="1723633" cy="282577"/>
+          </a:xfrm>
+          <a:prstGeom prst="line">
+            <a:avLst/>
+          </a:prstGeom>
+          <a:ln w="38100">
+            <a:solidFill>
+              <a:schemeClr val="accent1"/>
+            </a:solidFill>
+            <a:headEnd type="none" w="sm" len="sm"/>
+            <a:tailEnd type="stealth" w="lg" len="lg"/>
+          </a:ln>
+        </p:spPr>
+        <p:style>
+          <a:lnRef idx="3">
+            <a:schemeClr val="dk1"/>
+          </a:lnRef>
+          <a:fillRef idx="0">
+            <a:schemeClr val="dk1"/>
+          </a:fillRef>
+          <a:effectRef idx="2">
+            <a:schemeClr val="dk1"/>
+          </a:effectRef>
+          <a:fontRef idx="minor">
+            <a:schemeClr val="tx1"/>
+          </a:fontRef>
+        </p:style>
+      </p:cxnSp>
+      <p:cxnSp>
+        <p:nvCxnSpPr>
+          <p:cNvPr id="61" name="直線接點 60">
+            <a:extLst>
+              <a:ext uri="{FF2B5EF4-FFF2-40B4-BE49-F238E27FC236}">
+                <a16:creationId xmlns:a16="http://schemas.microsoft.com/office/drawing/2014/main" id="{DC03B474-6152-440A-8754-0451AF2AD4AF}"/>
+              </a:ext>
+            </a:extLst>
+          </p:cNvPr>
+          <p:cNvCxnSpPr>
+            <a:cxnSpLocks/>
+          </p:cNvCxnSpPr>
+          <p:nvPr/>
+        </p:nvCxnSpPr>
+        <p:spPr>
+          <a:xfrm flipH="1">
+            <a:off x="895351" y="3417184"/>
+            <a:ext cx="441820" cy="768633"/>
+          </a:xfrm>
+          <a:prstGeom prst="line">
+            <a:avLst/>
+          </a:prstGeom>
+          <a:ln w="28575">
+            <a:headEnd type="none" w="sm" len="sm"/>
+            <a:tailEnd type="stealth" w="med" len="med"/>
+          </a:ln>
+        </p:spPr>
+        <p:style>
+          <a:lnRef idx="3">
+            <a:schemeClr val="dk1"/>
+          </a:lnRef>
+          <a:fillRef idx="0">
+            <a:schemeClr val="dk1"/>
+          </a:fillRef>
+          <a:effectRef idx="2">
+            <a:schemeClr val="dk1"/>
+          </a:effectRef>
+          <a:fontRef idx="minor">
+            <a:schemeClr val="tx1"/>
+          </a:fontRef>
+        </p:style>
+      </p:cxnSp>
+      <p:cxnSp>
+        <p:nvCxnSpPr>
+          <p:cNvPr id="62" name="直線接點 61">
+            <a:extLst>
+              <a:ext uri="{FF2B5EF4-FFF2-40B4-BE49-F238E27FC236}">
+                <a16:creationId xmlns:a16="http://schemas.microsoft.com/office/drawing/2014/main" id="{80470041-FE1C-4941-B160-B10EB2E8790A}"/>
+              </a:ext>
+            </a:extLst>
+          </p:cNvPr>
+          <p:cNvCxnSpPr>
+            <a:cxnSpLocks/>
+          </p:cNvCxnSpPr>
+          <p:nvPr/>
+        </p:nvCxnSpPr>
+        <p:spPr>
+          <a:xfrm>
+            <a:off x="1333994" y="2166284"/>
+            <a:ext cx="0" cy="1263600"/>
+          </a:xfrm>
+          <a:prstGeom prst="line">
+            <a:avLst/>
+          </a:prstGeom>
+          <a:ln w="28575">
+            <a:headEnd type="stealth" w="med" len="med"/>
+            <a:tailEnd type="none" w="med" len="med"/>
+          </a:ln>
+        </p:spPr>
+        <p:style>
+          <a:lnRef idx="3">
+            <a:schemeClr val="dk1"/>
+          </a:lnRef>
+          <a:fillRef idx="0">
+            <a:schemeClr val="dk1"/>
+          </a:fillRef>
+          <a:effectRef idx="2">
+            <a:schemeClr val="dk1"/>
+          </a:effectRef>
+          <a:fontRef idx="minor">
+            <a:schemeClr val="tx1"/>
+          </a:fontRef>
+        </p:style>
+      </p:cxnSp>
+      <mc:AlternateContent xmlns:mc="http://schemas.openxmlformats.org/markup-compatibility/2006" xmlns:a14="http://schemas.microsoft.com/office/drawing/2010/main">
+        <mc:Choice Requires="a14">
+          <p:sp>
+            <p:nvSpPr>
+              <p:cNvPr id="98" name="文字方塊 97">
+                <a:extLst>
+                  <a:ext uri="{FF2B5EF4-FFF2-40B4-BE49-F238E27FC236}">
+                    <a16:creationId xmlns:a16="http://schemas.microsoft.com/office/drawing/2014/main" id="{34AA5AE1-9ECA-4C1D-98BE-DEB9974B190F}"/>
+                  </a:ext>
+                </a:extLst>
+              </p:cNvPr>
+              <p:cNvSpPr txBox="1"/>
+              <p:nvPr/>
+            </p:nvSpPr>
+            <p:spPr>
+              <a:xfrm>
+                <a:off x="413799" y="2723219"/>
+                <a:ext cx="568301" cy="563872"/>
+              </a:xfrm>
+              <a:prstGeom prst="rect">
+                <a:avLst/>
+              </a:prstGeom>
+              <a:noFill/>
+            </p:spPr>
+            <p:txBody>
+              <a:bodyPr wrap="square" rtlCol="0">
+                <a:spAutoFit/>
+              </a:bodyPr>
+              <a:lstStyle/>
+              <a:p>
+                <a:pPr/>
+                <a14:m>
+                  <m:oMathPara xmlns:m="http://schemas.openxmlformats.org/officeDocument/2006/math">
+                    <m:oMathParaPr>
+                      <m:jc m:val="centerGroup"/>
+                    </m:oMathParaPr>
+                    <m:oMath xmlns:m="http://schemas.openxmlformats.org/officeDocument/2006/math">
+                      <m:sSub>
+                        <m:sSubPr>
+                          <m:ctrlPr>
+                            <a:rPr lang="en-US" altLang="zh-TW" sz="3000" b="1" i="1" smtClean="0">
+                              <a:solidFill>
+                                <a:schemeClr val="accent1"/>
+                              </a:solidFill>
+                              <a:latin typeface="Cambria Math" panose="02040503050406030204" pitchFamily="18" charset="0"/>
+                            </a:rPr>
+                          </m:ctrlPr>
+                        </m:sSubPr>
+                        <m:e>
+                          <m:r>
+                            <a:rPr lang="en-US" altLang="zh-TW" sz="3000" b="1" i="1" smtClean="0">
+                              <a:solidFill>
+                                <a:schemeClr val="accent1"/>
+                              </a:solidFill>
+                              <a:latin typeface="Cambria Math" panose="02040503050406030204" pitchFamily="18" charset="0"/>
+                            </a:rPr>
+                            <m:t>𝒓</m:t>
+                          </m:r>
+                        </m:e>
+                        <m:sub>
+                          <m:r>
+                            <a:rPr lang="en-US" altLang="zh-TW" sz="3000" b="1" i="1" smtClean="0">
+                              <a:solidFill>
+                                <a:schemeClr val="accent1"/>
+                              </a:solidFill>
+                              <a:latin typeface="Cambria Math" panose="02040503050406030204" pitchFamily="18" charset="0"/>
+                            </a:rPr>
+                            <m:t>∥</m:t>
+                          </m:r>
+                        </m:sub>
+                      </m:sSub>
+                    </m:oMath>
+                  </m:oMathPara>
+                </a14:m>
+                <a:endParaRPr lang="zh-TW" altLang="en-US" sz="3000" b="1" dirty="0">
+                  <a:solidFill>
+                    <a:schemeClr val="accent1"/>
+                  </a:solidFill>
+                </a:endParaRPr>
+              </a:p>
+            </p:txBody>
+          </p:sp>
+        </mc:Choice>
+        <mc:Fallback xmlns="">
+          <p:sp>
+            <p:nvSpPr>
+              <p:cNvPr id="98" name="文字方塊 97">
+                <a:extLst>
+                  <a:ext uri="{FF2B5EF4-FFF2-40B4-BE49-F238E27FC236}">
+                    <a16:creationId xmlns:a16="http://schemas.microsoft.com/office/drawing/2014/main" id="{34AA5AE1-9ECA-4C1D-98BE-DEB9974B190F}"/>
+                  </a:ext>
+                </a:extLst>
+              </p:cNvPr>
+              <p:cNvSpPr txBox="1">
+                <a:spLocks noRot="1" noChangeAspect="1" noMove="1" noResize="1" noEditPoints="1" noAdjustHandles="1" noChangeArrowheads="1" noChangeShapeType="1" noTextEdit="1"/>
+              </p:cNvSpPr>
+              <p:nvPr/>
+            </p:nvSpPr>
+            <p:spPr>
+              <a:xfrm>
+                <a:off x="413799" y="2723219"/>
+                <a:ext cx="568301" cy="563872"/>
+              </a:xfrm>
+              <a:prstGeom prst="rect">
+                <a:avLst/>
+              </a:prstGeom>
+              <a:blipFill>
+                <a:blip r:embed="rId10"/>
+                <a:stretch>
+                  <a:fillRect/>
+                </a:stretch>
+              </a:blipFill>
+            </p:spPr>
+            <p:txBody>
+              <a:bodyPr/>
+              <a:lstStyle/>
+              <a:p>
+                <a:r>
+                  <a:rPr lang="zh-TW" altLang="en-US">
+                    <a:noFill/>
+                  </a:rPr>
+                  <a:t> </a:t>
+                </a:r>
+              </a:p>
+            </p:txBody>
+          </p:sp>
+        </mc:Fallback>
+      </mc:AlternateContent>
+      <mc:AlternateContent xmlns:mc="http://schemas.openxmlformats.org/markup-compatibility/2006" xmlns:a14="http://schemas.microsoft.com/office/drawing/2010/main">
+        <mc:Choice Requires="a14">
+          <p:sp>
+            <p:nvSpPr>
+              <p:cNvPr id="38" name="文字方塊 37">
+                <a:extLst>
+                  <a:ext uri="{FF2B5EF4-FFF2-40B4-BE49-F238E27FC236}">
+                    <a16:creationId xmlns:a16="http://schemas.microsoft.com/office/drawing/2014/main" id="{8870104A-1DCA-4DF6-9FFD-3C40E710269B}"/>
+                  </a:ext>
+                </a:extLst>
+              </p:cNvPr>
+              <p:cNvSpPr txBox="1"/>
+              <p:nvPr/>
+            </p:nvSpPr>
+            <p:spPr>
+              <a:xfrm>
+                <a:off x="7816084" y="3156691"/>
+                <a:ext cx="499134" cy="553998"/>
+              </a:xfrm>
+              <a:prstGeom prst="rect">
+                <a:avLst/>
+              </a:prstGeom>
+              <a:noFill/>
+            </p:spPr>
+            <p:txBody>
+              <a:bodyPr wrap="square" rtlCol="0">
+                <a:spAutoFit/>
+              </a:bodyPr>
+              <a:lstStyle/>
+              <a:p>
+                <a:pPr/>
+                <a14:m>
+                  <m:oMathPara xmlns:m="http://schemas.openxmlformats.org/officeDocument/2006/math">
+                    <m:oMathParaPr>
+                      <m:jc m:val="centerGroup"/>
+                    </m:oMathParaPr>
+                    <m:oMath xmlns:m="http://schemas.openxmlformats.org/officeDocument/2006/math">
+                      <m:acc>
+                        <m:accPr>
+                          <m:chr m:val="̂"/>
+                          <m:ctrlPr>
+                            <a:rPr lang="en-US" altLang="zh-TW" sz="3000" b="0" i="1" smtClean="0">
+                              <a:latin typeface="Cambria Math" panose="02040503050406030204" pitchFamily="18" charset="0"/>
+                            </a:rPr>
+                          </m:ctrlPr>
+                        </m:accPr>
+                        <m:e>
+                          <m:r>
+                            <a:rPr lang="en-US" altLang="zh-TW" sz="3000" i="1">
+                              <a:latin typeface="Cambria Math" panose="02040503050406030204" pitchFamily="18" charset="0"/>
+                            </a:rPr>
+                            <m:t>𝑧</m:t>
+                          </m:r>
+                        </m:e>
+                      </m:acc>
+                    </m:oMath>
+                  </m:oMathPara>
+                </a14:m>
+                <a:endParaRPr lang="zh-TW" altLang="en-US" sz="3000" dirty="0"/>
+              </a:p>
+            </p:txBody>
+          </p:sp>
+        </mc:Choice>
+        <mc:Fallback xmlns="">
+          <p:sp>
+            <p:nvSpPr>
+              <p:cNvPr id="38" name="文字方塊 37">
+                <a:extLst>
+                  <a:ext uri="{FF2B5EF4-FFF2-40B4-BE49-F238E27FC236}">
+                    <a16:creationId xmlns:a16="http://schemas.microsoft.com/office/drawing/2014/main" id="{8870104A-1DCA-4DF6-9FFD-3C40E710269B}"/>
+                  </a:ext>
+                </a:extLst>
+              </p:cNvPr>
+              <p:cNvSpPr txBox="1">
+                <a:spLocks noRot="1" noChangeAspect="1" noMove="1" noResize="1" noEditPoints="1" noAdjustHandles="1" noChangeArrowheads="1" noChangeShapeType="1" noTextEdit="1"/>
+              </p:cNvSpPr>
+              <p:nvPr/>
+            </p:nvSpPr>
+            <p:spPr>
+              <a:xfrm>
+                <a:off x="7816084" y="3156691"/>
+                <a:ext cx="499134" cy="553998"/>
+              </a:xfrm>
+              <a:prstGeom prst="rect">
+                <a:avLst/>
+              </a:prstGeom>
+              <a:blipFill>
+                <a:blip r:embed="rId11"/>
+                <a:stretch>
+                  <a:fillRect/>
+                </a:stretch>
+              </a:blipFill>
+            </p:spPr>
+            <p:txBody>
+              <a:bodyPr/>
+              <a:lstStyle/>
+              <a:p>
+                <a:r>
+                  <a:rPr lang="zh-TW" altLang="en-US">
+                    <a:noFill/>
+                  </a:rPr>
+                  <a:t> </a:t>
+                </a:r>
+              </a:p>
+            </p:txBody>
+          </p:sp>
+        </mc:Fallback>
+      </mc:AlternateContent>
+      <p:cxnSp>
+        <p:nvCxnSpPr>
+          <p:cNvPr id="5" name="直線接點 4">
+            <a:extLst>
+              <a:ext uri="{FF2B5EF4-FFF2-40B4-BE49-F238E27FC236}">
+                <a16:creationId xmlns:a16="http://schemas.microsoft.com/office/drawing/2014/main" id="{1F22D617-688D-4CF1-A375-0984F030B57C}"/>
+              </a:ext>
+            </a:extLst>
+          </p:cNvPr>
+          <p:cNvCxnSpPr>
+            <a:cxnSpLocks/>
+          </p:cNvCxnSpPr>
+          <p:nvPr/>
+        </p:nvCxnSpPr>
+        <p:spPr>
+          <a:xfrm>
+            <a:off x="7223168" y="3429000"/>
+            <a:ext cx="721759" cy="0"/>
+          </a:xfrm>
+          <a:prstGeom prst="line">
+            <a:avLst/>
+          </a:prstGeom>
+          <a:ln w="76200">
+            <a:headEnd type="none" w="sm" len="sm"/>
+            <a:tailEnd type="stealth" w="lg" len="lg"/>
+          </a:ln>
+        </p:spPr>
+        <p:style>
+          <a:lnRef idx="3">
+            <a:schemeClr val="dk1"/>
+          </a:lnRef>
+          <a:fillRef idx="0">
+            <a:schemeClr val="dk1"/>
+          </a:fillRef>
+          <a:effectRef idx="2">
+            <a:schemeClr val="dk1"/>
+          </a:effectRef>
+          <a:fontRef idx="minor">
+            <a:schemeClr val="tx1"/>
+          </a:fontRef>
+        </p:style>
+      </p:cxnSp>
+      <p:cxnSp>
+        <p:nvCxnSpPr>
+          <p:cNvPr id="106" name="直線接點 105">
+            <a:extLst>
+              <a:ext uri="{FF2B5EF4-FFF2-40B4-BE49-F238E27FC236}">
+                <a16:creationId xmlns:a16="http://schemas.microsoft.com/office/drawing/2014/main" id="{6AC8ED98-3874-4517-942D-D6329879B727}"/>
+              </a:ext>
+            </a:extLst>
+          </p:cNvPr>
+          <p:cNvCxnSpPr>
+            <a:cxnSpLocks/>
+          </p:cNvCxnSpPr>
+          <p:nvPr/>
+        </p:nvCxnSpPr>
+        <p:spPr>
+          <a:xfrm>
+            <a:off x="1320801" y="3429000"/>
+            <a:ext cx="2184400" cy="0"/>
+          </a:xfrm>
+          <a:prstGeom prst="line">
+            <a:avLst/>
+          </a:prstGeom>
+          <a:ln w="76200"/>
+        </p:spPr>
+        <p:style>
+          <a:lnRef idx="3">
+            <a:schemeClr val="dk1"/>
+          </a:lnRef>
+          <a:fillRef idx="0">
+            <a:schemeClr val="dk1"/>
+          </a:fillRef>
+          <a:effectRef idx="2">
+            <a:schemeClr val="dk1"/>
+          </a:effectRef>
+          <a:fontRef idx="minor">
+            <a:schemeClr val="tx1"/>
+          </a:fontRef>
+        </p:style>
+      </p:cxnSp>
+      <p:sp>
+        <p:nvSpPr>
+          <p:cNvPr id="110" name="橢圓 109">
+            <a:extLst>
+              <a:ext uri="{FF2B5EF4-FFF2-40B4-BE49-F238E27FC236}">
+                <a16:creationId xmlns:a16="http://schemas.microsoft.com/office/drawing/2014/main" id="{8A103C75-0ACD-4325-89D9-F3E097D5E303}"/>
+              </a:ext>
+            </a:extLst>
+          </p:cNvPr>
+          <p:cNvSpPr/>
+          <p:nvPr/>
+        </p:nvSpPr>
+        <p:spPr>
+          <a:xfrm>
+            <a:off x="8211975" y="1085951"/>
+            <a:ext cx="786232" cy="4692549"/>
+          </a:xfrm>
+          <a:prstGeom prst="ellipse">
+            <a:avLst/>
+          </a:prstGeom>
+          <a:solidFill>
+            <a:srgbClr val="A9D18E">
+              <a:alpha val="89804"/>
+            </a:srgbClr>
+          </a:solidFill>
+          <a:ln w="19050">
+            <a:solidFill>
+              <a:schemeClr val="accent6">
+                <a:lumMod val="60000"/>
+                <a:lumOff val="40000"/>
+              </a:schemeClr>
+            </a:solidFill>
+          </a:ln>
+        </p:spPr>
+        <p:style>
+          <a:lnRef idx="2">
+            <a:schemeClr val="accent1">
+              <a:shade val="50000"/>
+            </a:schemeClr>
+          </a:lnRef>
+          <a:fillRef idx="1">
+            <a:schemeClr val="accent1"/>
+          </a:fillRef>
+          <a:effectRef idx="0">
+            <a:schemeClr val="accent1"/>
+          </a:effectRef>
+          <a:fontRef idx="minor">
+            <a:schemeClr val="lt1"/>
+          </a:fontRef>
+        </p:style>
+        <p:txBody>
+          <a:bodyPr rtlCol="0" anchor="ctr"/>
+          <a:lstStyle/>
+          <a:p>
+            <a:pPr algn="ctr"/>
+            <a:endParaRPr lang="zh-TW" altLang="en-US" sz="3000"/>
+          </a:p>
+        </p:txBody>
+      </p:sp>
+      <p:pic>
+        <p:nvPicPr>
+          <p:cNvPr id="135" name="圖片 134">
+            <a:extLst>
+              <a:ext uri="{FF2B5EF4-FFF2-40B4-BE49-F238E27FC236}">
+                <a16:creationId xmlns:a16="http://schemas.microsoft.com/office/drawing/2014/main" id="{0E475765-0215-4CA7-A97F-70EF08613F82}"/>
+              </a:ext>
+            </a:extLst>
+          </p:cNvPr>
+          <p:cNvPicPr>
+            <a:picLocks noChangeAspect="1"/>
+          </p:cNvPicPr>
+          <p:nvPr/>
+        </p:nvPicPr>
+        <p:blipFill rotWithShape="1">
+          <a:blip r:embed="rId12"/>
+          <a:srcRect l="1" r="63530"/>
+          <a:stretch/>
+        </p:blipFill>
+        <p:spPr>
+          <a:xfrm rot="7394936">
+            <a:off x="1029705" y="3075746"/>
+            <a:ext cx="89908" cy="510935"/>
+          </a:xfrm>
+          <a:prstGeom prst="rect">
+            <a:avLst/>
+          </a:prstGeom>
+        </p:spPr>
+      </p:pic>
+    </p:spTree>
+    <p:extLst>
+      <p:ext uri="{BB962C8B-B14F-4D97-AF65-F5344CB8AC3E}">
+        <p14:creationId xmlns:p14="http://schemas.microsoft.com/office/powerpoint/2010/main" val="214314731"/>
+      </p:ext>
+    </p:extLst>
+  </p:cSld>
+  <p:clrMapOvr>
+    <a:masterClrMapping/>
+  </p:clrMapOvr>
+</p:sld>
+</file>
+
+<file path=ppt/slides/slide3.xml><?xml version="1.0" encoding="utf-8"?>
+<p:sld xmlns:a="http://schemas.openxmlformats.org/drawingml/2006/main" xmlns:r="http://schemas.openxmlformats.org/officeDocument/2006/relationships" xmlns:p="http://schemas.openxmlformats.org/presentationml/2006/main" show="0">
+  <p:cSld>
+    <p:spTree>
+      <p:nvGrpSpPr>
+        <p:cNvPr id="1" name=""/>
+        <p:cNvGrpSpPr/>
+        <p:nvPr/>
+      </p:nvGrpSpPr>
+      <p:grpSpPr>
+        <a:xfrm>
+          <a:off x="0" y="0"/>
+          <a:ext cx="0" cy="0"/>
+          <a:chOff x="0" y="0"/>
+          <a:chExt cx="0" cy="0"/>
+        </a:xfrm>
+      </p:grpSpPr>
+      <p:sp>
+        <p:nvSpPr>
+          <p:cNvPr id="16" name="矩形 15">
+            <a:extLst>
+              <a:ext uri="{FF2B5EF4-FFF2-40B4-BE49-F238E27FC236}">
+                <a16:creationId xmlns:a16="http://schemas.microsoft.com/office/drawing/2014/main" id="{39B778DC-BA8F-4AED-B902-5519DD6C8E83}"/>
+              </a:ext>
+            </a:extLst>
+          </p:cNvPr>
+          <p:cNvSpPr/>
+          <p:nvPr/>
+        </p:nvSpPr>
+        <p:spPr>
+          <a:xfrm>
+            <a:off x="1270106" y="1077686"/>
+            <a:ext cx="7284629" cy="4691743"/>
+          </a:xfrm>
+          <a:prstGeom prst="rect">
+            <a:avLst/>
+          </a:prstGeom>
+          <a:solidFill>
+            <a:schemeClr val="accent6">
+              <a:lumMod val="20000"/>
+              <a:lumOff val="80000"/>
+            </a:schemeClr>
+          </a:solidFill>
+          <a:ln>
+            <a:noFill/>
+          </a:ln>
+        </p:spPr>
+        <p:style>
+          <a:lnRef idx="2">
+            <a:schemeClr val="accent1">
+              <a:shade val="50000"/>
+            </a:schemeClr>
+          </a:lnRef>
+          <a:fillRef idx="1">
+            <a:schemeClr val="accent1"/>
+          </a:fillRef>
+          <a:effectRef idx="0">
+            <a:schemeClr val="accent1"/>
+          </a:effectRef>
+          <a:fontRef idx="minor">
+            <a:schemeClr val="lt1"/>
+          </a:fontRef>
+        </p:style>
+        <p:txBody>
+          <a:bodyPr rtlCol="0" anchor="ctr"/>
+          <a:lstStyle/>
+          <a:p>
+            <a:pPr algn="ctr"/>
+            <a:endParaRPr lang="zh-TW" altLang="en-US" sz="3000"/>
+          </a:p>
+        </p:txBody>
+      </p:sp>
+      <p:sp>
+        <p:nvSpPr>
+          <p:cNvPr id="111" name="橢圓 110">
+            <a:extLst>
+              <a:ext uri="{FF2B5EF4-FFF2-40B4-BE49-F238E27FC236}">
+                <a16:creationId xmlns:a16="http://schemas.microsoft.com/office/drawing/2014/main" id="{2137C916-6667-4FFF-A41C-405BAC6B5634}"/>
+              </a:ext>
+            </a:extLst>
+          </p:cNvPr>
+          <p:cNvSpPr/>
+          <p:nvPr/>
+        </p:nvSpPr>
+        <p:spPr>
+          <a:xfrm>
+            <a:off x="884645" y="1085951"/>
+            <a:ext cx="786232" cy="4692549"/>
+          </a:xfrm>
+          <a:prstGeom prst="ellipse">
+            <a:avLst/>
+          </a:prstGeom>
+          <a:solidFill>
+            <a:srgbClr val="A9D18E">
+              <a:alpha val="89804"/>
+            </a:srgbClr>
+          </a:solidFill>
+          <a:ln w="19050">
+            <a:solidFill>
+              <a:schemeClr val="accent6">
+                <a:lumMod val="60000"/>
+                <a:lumOff val="40000"/>
+              </a:schemeClr>
+            </a:solidFill>
+          </a:ln>
+        </p:spPr>
+        <p:style>
+          <a:lnRef idx="2">
+            <a:schemeClr val="accent1">
+              <a:shade val="50000"/>
+            </a:schemeClr>
+          </a:lnRef>
+          <a:fillRef idx="1">
+            <a:schemeClr val="accent1"/>
+          </a:fillRef>
+          <a:effectRef idx="0">
+            <a:schemeClr val="accent1"/>
+          </a:effectRef>
+          <a:fontRef idx="minor">
+            <a:schemeClr val="lt1"/>
+          </a:fontRef>
+        </p:style>
+        <p:txBody>
+          <a:bodyPr rtlCol="0" anchor="ctr"/>
+          <a:lstStyle/>
+          <a:p>
+            <a:pPr algn="ctr"/>
+            <a:endParaRPr lang="zh-TW" altLang="en-US" sz="3000"/>
+          </a:p>
+        </p:txBody>
+      </p:sp>
+      <p:cxnSp>
+        <p:nvCxnSpPr>
+          <p:cNvPr id="59" name="直線接點 58">
+            <a:extLst>
+              <a:ext uri="{FF2B5EF4-FFF2-40B4-BE49-F238E27FC236}">
+                <a16:creationId xmlns:a16="http://schemas.microsoft.com/office/drawing/2014/main" id="{6E6FC3A0-2C5E-4EC4-B60C-A05C6275A81F}"/>
+              </a:ext>
+            </a:extLst>
+          </p:cNvPr>
+          <p:cNvCxnSpPr>
+            <a:cxnSpLocks/>
+          </p:cNvCxnSpPr>
+          <p:nvPr/>
+        </p:nvCxnSpPr>
+        <p:spPr>
+          <a:xfrm>
+            <a:off x="3311526" y="3429000"/>
+            <a:ext cx="1651000" cy="0"/>
+          </a:xfrm>
+          <a:prstGeom prst="line">
+            <a:avLst/>
+          </a:prstGeom>
+          <a:ln w="76200"/>
+        </p:spPr>
+        <p:style>
+          <a:lnRef idx="3">
+            <a:schemeClr val="dk1"/>
+          </a:lnRef>
+          <a:fillRef idx="0">
+            <a:schemeClr val="dk1"/>
+          </a:fillRef>
+          <a:effectRef idx="2">
+            <a:schemeClr val="dk1"/>
+          </a:effectRef>
+          <a:fontRef idx="minor">
+            <a:schemeClr val="tx1"/>
+          </a:fontRef>
+        </p:style>
+      </p:cxnSp>
+      <p:cxnSp>
+        <p:nvCxnSpPr>
+          <p:cNvPr id="19" name="直線接點 18">
+            <a:extLst>
+              <a:ext uri="{FF2B5EF4-FFF2-40B4-BE49-F238E27FC236}">
+                <a16:creationId xmlns:a16="http://schemas.microsoft.com/office/drawing/2014/main" id="{6C2D4660-D1A2-4677-86DE-0633B0DFFD9A}"/>
+              </a:ext>
+            </a:extLst>
+          </p:cNvPr>
+          <p:cNvCxnSpPr>
+            <a:cxnSpLocks/>
+          </p:cNvCxnSpPr>
+          <p:nvPr/>
+        </p:nvCxnSpPr>
+        <p:spPr>
+          <a:xfrm>
+            <a:off x="5965868" y="3429000"/>
+            <a:ext cx="1266825" cy="0"/>
+          </a:xfrm>
+          <a:prstGeom prst="line">
+            <a:avLst/>
+          </a:prstGeom>
+          <a:ln w="76200"/>
+        </p:spPr>
+        <p:style>
+          <a:lnRef idx="3">
+            <a:schemeClr val="dk1"/>
+          </a:lnRef>
+          <a:fillRef idx="0">
+            <a:schemeClr val="dk1"/>
+          </a:fillRef>
+          <a:effectRef idx="2">
+            <a:schemeClr val="dk1"/>
+          </a:effectRef>
+          <a:fontRef idx="minor">
+            <a:schemeClr val="tx1"/>
+          </a:fontRef>
+        </p:style>
+      </p:cxnSp>
+      <p:sp>
+        <p:nvSpPr>
+          <p:cNvPr id="17" name="橢圓 16">
+            <a:extLst>
+              <a:ext uri="{FF2B5EF4-FFF2-40B4-BE49-F238E27FC236}">
+                <a16:creationId xmlns:a16="http://schemas.microsoft.com/office/drawing/2014/main" id="{90830E2C-DE3E-4AE3-A613-211048D23F14}"/>
+              </a:ext>
+            </a:extLst>
+          </p:cNvPr>
+          <p:cNvSpPr/>
+          <p:nvPr/>
+        </p:nvSpPr>
+        <p:spPr>
+          <a:xfrm>
+            <a:off x="4659738" y="2008826"/>
+            <a:ext cx="586521" cy="2817849"/>
+          </a:xfrm>
+          <a:prstGeom prst="ellipse">
+            <a:avLst/>
+          </a:prstGeom>
+          <a:solidFill>
+            <a:srgbClr val="A9D18E">
+              <a:alpha val="89804"/>
+            </a:srgbClr>
+          </a:solidFill>
+          <a:ln w="19050">
+            <a:solidFill>
+              <a:schemeClr val="accent6">
+                <a:lumMod val="60000"/>
+                <a:lumOff val="40000"/>
+              </a:schemeClr>
+            </a:solidFill>
+          </a:ln>
+        </p:spPr>
+        <p:style>
+          <a:lnRef idx="2">
+            <a:schemeClr val="accent1">
+              <a:shade val="50000"/>
+            </a:schemeClr>
+          </a:lnRef>
+          <a:fillRef idx="1">
+            <a:schemeClr val="accent1"/>
+          </a:fillRef>
+          <a:effectRef idx="0">
+            <a:schemeClr val="accent1"/>
+          </a:effectRef>
+          <a:fontRef idx="minor">
+            <a:schemeClr val="lt1"/>
+          </a:fontRef>
+        </p:style>
+        <p:txBody>
+          <a:bodyPr rtlCol="0" anchor="ctr"/>
+          <a:lstStyle/>
+          <a:p>
+            <a:pPr algn="ctr"/>
+            <a:endParaRPr lang="zh-TW" altLang="en-US" sz="3000"/>
+          </a:p>
+        </p:txBody>
+      </p:sp>
+      <p:cxnSp>
+        <p:nvCxnSpPr>
+          <p:cNvPr id="6" name="直線接點 5">
+            <a:extLst>
+              <a:ext uri="{FF2B5EF4-FFF2-40B4-BE49-F238E27FC236}">
+                <a16:creationId xmlns:a16="http://schemas.microsoft.com/office/drawing/2014/main" id="{BFDF8180-D973-4531-888B-47BCA1EC6932}"/>
+              </a:ext>
+            </a:extLst>
+          </p:cNvPr>
+          <p:cNvCxnSpPr>
+            <a:cxnSpLocks/>
+          </p:cNvCxnSpPr>
+          <p:nvPr/>
+        </p:nvCxnSpPr>
+        <p:spPr>
+          <a:xfrm>
+            <a:off x="4944500" y="2008826"/>
+            <a:ext cx="0" cy="1402550"/>
+          </a:xfrm>
+          <a:prstGeom prst="line">
+            <a:avLst/>
+          </a:prstGeom>
+          <a:ln w="28575">
+            <a:headEnd type="stealth" w="lg" len="lg"/>
+            <a:tailEnd type="stealth" w="lg" len="lg"/>
+          </a:ln>
+        </p:spPr>
+        <p:style>
+          <a:lnRef idx="3">
+            <a:schemeClr val="dk1"/>
+          </a:lnRef>
+          <a:fillRef idx="0">
+            <a:schemeClr val="dk1"/>
+          </a:fillRef>
+          <a:effectRef idx="2">
+            <a:schemeClr val="dk1"/>
+          </a:effectRef>
+          <a:fontRef idx="minor">
+            <a:schemeClr val="tx1"/>
+          </a:fontRef>
+        </p:style>
+      </p:cxnSp>
+      <p:sp>
+        <p:nvSpPr>
+          <p:cNvPr id="9" name="弧形 8">
+            <a:extLst>
+              <a:ext uri="{FF2B5EF4-FFF2-40B4-BE49-F238E27FC236}">
+                <a16:creationId xmlns:a16="http://schemas.microsoft.com/office/drawing/2014/main" id="{F5073DF3-23A2-4756-8038-D7CF848DEAE1}"/>
+              </a:ext>
+            </a:extLst>
+          </p:cNvPr>
+          <p:cNvSpPr/>
+          <p:nvPr/>
+        </p:nvSpPr>
+        <p:spPr>
+          <a:xfrm rot="8100000">
+            <a:off x="-2651116" y="-13197559"/>
+            <a:ext cx="15208232" cy="15208232"/>
+          </a:xfrm>
+          <a:prstGeom prst="arc">
+            <a:avLst>
+              <a:gd name="adj1" fmla="val 17201135"/>
+              <a:gd name="adj2" fmla="val 20629779"/>
+            </a:avLst>
+          </a:prstGeom>
+          <a:solidFill>
+            <a:schemeClr val="bg1"/>
+          </a:solidFill>
+          <a:ln w="38100">
+            <a:solidFill>
+              <a:schemeClr val="accent6">
+                <a:lumMod val="50000"/>
+              </a:schemeClr>
+            </a:solidFill>
+          </a:ln>
+        </p:spPr>
+        <p:style>
+          <a:lnRef idx="1">
+            <a:schemeClr val="accent1"/>
+          </a:lnRef>
+          <a:fillRef idx="0">
+            <a:schemeClr val="accent1"/>
+          </a:fillRef>
+          <a:effectRef idx="0">
+            <a:schemeClr val="accent1"/>
+          </a:effectRef>
+          <a:fontRef idx="minor">
+            <a:schemeClr val="tx1"/>
+          </a:fontRef>
+        </p:style>
+        <p:txBody>
+          <a:bodyPr rtlCol="0" anchor="ctr"/>
+          <a:lstStyle/>
+          <a:p>
+            <a:pPr algn="ctr"/>
+            <a:endParaRPr lang="zh-TW" altLang="en-US" dirty="0"/>
+          </a:p>
+        </p:txBody>
+      </p:sp>
+      <p:sp>
+        <p:nvSpPr>
+          <p:cNvPr id="10" name="弧形 9">
+            <a:extLst>
+              <a:ext uri="{FF2B5EF4-FFF2-40B4-BE49-F238E27FC236}">
+                <a16:creationId xmlns:a16="http://schemas.microsoft.com/office/drawing/2014/main" id="{CBA5609A-9B95-4347-99D9-C84C3C7CD5E2}"/>
+              </a:ext>
+            </a:extLst>
+          </p:cNvPr>
+          <p:cNvSpPr/>
+          <p:nvPr/>
+        </p:nvSpPr>
+        <p:spPr>
+          <a:xfrm rot="18900000">
+            <a:off x="-2651116" y="4847327"/>
+            <a:ext cx="15208232" cy="15208232"/>
+          </a:xfrm>
+          <a:prstGeom prst="arc">
+            <a:avLst>
+              <a:gd name="adj1" fmla="val 17176439"/>
+              <a:gd name="adj2" fmla="val 20608746"/>
+            </a:avLst>
+          </a:prstGeom>
+          <a:solidFill>
+            <a:schemeClr val="bg1"/>
+          </a:solidFill>
+          <a:ln w="38100">
+            <a:solidFill>
+              <a:schemeClr val="accent6">
+                <a:lumMod val="50000"/>
+              </a:schemeClr>
+            </a:solidFill>
+          </a:ln>
+        </p:spPr>
+        <p:style>
+          <a:lnRef idx="1">
+            <a:schemeClr val="accent1"/>
+          </a:lnRef>
+          <a:fillRef idx="0">
+            <a:schemeClr val="accent1"/>
+          </a:fillRef>
+          <a:effectRef idx="0">
+            <a:schemeClr val="accent1"/>
+          </a:effectRef>
+          <a:fontRef idx="minor">
+            <a:schemeClr val="tx1"/>
+          </a:fontRef>
+        </p:style>
+        <p:txBody>
+          <a:bodyPr rtlCol="0" anchor="ctr"/>
+          <a:lstStyle/>
+          <a:p>
+            <a:pPr algn="ctr"/>
+            <a:endParaRPr lang="zh-TW" altLang="en-US"/>
+          </a:p>
+        </p:txBody>
+      </p:sp>
+      <p:sp>
+        <p:nvSpPr>
+          <p:cNvPr id="26" name="橢圓 25">
+            <a:extLst>
+              <a:ext uri="{FF2B5EF4-FFF2-40B4-BE49-F238E27FC236}">
+                <a16:creationId xmlns:a16="http://schemas.microsoft.com/office/drawing/2014/main" id="{6E8902BF-302C-4A00-BDDE-9B309F26A9FB}"/>
+              </a:ext>
+            </a:extLst>
+          </p:cNvPr>
+          <p:cNvSpPr/>
+          <p:nvPr/>
+        </p:nvSpPr>
+        <p:spPr>
+          <a:xfrm>
+            <a:off x="6944801" y="1684376"/>
+            <a:ext cx="586521" cy="3500596"/>
+          </a:xfrm>
+          <a:prstGeom prst="ellipse">
+            <a:avLst/>
+          </a:prstGeom>
+          <a:solidFill>
+            <a:srgbClr val="A9D18E">
+              <a:alpha val="89804"/>
+            </a:srgbClr>
+          </a:solidFill>
+          <a:ln w="19050">
+            <a:solidFill>
+              <a:schemeClr val="accent6">
+                <a:lumMod val="60000"/>
+                <a:lumOff val="40000"/>
+              </a:schemeClr>
+            </a:solidFill>
+          </a:ln>
+        </p:spPr>
+        <p:style>
+          <a:lnRef idx="2">
+            <a:schemeClr val="accent1">
+              <a:shade val="50000"/>
+            </a:schemeClr>
+          </a:lnRef>
+          <a:fillRef idx="1">
+            <a:schemeClr val="accent1"/>
+          </a:fillRef>
+          <a:effectRef idx="0">
+            <a:schemeClr val="accent1"/>
+          </a:effectRef>
+          <a:fontRef idx="minor">
+            <a:schemeClr val="lt1"/>
+          </a:fontRef>
+        </p:style>
+        <p:txBody>
+          <a:bodyPr rtlCol="0" anchor="ctr"/>
+          <a:lstStyle/>
+          <a:p>
+            <a:pPr algn="ctr"/>
+            <a:endParaRPr lang="zh-TW" altLang="en-US" sz="3000"/>
+          </a:p>
+        </p:txBody>
+      </p:sp>
+      <p:cxnSp>
+        <p:nvCxnSpPr>
+          <p:cNvPr id="27" name="直線接點 26">
+            <a:extLst>
+              <a:ext uri="{FF2B5EF4-FFF2-40B4-BE49-F238E27FC236}">
+                <a16:creationId xmlns:a16="http://schemas.microsoft.com/office/drawing/2014/main" id="{B1FA0C3E-1A5F-4D3E-8CD1-52827CCD535A}"/>
+              </a:ext>
+            </a:extLst>
+          </p:cNvPr>
+          <p:cNvCxnSpPr>
+            <a:cxnSpLocks/>
+          </p:cNvCxnSpPr>
+          <p:nvPr/>
+        </p:nvCxnSpPr>
+        <p:spPr>
+          <a:xfrm>
+            <a:off x="7229563" y="1684376"/>
+            <a:ext cx="0" cy="1742378"/>
+          </a:xfrm>
+          <a:prstGeom prst="line">
+            <a:avLst/>
+          </a:prstGeom>
+          <a:ln w="28575">
+            <a:headEnd type="stealth" w="lg" len="lg"/>
+            <a:tailEnd type="stealth" w="lg" len="lg"/>
+          </a:ln>
+        </p:spPr>
+        <p:style>
+          <a:lnRef idx="3">
+            <a:schemeClr val="dk1"/>
+          </a:lnRef>
+          <a:fillRef idx="0">
+            <a:schemeClr val="dk1"/>
+          </a:fillRef>
+          <a:effectRef idx="2">
+            <a:schemeClr val="dk1"/>
+          </a:effectRef>
+          <a:fontRef idx="minor">
+            <a:schemeClr val="tx1"/>
+          </a:fontRef>
+        </p:style>
+      </p:cxnSp>
+      <p:cxnSp>
+        <p:nvCxnSpPr>
+          <p:cNvPr id="32" name="直線接點 31">
+            <a:extLst>
+              <a:ext uri="{FF2B5EF4-FFF2-40B4-BE49-F238E27FC236}">
+                <a16:creationId xmlns:a16="http://schemas.microsoft.com/office/drawing/2014/main" id="{52379982-8561-452E-9BC3-8E4CE84D2F57}"/>
+              </a:ext>
+            </a:extLst>
+          </p:cNvPr>
+          <p:cNvCxnSpPr>
+            <a:cxnSpLocks/>
+          </p:cNvCxnSpPr>
+          <p:nvPr/>
+        </p:nvCxnSpPr>
+        <p:spPr>
+          <a:xfrm>
+            <a:off x="4946058" y="3429000"/>
+            <a:ext cx="1055370" cy="0"/>
+          </a:xfrm>
+          <a:prstGeom prst="line">
+            <a:avLst/>
+          </a:prstGeom>
+          <a:ln w="76200"/>
+        </p:spPr>
+        <p:style>
+          <a:lnRef idx="3">
+            <a:schemeClr val="dk1"/>
+          </a:lnRef>
+          <a:fillRef idx="0">
+            <a:schemeClr val="dk1"/>
+          </a:fillRef>
+          <a:effectRef idx="2">
+            <a:schemeClr val="dk1"/>
+          </a:effectRef>
+          <a:fontRef idx="minor">
+            <a:schemeClr val="tx1"/>
+          </a:fontRef>
+        </p:style>
+      </p:cxnSp>
+      <mc:AlternateContent xmlns:mc="http://schemas.openxmlformats.org/markup-compatibility/2006" xmlns:a14="http://schemas.microsoft.com/office/drawing/2010/main">
+        <mc:Choice Requires="a14">
+          <p:sp>
+            <p:nvSpPr>
+              <p:cNvPr id="35" name="文字方塊 34">
+                <a:extLst>
+                  <a:ext uri="{FF2B5EF4-FFF2-40B4-BE49-F238E27FC236}">
+                    <a16:creationId xmlns:a16="http://schemas.microsoft.com/office/drawing/2014/main" id="{796B1F44-B09F-4626-B7CB-445AF6BC9BC7}"/>
+                  </a:ext>
+                </a:extLst>
+              </p:cNvPr>
+              <p:cNvSpPr txBox="1"/>
+              <p:nvPr/>
+            </p:nvSpPr>
+            <p:spPr>
+              <a:xfrm>
+                <a:off x="4110288" y="2132232"/>
+                <a:ext cx="568301" cy="553998"/>
+              </a:xfrm>
+              <a:prstGeom prst="rect">
+                <a:avLst/>
+              </a:prstGeom>
+              <a:noFill/>
+            </p:spPr>
+            <p:txBody>
+              <a:bodyPr wrap="square" rtlCol="0">
+                <a:spAutoFit/>
+              </a:bodyPr>
+              <a:lstStyle/>
+              <a:p>
+                <a:pPr/>
+                <a14:m>
+                  <m:oMathPara xmlns:m="http://schemas.openxmlformats.org/officeDocument/2006/math">
+                    <m:oMathParaPr>
+                      <m:jc m:val="centerGroup"/>
+                    </m:oMathParaPr>
+                    <m:oMath xmlns:m="http://schemas.openxmlformats.org/officeDocument/2006/math">
+                      <m:sSub>
+                        <m:sSubPr>
+                          <m:ctrlPr>
+                            <a:rPr lang="en-US" altLang="zh-TW" sz="3000" b="0" i="1" smtClean="0">
+                              <a:latin typeface="Cambria Math" panose="02040503050406030204" pitchFamily="18" charset="0"/>
+                            </a:rPr>
+                          </m:ctrlPr>
+                        </m:sSubPr>
+                        <m:e>
+                          <m:r>
+                            <a:rPr lang="en-US" altLang="zh-TW" sz="3000" b="0" i="1" smtClean="0">
+                              <a:latin typeface="Cambria Math" panose="02040503050406030204" pitchFamily="18" charset="0"/>
+                            </a:rPr>
+                            <m:t>𝑊</m:t>
+                          </m:r>
+                        </m:e>
+                        <m:sub>
+                          <m:r>
+                            <a:rPr lang="en-US" altLang="zh-TW" sz="3000" b="0" i="1" smtClean="0">
+                              <a:latin typeface="Cambria Math" panose="02040503050406030204" pitchFamily="18" charset="0"/>
+                            </a:rPr>
+                            <m:t>0</m:t>
+                          </m:r>
+                        </m:sub>
+                      </m:sSub>
+                    </m:oMath>
+                  </m:oMathPara>
+                </a14:m>
+                <a:endParaRPr lang="zh-TW" altLang="en-US" sz="3000" dirty="0"/>
+              </a:p>
+            </p:txBody>
+          </p:sp>
+        </mc:Choice>
+        <mc:Fallback xmlns="">
+          <p:sp>
+            <p:nvSpPr>
+              <p:cNvPr id="35" name="文字方塊 34">
+                <a:extLst>
+                  <a:ext uri="{FF2B5EF4-FFF2-40B4-BE49-F238E27FC236}">
+                    <a16:creationId xmlns:a16="http://schemas.microsoft.com/office/drawing/2014/main" id="{796B1F44-B09F-4626-B7CB-445AF6BC9BC7}"/>
+                  </a:ext>
+                </a:extLst>
+              </p:cNvPr>
+              <p:cNvSpPr txBox="1">
+                <a:spLocks noRot="1" noChangeAspect="1" noMove="1" noResize="1" noEditPoints="1" noAdjustHandles="1" noChangeArrowheads="1" noChangeShapeType="1" noTextEdit="1"/>
+              </p:cNvSpPr>
+              <p:nvPr/>
+            </p:nvSpPr>
+            <p:spPr>
+              <a:xfrm>
+                <a:off x="4110288" y="2132232"/>
+                <a:ext cx="568301" cy="553998"/>
+              </a:xfrm>
+              <a:prstGeom prst="rect">
+                <a:avLst/>
+              </a:prstGeom>
+              <a:blipFill>
+                <a:blip r:embed="rId2"/>
+                <a:stretch>
+                  <a:fillRect/>
+                </a:stretch>
+              </a:blipFill>
+            </p:spPr>
+            <p:txBody>
+              <a:bodyPr/>
+              <a:lstStyle/>
+              <a:p>
+                <a:r>
+                  <a:rPr lang="zh-TW" altLang="en-US">
+                    <a:noFill/>
+                  </a:rPr>
+                  <a:t> </a:t>
+                </a:r>
+              </a:p>
+            </p:txBody>
+          </p:sp>
+        </mc:Fallback>
+      </mc:AlternateContent>
+      <mc:AlternateContent xmlns:mc="http://schemas.openxmlformats.org/markup-compatibility/2006" xmlns:a14="http://schemas.microsoft.com/office/drawing/2010/main">
+        <mc:Choice Requires="a14">
+          <p:sp>
+            <p:nvSpPr>
+              <p:cNvPr id="36" name="文字方塊 35">
+                <a:extLst>
+                  <a:ext uri="{FF2B5EF4-FFF2-40B4-BE49-F238E27FC236}">
+                    <a16:creationId xmlns:a16="http://schemas.microsoft.com/office/drawing/2014/main" id="{AF7126EC-0532-417A-A93F-D8204B33F933}"/>
+                  </a:ext>
+                </a:extLst>
+              </p:cNvPr>
+              <p:cNvSpPr txBox="1"/>
+              <p:nvPr/>
+            </p:nvSpPr>
+            <p:spPr>
+              <a:xfrm>
+                <a:off x="5958624" y="2108668"/>
+                <a:ext cx="962854" cy="608436"/>
+              </a:xfrm>
+              <a:prstGeom prst="rect">
+                <a:avLst/>
+              </a:prstGeom>
+              <a:noFill/>
+            </p:spPr>
+            <p:txBody>
+              <a:bodyPr wrap="square" rtlCol="0">
+                <a:spAutoFit/>
+              </a:bodyPr>
+              <a:lstStyle/>
+              <a:p>
+                <a:pPr/>
+                <a14:m>
+                  <m:oMathPara xmlns:m="http://schemas.openxmlformats.org/officeDocument/2006/math">
+                    <m:oMathParaPr>
+                      <m:jc m:val="centerGroup"/>
+                    </m:oMathParaPr>
+                    <m:oMath xmlns:m="http://schemas.openxmlformats.org/officeDocument/2006/math">
+                      <m:rad>
+                        <m:radPr>
+                          <m:degHide m:val="on"/>
+                          <m:ctrlPr>
+                            <a:rPr lang="en-US" altLang="zh-TW" sz="3000" b="0" i="1" smtClean="0">
+                              <a:latin typeface="Cambria Math" panose="02040503050406030204" pitchFamily="18" charset="0"/>
+                            </a:rPr>
+                          </m:ctrlPr>
+                        </m:radPr>
+                        <m:deg/>
+                        <m:e>
+                          <m:r>
+                            <a:rPr lang="en-US" altLang="zh-TW" sz="3000" b="0" i="1" smtClean="0">
+                              <a:latin typeface="Cambria Math" panose="02040503050406030204" pitchFamily="18" charset="0"/>
+                            </a:rPr>
+                            <m:t>2</m:t>
+                          </m:r>
+                        </m:e>
+                      </m:rad>
+                      <m:sSub>
+                        <m:sSubPr>
+                          <m:ctrlPr>
+                            <a:rPr lang="en-US" altLang="zh-TW" sz="3000" b="0" i="1" smtClean="0">
+                              <a:latin typeface="Cambria Math" panose="02040503050406030204" pitchFamily="18" charset="0"/>
+                            </a:rPr>
+                          </m:ctrlPr>
+                        </m:sSubPr>
+                        <m:e>
+                          <m:r>
+                            <a:rPr lang="en-US" altLang="zh-TW" sz="3000" b="0" i="1" smtClean="0">
+                              <a:latin typeface="Cambria Math" panose="02040503050406030204" pitchFamily="18" charset="0"/>
+                            </a:rPr>
+                            <m:t>𝑊</m:t>
+                          </m:r>
+                        </m:e>
+                        <m:sub>
+                          <m:r>
+                            <a:rPr lang="en-US" altLang="zh-TW" sz="3000" b="0" i="1" smtClean="0">
+                              <a:latin typeface="Cambria Math" panose="02040503050406030204" pitchFamily="18" charset="0"/>
+                            </a:rPr>
+                            <m:t>0</m:t>
+                          </m:r>
+                        </m:sub>
+                      </m:sSub>
+                    </m:oMath>
+                  </m:oMathPara>
+                </a14:m>
+                <a:endParaRPr lang="zh-TW" altLang="en-US" sz="3000" dirty="0"/>
+              </a:p>
+            </p:txBody>
+          </p:sp>
+        </mc:Choice>
+        <mc:Fallback xmlns="">
+          <p:sp>
+            <p:nvSpPr>
+              <p:cNvPr id="36" name="文字方塊 35">
+                <a:extLst>
+                  <a:ext uri="{FF2B5EF4-FFF2-40B4-BE49-F238E27FC236}">
+                    <a16:creationId xmlns:a16="http://schemas.microsoft.com/office/drawing/2014/main" id="{AF7126EC-0532-417A-A93F-D8204B33F933}"/>
+                  </a:ext>
+                </a:extLst>
+              </p:cNvPr>
+              <p:cNvSpPr txBox="1">
+                <a:spLocks noRot="1" noChangeAspect="1" noMove="1" noResize="1" noEditPoints="1" noAdjustHandles="1" noChangeArrowheads="1" noChangeShapeType="1" noTextEdit="1"/>
+              </p:cNvSpPr>
+              <p:nvPr/>
+            </p:nvSpPr>
+            <p:spPr>
+              <a:xfrm>
+                <a:off x="5958624" y="2108668"/>
+                <a:ext cx="962854" cy="608436"/>
+              </a:xfrm>
+              <a:prstGeom prst="rect">
+                <a:avLst/>
+              </a:prstGeom>
+              <a:blipFill>
+                <a:blip r:embed="rId3"/>
+                <a:stretch>
+                  <a:fillRect r="-5696"/>
+                </a:stretch>
+              </a:blipFill>
+            </p:spPr>
+            <p:txBody>
+              <a:bodyPr/>
+              <a:lstStyle/>
+              <a:p>
+                <a:r>
+                  <a:rPr lang="zh-TW" altLang="en-US">
+                    <a:noFill/>
+                  </a:rPr>
+                  <a:t> </a:t>
+                </a:r>
+              </a:p>
+            </p:txBody>
+          </p:sp>
+        </mc:Fallback>
+      </mc:AlternateContent>
+      <mc:AlternateContent xmlns:mc="http://schemas.openxmlformats.org/markup-compatibility/2006" xmlns:a14="http://schemas.microsoft.com/office/drawing/2010/main">
+        <mc:Choice Requires="a14">
+          <p:sp>
+            <p:nvSpPr>
+              <p:cNvPr id="39" name="文字方塊 38">
+                <a:extLst>
+                  <a:ext uri="{FF2B5EF4-FFF2-40B4-BE49-F238E27FC236}">
+                    <a16:creationId xmlns:a16="http://schemas.microsoft.com/office/drawing/2014/main" id="{7167E6B3-CFA2-4D29-B4B1-E6294D63FC32}"/>
+                  </a:ext>
+                </a:extLst>
+              </p:cNvPr>
+              <p:cNvSpPr txBox="1"/>
+              <p:nvPr/>
+            </p:nvSpPr>
+            <p:spPr>
+              <a:xfrm>
+                <a:off x="5809421" y="3485938"/>
+                <a:ext cx="641500" cy="553998"/>
+              </a:xfrm>
+              <a:prstGeom prst="rect">
+                <a:avLst/>
+              </a:prstGeom>
+              <a:noFill/>
+            </p:spPr>
+            <p:txBody>
+              <a:bodyPr wrap="square" rtlCol="0">
+                <a:spAutoFit/>
+              </a:bodyPr>
+              <a:lstStyle/>
+              <a:p>
+                <a:pPr/>
+                <a14:m>
+                  <m:oMathPara xmlns:m="http://schemas.openxmlformats.org/officeDocument/2006/math">
+                    <m:oMathParaPr>
+                      <m:jc m:val="centerGroup"/>
+                    </m:oMathParaPr>
+                    <m:oMath xmlns:m="http://schemas.openxmlformats.org/officeDocument/2006/math">
+                      <m:sSub>
+                        <m:sSubPr>
+                          <m:ctrlPr>
+                            <a:rPr lang="en-US" altLang="zh-TW" sz="3000" b="0" i="1" smtClean="0">
+                              <a:latin typeface="Cambria Math" panose="02040503050406030204" pitchFamily="18" charset="0"/>
+                            </a:rPr>
+                          </m:ctrlPr>
+                        </m:sSubPr>
+                        <m:e>
+                          <m:r>
+                            <a:rPr lang="en-US" altLang="zh-TW" sz="3000" b="0" i="1" smtClean="0">
+                              <a:latin typeface="Cambria Math" panose="02040503050406030204" pitchFamily="18" charset="0"/>
+                            </a:rPr>
+                            <m:t>𝑧</m:t>
+                          </m:r>
+                        </m:e>
+                        <m:sub>
+                          <m:r>
+                            <a:rPr lang="en-US" altLang="zh-TW" sz="3000" b="0" i="1" smtClean="0">
+                              <a:latin typeface="Cambria Math" panose="02040503050406030204" pitchFamily="18" charset="0"/>
+                            </a:rPr>
+                            <m:t>𝑅</m:t>
+                          </m:r>
+                        </m:sub>
+                      </m:sSub>
+                    </m:oMath>
+                  </m:oMathPara>
+                </a14:m>
+                <a:endParaRPr lang="zh-TW" altLang="en-US" sz="3000" dirty="0"/>
+              </a:p>
+            </p:txBody>
+          </p:sp>
+        </mc:Choice>
+        <mc:Fallback xmlns="">
           <p:sp>
             <p:nvSpPr>
               <p:cNvPr id="39" name="文字方塊 38">
@@ -6385,7 +8676,7 @@
             </p:nvSpPr>
             <p:spPr>
               <a:xfrm>
-                <a:off x="1105953" y="1729101"/>
+                <a:off x="1642982" y="2454816"/>
                 <a:ext cx="499134" cy="553998"/>
               </a:xfrm>
               <a:prstGeom prst="rect">
@@ -6437,7 +8728,7 @@
             </p:nvSpPr>
             <p:spPr>
               <a:xfrm>
-                <a:off x="1105953" y="1729101"/>
+                <a:off x="1642982" y="2454816"/>
                 <a:ext cx="499134" cy="553998"/>
               </a:xfrm>
               <a:prstGeom prst="rect">
@@ -6481,7 +8772,7 @@
             </p:nvSpPr>
             <p:spPr>
               <a:xfrm>
-                <a:off x="541896" y="4015875"/>
+                <a:off x="1035381" y="1193300"/>
                 <a:ext cx="499134" cy="553998"/>
               </a:xfrm>
               <a:prstGeom prst="rect">
@@ -6533,7 +8824,7 @@
             </p:nvSpPr>
             <p:spPr>
               <a:xfrm>
-                <a:off x="541896" y="4015875"/>
+                <a:off x="1035381" y="1193300"/>
                 <a:ext cx="499134" cy="553998"/>
               </a:xfrm>
               <a:prstGeom prst="rect">
@@ -6680,7 +8971,7 @@
             </p:nvSpPr>
             <p:spPr>
               <a:xfrm>
-                <a:off x="732422" y="3137331"/>
+                <a:off x="751472" y="3156381"/>
                 <a:ext cx="568301" cy="553998"/>
               </a:xfrm>
               <a:prstGeom prst="rect">
@@ -6739,7 +9030,7 @@
             </p:nvSpPr>
             <p:spPr>
               <a:xfrm>
-                <a:off x="732422" y="3137331"/>
+                <a:off x="751472" y="3156381"/>
                 <a:ext cx="568301" cy="553998"/>
               </a:xfrm>
               <a:prstGeom prst="rect">
@@ -6787,22 +9078,22 @@
           <a:prstGeom prst="pie">
             <a:avLst>
               <a:gd name="adj1" fmla="val 12729732"/>
-              <a:gd name="adj2" fmla="val 16200000"/>
+              <a:gd name="adj2" fmla="val 18257458"/>
             </a:avLst>
           </a:prstGeom>
           <a:gradFill flip="none" rotWithShape="1">
             <a:gsLst>
               <a:gs pos="0">
-                <a:schemeClr val="accent1"/>
+                <a:schemeClr val="tx1"/>
               </a:gs>
-              <a:gs pos="43000">
-                <a:schemeClr val="accent1">
-                  <a:lumMod val="40000"/>
-                  <a:lumOff val="60000"/>
-                </a:schemeClr>
+              <a:gs pos="21000">
+                <a:srgbClr val="48573E"/>
+              </a:gs>
+              <a:gs pos="92000">
+                <a:schemeClr val="bg1"/>
               </a:gs>
             </a:gsLst>
-            <a:lin ang="13500000" scaled="1"/>
+            <a:lin ang="15300000" scaled="0"/>
             <a:tileRect/>
           </a:gradFill>
           <a:ln w="6350">
@@ -6948,7 +9239,7 @@
             </p:nvSpPr>
             <p:spPr>
               <a:xfrm>
-                <a:off x="865284" y="2679722"/>
+                <a:off x="912962" y="2575101"/>
                 <a:ext cx="568301" cy="553998"/>
               </a:xfrm>
               <a:prstGeom prst="rect">
@@ -7007,7 +9298,7 @@
             </p:nvSpPr>
             <p:spPr>
               <a:xfrm>
-                <a:off x="865284" y="2679722"/>
+                <a:off x="912962" y="2575101"/>
                 <a:ext cx="568301" cy="553998"/>
               </a:xfrm>
               <a:prstGeom prst="rect">
@@ -7095,9 +9386,9 @@
           <p:nvPr/>
         </p:nvCxnSpPr>
         <p:spPr>
-          <a:xfrm flipH="1">
-            <a:off x="895351" y="3417184"/>
-            <a:ext cx="441820" cy="768633"/>
+          <a:xfrm flipV="1">
+            <a:off x="1337171" y="2873829"/>
+            <a:ext cx="361000" cy="543355"/>
           </a:xfrm>
           <a:prstGeom prst="line">
             <a:avLst/>
@@ -7138,8 +9429,8 @@
         </p:nvCxnSpPr>
         <p:spPr>
           <a:xfrm>
-            <a:off x="1333994" y="2166284"/>
-            <a:ext cx="0" cy="1263600"/>
+            <a:off x="1333994" y="1752600"/>
+            <a:ext cx="0" cy="1677284"/>
           </a:xfrm>
           <a:prstGeom prst="line">
             <a:avLst/>
@@ -7292,8 +9583,8 @@
           </p:sp>
         </mc:Fallback>
       </mc:AlternateContent>
-      <mc:AlternateContent xmlns:mc="http://schemas.openxmlformats.org/markup-compatibility/2006">
-        <mc:Choice xmlns:a14="http://schemas.microsoft.com/office/drawing/2010/main" Requires="a14">
+      <mc:AlternateContent xmlns:mc="http://schemas.openxmlformats.org/markup-compatibility/2006" xmlns:a14="http://schemas.microsoft.com/office/drawing/2010/main">
+        <mc:Choice Requires="a14">
           <p:sp>
             <p:nvSpPr>
               <p:cNvPr id="38" name="文字方塊 37">
@@ -7355,7 +9646,7 @@
             </p:txBody>
           </p:sp>
         </mc:Choice>
-        <mc:Fallback>
+        <mc:Fallback xmlns="">
           <p:sp>
             <p:nvSpPr>
               <p:cNvPr id="38" name="文字方塊 37">
@@ -7572,7 +9863,7 @@
     </p:spTree>
     <p:extLst>
       <p:ext uri="{BB962C8B-B14F-4D97-AF65-F5344CB8AC3E}">
-        <p14:creationId xmlns:p14="http://schemas.microsoft.com/office/powerpoint/2010/main" val="214314731"/>
+        <p14:creationId xmlns:p14="http://schemas.microsoft.com/office/powerpoint/2010/main" val="257540531"/>
       </p:ext>
     </p:extLst>
   </p:cSld>

--- a/Final/Figures/Rrange.pptx
+++ b/Final/Figures/Rrange.pptx
@@ -245,7 +245,7 @@
           <a:p>
             <a:fld id="{96B2E576-E176-4636-8106-C6403D35D5FE}" type="datetimeFigureOut">
               <a:rPr lang="zh-TW" altLang="en-US" smtClean="0"/>
-              <a:t>2026/7/2</a:t>
+              <a:t>2026/7/16</a:t>
             </a:fld>
             <a:endParaRPr lang="zh-TW" altLang="en-US"/>
           </a:p>
@@ -415,7 +415,7 @@
           <a:p>
             <a:fld id="{96B2E576-E176-4636-8106-C6403D35D5FE}" type="datetimeFigureOut">
               <a:rPr lang="zh-TW" altLang="en-US" smtClean="0"/>
-              <a:t>2026/7/2</a:t>
+              <a:t>2026/7/16</a:t>
             </a:fld>
             <a:endParaRPr lang="zh-TW" altLang="en-US"/>
           </a:p>
@@ -595,7 +595,7 @@
           <a:p>
             <a:fld id="{96B2E576-E176-4636-8106-C6403D35D5FE}" type="datetimeFigureOut">
               <a:rPr lang="zh-TW" altLang="en-US" smtClean="0"/>
-              <a:t>2026/7/2</a:t>
+              <a:t>2026/7/16</a:t>
             </a:fld>
             <a:endParaRPr lang="zh-TW" altLang="en-US"/>
           </a:p>
@@ -765,7 +765,7 @@
           <a:p>
             <a:fld id="{96B2E576-E176-4636-8106-C6403D35D5FE}" type="datetimeFigureOut">
               <a:rPr lang="zh-TW" altLang="en-US" smtClean="0"/>
-              <a:t>2026/7/2</a:t>
+              <a:t>2026/7/16</a:t>
             </a:fld>
             <a:endParaRPr lang="zh-TW" altLang="en-US"/>
           </a:p>
@@ -1009,7 +1009,7 @@
           <a:p>
             <a:fld id="{96B2E576-E176-4636-8106-C6403D35D5FE}" type="datetimeFigureOut">
               <a:rPr lang="zh-TW" altLang="en-US" smtClean="0"/>
-              <a:t>2026/7/2</a:t>
+              <a:t>2026/7/16</a:t>
             </a:fld>
             <a:endParaRPr lang="zh-TW" altLang="en-US"/>
           </a:p>
@@ -1241,7 +1241,7 @@
           <a:p>
             <a:fld id="{96B2E576-E176-4636-8106-C6403D35D5FE}" type="datetimeFigureOut">
               <a:rPr lang="zh-TW" altLang="en-US" smtClean="0"/>
-              <a:t>2026/7/2</a:t>
+              <a:t>2026/7/16</a:t>
             </a:fld>
             <a:endParaRPr lang="zh-TW" altLang="en-US"/>
           </a:p>
@@ -1608,7 +1608,7 @@
           <a:p>
             <a:fld id="{96B2E576-E176-4636-8106-C6403D35D5FE}" type="datetimeFigureOut">
               <a:rPr lang="zh-TW" altLang="en-US" smtClean="0"/>
-              <a:t>2026/7/2</a:t>
+              <a:t>2026/7/16</a:t>
             </a:fld>
             <a:endParaRPr lang="zh-TW" altLang="en-US"/>
           </a:p>
@@ -1726,7 +1726,7 @@
           <a:p>
             <a:fld id="{96B2E576-E176-4636-8106-C6403D35D5FE}" type="datetimeFigureOut">
               <a:rPr lang="zh-TW" altLang="en-US" smtClean="0"/>
-              <a:t>2026/7/2</a:t>
+              <a:t>2026/7/16</a:t>
             </a:fld>
             <a:endParaRPr lang="zh-TW" altLang="en-US"/>
           </a:p>
@@ -1821,7 +1821,7 @@
           <a:p>
             <a:fld id="{96B2E576-E176-4636-8106-C6403D35D5FE}" type="datetimeFigureOut">
               <a:rPr lang="zh-TW" altLang="en-US" smtClean="0"/>
-              <a:t>2026/7/2</a:t>
+              <a:t>2026/7/16</a:t>
             </a:fld>
             <a:endParaRPr lang="zh-TW" altLang="en-US"/>
           </a:p>
@@ -2098,7 +2098,7 @@
           <a:p>
             <a:fld id="{96B2E576-E176-4636-8106-C6403D35D5FE}" type="datetimeFigureOut">
               <a:rPr lang="zh-TW" altLang="en-US" smtClean="0"/>
-              <a:t>2026/7/2</a:t>
+              <a:t>2026/7/16</a:t>
             </a:fld>
             <a:endParaRPr lang="zh-TW" altLang="en-US"/>
           </a:p>
@@ -2355,7 +2355,7 @@
           <a:p>
             <a:fld id="{96B2E576-E176-4636-8106-C6403D35D5FE}" type="datetimeFigureOut">
               <a:rPr lang="zh-TW" altLang="en-US" smtClean="0"/>
-              <a:t>2026/7/2</a:t>
+              <a:t>2026/7/16</a:t>
             </a:fld>
             <a:endParaRPr lang="zh-TW" altLang="en-US"/>
           </a:p>
@@ -2568,7 +2568,7 @@
           <a:p>
             <a:fld id="{96B2E576-E176-4636-8106-C6403D35D5FE}" type="datetimeFigureOut">
               <a:rPr lang="zh-TW" altLang="en-US" smtClean="0"/>
-              <a:t>2026/7/2</a:t>
+              <a:t>2026/7/16</a:t>
             </a:fld>
             <a:endParaRPr lang="zh-TW" altLang="en-US"/>
           </a:p>
@@ -5204,53 +5204,6 @@
           </a:p>
         </p:txBody>
       </p:sp>
-      <p:sp>
-        <p:nvSpPr>
-          <p:cNvPr id="127" name="左大括弧 126">
-            <a:extLst>
-              <a:ext uri="{FF2B5EF4-FFF2-40B4-BE49-F238E27FC236}">
-                <a16:creationId xmlns:a16="http://schemas.microsoft.com/office/drawing/2014/main" id="{C96F44D7-693E-4719-A3BD-CD7FDCBFE984}"/>
-              </a:ext>
-            </a:extLst>
-          </p:cNvPr>
-          <p:cNvSpPr/>
-          <p:nvPr/>
-        </p:nvSpPr>
-        <p:spPr>
-          <a:xfrm rot="18223053">
-            <a:off x="-1392019" y="2772823"/>
-            <a:ext cx="136524" cy="507475"/>
-          </a:xfrm>
-          <a:prstGeom prst="leftBrace">
-            <a:avLst>
-              <a:gd name="adj1" fmla="val 77070"/>
-              <a:gd name="adj2" fmla="val 50000"/>
-            </a:avLst>
-          </a:prstGeom>
-        </p:spPr>
-        <p:style>
-          <a:lnRef idx="1">
-            <a:schemeClr val="dk1"/>
-          </a:lnRef>
-          <a:fillRef idx="0">
-            <a:schemeClr val="dk1"/>
-          </a:fillRef>
-          <a:effectRef idx="0">
-            <a:schemeClr val="dk1"/>
-          </a:effectRef>
-          <a:fontRef idx="minor">
-            <a:schemeClr val="tx1"/>
-          </a:fontRef>
-        </p:style>
-        <p:txBody>
-          <a:bodyPr rtlCol="0" anchor="ctr"/>
-          <a:lstStyle/>
-          <a:p>
-            <a:pPr algn="ctr"/>
-            <a:endParaRPr lang="zh-TW" altLang="en-US"/>
-          </a:p>
-        </p:txBody>
-      </p:sp>
       <p:pic>
         <p:nvPicPr>
           <p:cNvPr id="135" name="圖片 134">
@@ -8660,8 +8613,8 @@
           </p:style>
         </p:cxnSp>
       </p:grpSp>
-      <mc:AlternateContent xmlns:mc="http://schemas.openxmlformats.org/markup-compatibility/2006">
-        <mc:Choice xmlns:a14="http://schemas.microsoft.com/office/drawing/2010/main" Requires="a14">
+      <mc:AlternateContent xmlns:mc="http://schemas.openxmlformats.org/markup-compatibility/2006" xmlns:a14="http://schemas.microsoft.com/office/drawing/2010/main">
+        <mc:Choice Requires="a14">
           <p:sp>
             <p:nvSpPr>
               <p:cNvPr id="56" name="文字方塊 55">
@@ -8711,7 +8664,7 @@
             </p:txBody>
           </p:sp>
         </mc:Choice>
-        <mc:Fallback>
+        <mc:Fallback xmlns="">
           <p:sp>
             <p:nvSpPr>
               <p:cNvPr id="56" name="文字方塊 55">
@@ -8756,8 +8709,8 @@
           </p:sp>
         </mc:Fallback>
       </mc:AlternateContent>
-      <mc:AlternateContent xmlns:mc="http://schemas.openxmlformats.org/markup-compatibility/2006">
-        <mc:Choice xmlns:a14="http://schemas.microsoft.com/office/drawing/2010/main" Requires="a14">
+      <mc:AlternateContent xmlns:mc="http://schemas.openxmlformats.org/markup-compatibility/2006" xmlns:a14="http://schemas.microsoft.com/office/drawing/2010/main">
+        <mc:Choice Requires="a14">
           <p:sp>
             <p:nvSpPr>
               <p:cNvPr id="57" name="文字方塊 56">
@@ -8807,7 +8760,7 @@
             </p:txBody>
           </p:sp>
         </mc:Choice>
-        <mc:Fallback>
+        <mc:Fallback xmlns="">
           <p:sp>
             <p:nvSpPr>
               <p:cNvPr id="57" name="文字方塊 56">
@@ -8852,8 +8805,8 @@
           </p:sp>
         </mc:Fallback>
       </mc:AlternateContent>
-      <mc:AlternateContent xmlns:mc="http://schemas.openxmlformats.org/markup-compatibility/2006">
-        <mc:Choice xmlns:a14="http://schemas.microsoft.com/office/drawing/2010/main" Requires="a14">
+      <mc:AlternateContent xmlns:mc="http://schemas.openxmlformats.org/markup-compatibility/2006" xmlns:a14="http://schemas.microsoft.com/office/drawing/2010/main">
+        <mc:Choice Requires="a14">
           <p:sp>
             <p:nvSpPr>
               <p:cNvPr id="74" name="文字方塊 73">
@@ -8910,7 +8863,7 @@
             </p:txBody>
           </p:sp>
         </mc:Choice>
-        <mc:Fallback>
+        <mc:Fallback xmlns="">
           <p:sp>
             <p:nvSpPr>
               <p:cNvPr id="74" name="文字方塊 73">
@@ -8955,8 +8908,8 @@
           </p:sp>
         </mc:Fallback>
       </mc:AlternateContent>
-      <mc:AlternateContent xmlns:mc="http://schemas.openxmlformats.org/markup-compatibility/2006">
-        <mc:Choice xmlns:a14="http://schemas.microsoft.com/office/drawing/2010/main" Requires="a14">
+      <mc:AlternateContent xmlns:mc="http://schemas.openxmlformats.org/markup-compatibility/2006" xmlns:a14="http://schemas.microsoft.com/office/drawing/2010/main">
+        <mc:Choice Requires="a14">
           <p:sp>
             <p:nvSpPr>
               <p:cNvPr id="77" name="文字方塊 76">
@@ -9013,7 +8966,7 @@
             </p:txBody>
           </p:sp>
         </mc:Choice>
-        <mc:Fallback>
+        <mc:Fallback xmlns="">
           <p:sp>
             <p:nvSpPr>
               <p:cNvPr id="77" name="文字方塊 76">
@@ -9223,8 +9176,8 @@
           </a:fontRef>
         </p:style>
       </p:cxnSp>
-      <mc:AlternateContent xmlns:mc="http://schemas.openxmlformats.org/markup-compatibility/2006">
-        <mc:Choice xmlns:a14="http://schemas.microsoft.com/office/drawing/2010/main" Requires="a14">
+      <mc:AlternateContent xmlns:mc="http://schemas.openxmlformats.org/markup-compatibility/2006" xmlns:a14="http://schemas.microsoft.com/office/drawing/2010/main">
+        <mc:Choice Requires="a14">
           <p:sp>
             <p:nvSpPr>
               <p:cNvPr id="82" name="文字方塊 81">
@@ -9281,7 +9234,7 @@
             </p:txBody>
           </p:sp>
         </mc:Choice>
-        <mc:Fallback>
+        <mc:Fallback xmlns="">
           <p:sp>
             <p:nvSpPr>
               <p:cNvPr id="82" name="文字方塊 81">
@@ -9455,8 +9408,8 @@
           </a:fontRef>
         </p:style>
       </p:cxnSp>
-      <mc:AlternateContent xmlns:mc="http://schemas.openxmlformats.org/markup-compatibility/2006">
-        <mc:Choice xmlns:a14="http://schemas.microsoft.com/office/drawing/2010/main" Requires="a14">
+      <mc:AlternateContent xmlns:mc="http://schemas.openxmlformats.org/markup-compatibility/2006" xmlns:a14="http://schemas.microsoft.com/office/drawing/2010/main">
+        <mc:Choice Requires="a14">
           <p:sp>
             <p:nvSpPr>
               <p:cNvPr id="98" name="文字方塊 97">
@@ -9538,7 +9491,7 @@
             </p:txBody>
           </p:sp>
         </mc:Choice>
-        <mc:Fallback>
+        <mc:Fallback xmlns="">
           <p:sp>
             <p:nvSpPr>
               <p:cNvPr id="98" name="文字方塊 97">
